--- a/Geschichte_11/Doppelstunde_Test_Quellenanalyse/Folien_Quellenanalyse.pptx
+++ b/Geschichte_11/Doppelstunde_Test_Quellenanalyse/Folien_Quellenanalyse.pptx
@@ -31,9 +31,11 @@
     <p:sldId id="279" r:id="rId25"/>
     <p:sldId id="280" r:id="rId26"/>
     <p:sldId id="281" r:id="rId27"/>
+    <p:sldId id="282" r:id="rId28"/>
+    <p:sldId id="283" r:id="rId29"/>
   </p:sldIdLst>
   <p:notesMasterIdLst>
-    <p:notesMasterId r:id="rId28"/>
+    <p:notesMasterId r:id="rId30"/>
   </p:notesMasterIdLst>
   <p:sldSz cx="9144000" cy="5143500"/>
   <p:notesSz cx="5143500" cy="9144000"/>
@@ -615,7 +617,7 @@
           <a:p>
             <a:r>
               <a:rPr lang="en-US" dirty="0"/>
-              <a:t>12–13 Min. Satz vorlesen, Bausteine zeigen. Warnung vor dem Fehler: Viele schreiben „Augenzeuge“, obwohl der Autor viel später lebte. Prüffragen an 3–4 Schüler: „Woran erkennst du, ob der Autor dabei war?“ (Lebensdaten/Entstehungszeit mit dem Ereignis vergleichen).</a:t>
+              <a:t>11–12 Min. Vormachen an einer anderen Quelle (Solon kennen sie): laut denken. „Wer hat das geschrieben? Solon selbst – also war er dabei. Was für ein Text? Ein Gedicht. Wann? Um 590, kurz nach seinen Reformen. Für wen? Für die Athener. Worüber? Er verteidigt seine Reformen.“</a:t>
             </a:r>
             <a:endParaRPr lang="en-US" dirty="0"/>
           </a:p>
@@ -703,7 +705,7 @@
           <a:p>
             <a:r>
               <a:rPr lang="en-US" dirty="0"/>
-              <a:t>13–17 Min. Erste Anwendung, allein (leicht, alle schaffen sie). Durch die Reihen gehen und mitlesen: Steht „Augenzeuge“ da? Steht die Zeit drin? Folie 12 (Kasten) groß stehen lassen.</a:t>
+              <a:t>12–13 Min. Satz vorlesen, Bausteine zeigen. Warnung vor dem Fehler: Viele schreiben „Augenzeuge“, obwohl der Autor viel später lebte. Prüffragen an 3–4 Schüler: „Woran erkennst du, ob der Autor dabei war?“ (Lebensdaten/Entstehungszeit mit dem Ereignis vergleichen).</a:t>
             </a:r>
             <a:endParaRPr lang="en-US" dirty="0"/>
           </a:p>
@@ -791,7 +793,7 @@
           <a:p>
             <a:r>
               <a:rPr lang="en-US" dirty="0"/>
-              <a:t>Arbeitsgrundlage an die Wand (gekürzt; vollständig auf dem Blatt).</a:t>
+              <a:t>13–17 Min. Erste Anwendung, allein (leicht, alle schaffen sie). Durch die Reihen gehen und mitlesen: Steht „Augenzeuge“ da? Steht die Zeit drin? Folie 12 (Kasten) groß stehen lassen.</a:t>
             </a:r>
             <a:endParaRPr lang="en-US" dirty="0"/>
           </a:p>
@@ -879,7 +881,7 @@
           <a:p>
             <a:r>
               <a:rPr lang="en-US" dirty="0"/>
-              <a:t>17–19 Min. Zwei Schüler lesen ihren Satz vor (unterschiedliches Niveau), dann aufdecken. Vergleichen, im Blatt ergänzen. Gelenkstelle: „Jetzt wissen wir, wer spricht. Als Nächstes: Was sagt er eigentlich?“ Ist etwas unklar, hier nachsteuern, nicht weitergehen.</a:t>
+              <a:t>Arbeitsgrundlage an die Wand (gekürzt; vollständig auf dem Blatt).</a:t>
             </a:r>
             <a:endParaRPr lang="en-US" dirty="0"/>
           </a:p>
@@ -967,7 +969,7 @@
           <a:p>
             <a:r>
               <a:rPr lang="en-US" dirty="0"/>
-              <a:t>19–21 Min. Erklärportion 3: Indirekte Rede zeigt, dass ich wiedergebe, was der Autor sagt – nicht, was stimmt. Prüffragen an 4–6 Schüler: „Mach daraus indirekte Rede: Er teilte die Bürger ein.“ (Er habe die Bürger eingeteilt.) – „Darf ich schreiben: Das war klug von ihm?“ (Nein, erst in Schritt 4).</a:t>
+              <a:t>17–19 Min. Zwei Schüler lesen ihren Satz vor (unterschiedliches Niveau), dann aufdecken. Vergleichen, im Blatt ergänzen. Gelenkstelle: „Jetzt wissen wir, wer spricht. Als Nächstes: Was sagt er eigentlich?“ Ist etwas unklar, hier nachsteuern, nicht weitergehen.</a:t>
             </a:r>
             <a:endParaRPr lang="en-US" dirty="0"/>
           </a:p>
@@ -1055,7 +1057,7 @@
           <a:p>
             <a:r>
               <a:rPr lang="en-US" dirty="0"/>
-              <a:t>21–23 Min. Vormachen, laut denkend: „Zeile 1 bis 4 gehören zusammen: Es geht um den Machtkampf. Wo endet der Abschnitt? Ab Zeile 5 kommt etwas Neues – die Phylen. Was ist der Kern? Kleisthenes gewinnt das Volk. Ich schreibe es in indirekter Rede und setze die Zeilen dahinter.“ Das Beispiel steht schon im Schreibplan (✓).</a:t>
+              <a:t>19–21 Min. Erklärportion 3: Indirekte Rede zeigt, dass ich wiedergebe, was der Autor sagt – nicht, was stimmt. Prüffragen an 4–6 Schüler: „Mach daraus indirekte Rede: Er teilte die Bürger ein.“ (Er habe die Bürger eingeteilt.) – „Darf ich schreiben: Das war klug von ihm?“ (Nein, erst in Schritt 4).</a:t>
             </a:r>
             <a:endParaRPr lang="en-US" dirty="0"/>
           </a:p>
@@ -1143,7 +1145,7 @@
           <a:p>
             <a:r>
               <a:rPr lang="en-US" dirty="0"/>
-              <a:t>23–33 Min. Angeleitet → selbstständig (Teillösungen im Schreibplan werden weniger). Partnerarbeit, beide schreiben. Umhergehen, mitlesen; Stolpersteine und Hilfsimpulse in der Handreichung. Die Quelle steht auf den nächsten Folien groß an der Wand.</a:t>
+              <a:t>21–23 Min. Vormachen, laut denkend: „Zeile 1 bis 4 gehören zusammen: Es geht um den Machtkampf. Wo endet der Abschnitt? Ab Zeile 5 kommt etwas Neues – die Phylen. Was ist der Kern? Kleisthenes gewinnt das Volk. Ich schreibe es in indirekter Rede und setze die Zeilen dahinter.“ Das Beispiel steht schon im Schreibplan (✓).</a:t>
             </a:r>
             <a:endParaRPr lang="en-US" dirty="0"/>
           </a:p>
@@ -1231,7 +1233,7 @@
           <a:p>
             <a:r>
               <a:rPr lang="en-US" dirty="0"/>
-              <a:t>Arbeitsgrundlage an die Wand. Gleicher Wortlaut wie auf dem Blatt.</a:t>
+              <a:t>23–33 Min. Angeleitet → selbstständig (Teillösungen im Schreibplan werden weniger). Partnerarbeit, beide schreiben. Umhergehen, mitlesen; Stolpersteine und Hilfsimpulse in der Handreichung. Die Quelle steht auf den nächsten Folien groß an der Wand.</a:t>
             </a:r>
             <a:endParaRPr lang="en-US" dirty="0"/>
           </a:p>
@@ -1495,7 +1497,7 @@
           <a:p>
             <a:r>
               <a:rPr lang="en-US" dirty="0"/>
-              <a:t>Tests einsammeln. Arbeitsblatt „Quelle und Schreibplan“ austeilen (A4, doppelseitig).</a:t>
+              <a:t>Tests einsammeln. Austeilen: Übersicht „So interpretierst du eine Textquelle“ (für den Hefter) und Arbeitsblatt „Quelle und Schreibplan“ (A4, doppelseitig).</a:t>
             </a:r>
             <a:endParaRPr lang="en-US" dirty="0"/>
           </a:p>
@@ -1583,7 +1585,7 @@
           <a:p>
             <a:r>
               <a:rPr lang="en-US" dirty="0"/>
-              <a:t>33–36 Min. Je Abschnitt ein Paar vom Platz vorlesen lassen, dann aufdecken. Andere Formulierungen sind richtig, wenn Kern, indirekte Rede und Zeilen stimmen.</a:t>
+              <a:t>Arbeitsgrundlage an die Wand. Gleicher Wortlaut wie auf dem Blatt.</a:t>
             </a:r>
             <a:endParaRPr lang="en-US" dirty="0"/>
           </a:p>
@@ -1671,7 +1673,7 @@
           <a:p>
             <a:r>
               <a:rPr lang="en-US" dirty="0"/>
-              <a:t>Vergleichen, im Blatt ergänzen.</a:t>
+              <a:t>33–36 Min. Je Abschnitt ein Paar vom Platz vorlesen lassen, dann aufdecken. Andere Formulierungen sind richtig, wenn Kern, indirekte Rede und Zeilen stimmen.</a:t>
             </a:r>
             <a:endParaRPr lang="en-US" dirty="0"/>
           </a:p>
@@ -1847,7 +1849,7 @@
           <a:p>
             <a:r>
               <a:rPr lang="en-US" dirty="0"/>
-              <a:t>*36–38 Min. Nur bei Zeit, sonst direkt zu Folie 24. Kurz direkt erklären, zwei Prüffragen: „Woher wusste Aristoteles das?“ (aus älteren Schriften) – „Ist die Quelle deshalb wertlos?“ (nein, aber kein Augenzeugenbericht; er deutet die Reform aus seiner Zeit). Schritte 3 und 4 werden in der nächsten Doppelstunde vertieft.</a:t>
+              <a:t>Vergleichen, im Blatt ergänzen.</a:t>
             </a:r>
             <a:endParaRPr lang="en-US" dirty="0"/>
           </a:p>
@@ -1935,7 +1937,7 @@
           <a:p>
             <a:r>
               <a:rPr lang="en-US" dirty="0"/>
-              <a:t>38/40–43 Min. Prüft genau das Ziel (Einleitung, Inhalt). Allein ins Heft, dann gezielt 3 Schüler unterschiedlichen Niveaus je einen Ratschlag vorlesen lassen. Diese Phase nie kürzen. Mögliche Ratschläge in der Handreichung.</a:t>
+              <a:t>Kurz vergleichen. Gelenkstelle: „Aristoteles erklärt, was Kleisthenes wollte – aber konnte er das wissen? Das prüfen wir im Urteil.“</a:t>
             </a:r>
             <a:endParaRPr lang="en-US" dirty="0"/>
           </a:p>
@@ -2023,7 +2025,7 @@
           <a:p>
             <a:r>
               <a:rPr lang="en-US" dirty="0"/>
-              <a:t>43–44 Min. Weitere gute Antworten: Quellenart, Zeit und Adressat fehlen; „Demokratie eingeführt“ steht so nicht in der Quelle.</a:t>
+              <a:t>*36–38 Min. Nur bei Zeit, sonst direkt zur Abschlussaufgabe. Kurz direkt erklären, zwei Prüffragen: „Woher wusste Aristoteles das?“ (aus älteren Schriften) – „Ist die Quelle deshalb wertlos?“ (nein, aber kein Augenzeugenbericht; er deutet die Reform aus seiner Zeit). Kontext, Sach- und Werturteil werden in der nächsten Doppelstunde vertieft.</a:t>
             </a:r>
             <a:endParaRPr lang="en-US" dirty="0"/>
           </a:p>
@@ -2111,7 +2113,7 @@
           <a:p>
             <a:r>
               <a:rPr lang="en-US" dirty="0"/>
-              <a:t>44–45 Min. Rückbezug aufs Ziel. Schreibplan im Hefter aufbewahren – er ist die Vorlage für die Klausur.</a:t>
+              <a:t>38/40–43 Min. Prüft genau das Ziel (formale und inhaltliche Aspekte). Allein ins Heft, dann gezielt 3 Schüler unterschiedlichen Niveaus je einen Ratschlag vorlesen lassen. Diese Phase nie kürzen. Mögliche Ratschläge in der Handreichung.</a:t>
             </a:r>
             <a:endParaRPr lang="en-US" dirty="0"/>
           </a:p>
@@ -2135,6 +2137,182 @@
             <a:fld id="{F7021451-1387-4CA6-816F-3879F97B5CBC}" type="slidenum">
               <a:rPr lang="en-US"/>
               <a:t>26</a:t>
+            </a:fld>
+            <a:endParaRPr lang="en-US"/>
+          </a:p>
+        </p:txBody>
+      </p:sp>
+    </p:spTree>
+    <p:extLst>
+      <p:ext uri="{BB962C8B-B14F-4D97-AF65-F5344CB8AC3E}">
+        <p14:creationId xmlns:p14="http://schemas.microsoft.com/office/powerpoint/2010/main" val="1024086991"/>
+      </p:ext>
+    </p:extLst>
+  </p:cSld>
+  <p:clrMapOvr>
+    <a:masterClrMapping/>
+  </p:clrMapOvr>
+</p:notes>
+</file>
+
+<file path=ppt/notesSlides/notesSlide27.xml><?xml version="1.0" encoding="utf-8"?>
+<p:notes xmlns:a="http://schemas.openxmlformats.org/drawingml/2006/main" xmlns:r="http://schemas.openxmlformats.org/officeDocument/2006/relationships" xmlns:p="http://schemas.openxmlformats.org/presentationml/2006/main">
+  <p:cSld>
+    <p:spTree>
+      <p:nvGrpSpPr>
+        <p:cNvPr id="1" name=""/>
+        <p:cNvGrpSpPr/>
+        <p:nvPr/>
+      </p:nvGrpSpPr>
+      <p:grpSpPr>
+        <a:xfrm>
+          <a:off x="0" y="0"/>
+          <a:ext cx="0" cy="0"/>
+          <a:chOff x="0" y="0"/>
+          <a:chExt cx="0" cy="0"/>
+        </a:xfrm>
+      </p:grpSpPr>
+      <p:sp>
+        <p:nvSpPr>
+          <p:cNvPr id="2" name="Slide Image Placeholder 1"/>
+          <p:cNvSpPr>
+            <a:spLocks noGrp="1" noRot="1" noChangeAspect="1"/>
+          </p:cNvSpPr>
+          <p:nvPr>
+            <p:ph type="sldImg"/>
+          </p:nvPr>
+        </p:nvSpPr>
+        <p:spPr/>
+      </p:sp>
+      <p:sp>
+        <p:nvSpPr>
+          <p:cNvPr id="3" name="Notes Placeholder 2"/>
+          <p:cNvSpPr>
+            <a:spLocks noGrp="1"/>
+          </p:cNvSpPr>
+          <p:nvPr>
+            <p:ph type="body" idx="1"/>
+          </p:nvPr>
+        </p:nvSpPr>
+        <p:spPr/>
+        <p:txBody>
+          <a:bodyPr/>
+          <a:lstStyle/>
+          <a:p>
+            <a:r>
+              <a:rPr lang="en-US" dirty="0"/>
+              <a:t>43–44 Min. Weitere gute Antworten: Textart, Zeit und Ort sowie Adressat fehlen; „Demokratie eingeführt“ steht so nicht in der Quelle.</a:t>
+            </a:r>
+            <a:endParaRPr lang="en-US" dirty="0"/>
+          </a:p>
+        </p:txBody>
+      </p:sp>
+      <p:sp>
+        <p:nvSpPr>
+          <p:cNvPr id="4" name="Slide Number Placeholder 3"/>
+          <p:cNvSpPr>
+            <a:spLocks noGrp="1"/>
+          </p:cNvSpPr>
+          <p:nvPr>
+            <p:ph type="sldNum" sz="quarter" idx="10"/>
+          </p:nvPr>
+        </p:nvSpPr>
+        <p:spPr/>
+        <p:txBody>
+          <a:bodyPr/>
+          <a:lstStyle/>
+          <a:p>
+            <a:fld id="{F7021451-1387-4CA6-816F-3879F97B5CBC}" type="slidenum">
+              <a:rPr lang="en-US"/>
+              <a:t>27</a:t>
+            </a:fld>
+            <a:endParaRPr lang="en-US"/>
+          </a:p>
+        </p:txBody>
+      </p:sp>
+    </p:spTree>
+    <p:extLst>
+      <p:ext uri="{BB962C8B-B14F-4D97-AF65-F5344CB8AC3E}">
+        <p14:creationId xmlns:p14="http://schemas.microsoft.com/office/powerpoint/2010/main" val="1024086991"/>
+      </p:ext>
+    </p:extLst>
+  </p:cSld>
+  <p:clrMapOvr>
+    <a:masterClrMapping/>
+  </p:clrMapOvr>
+</p:notes>
+</file>
+
+<file path=ppt/notesSlides/notesSlide28.xml><?xml version="1.0" encoding="utf-8"?>
+<p:notes xmlns:a="http://schemas.openxmlformats.org/drawingml/2006/main" xmlns:r="http://schemas.openxmlformats.org/officeDocument/2006/relationships" xmlns:p="http://schemas.openxmlformats.org/presentationml/2006/main">
+  <p:cSld>
+    <p:spTree>
+      <p:nvGrpSpPr>
+        <p:cNvPr id="1" name=""/>
+        <p:cNvGrpSpPr/>
+        <p:nvPr/>
+      </p:nvGrpSpPr>
+      <p:grpSpPr>
+        <a:xfrm>
+          <a:off x="0" y="0"/>
+          <a:ext cx="0" cy="0"/>
+          <a:chOff x="0" y="0"/>
+          <a:chExt cx="0" cy="0"/>
+        </a:xfrm>
+      </p:grpSpPr>
+      <p:sp>
+        <p:nvSpPr>
+          <p:cNvPr id="2" name="Slide Image Placeholder 1"/>
+          <p:cNvSpPr>
+            <a:spLocks noGrp="1" noRot="1" noChangeAspect="1"/>
+          </p:cNvSpPr>
+          <p:nvPr>
+            <p:ph type="sldImg"/>
+          </p:nvPr>
+        </p:nvSpPr>
+        <p:spPr/>
+      </p:sp>
+      <p:sp>
+        <p:nvSpPr>
+          <p:cNvPr id="3" name="Notes Placeholder 2"/>
+          <p:cNvSpPr>
+            <a:spLocks noGrp="1"/>
+          </p:cNvSpPr>
+          <p:nvPr>
+            <p:ph type="body" idx="1"/>
+          </p:nvPr>
+        </p:nvSpPr>
+        <p:spPr/>
+        <p:txBody>
+          <a:bodyPr/>
+          <a:lstStyle/>
+          <a:p>
+            <a:r>
+              <a:rPr lang="en-US" dirty="0"/>
+              <a:t>44–45 Min. Rückbezug aufs Ziel. Übersicht und Schreibplan im Hefter aufbewahren – sie sind die Vorlage für die Klausur.</a:t>
+            </a:r>
+            <a:endParaRPr lang="en-US" dirty="0"/>
+          </a:p>
+        </p:txBody>
+      </p:sp>
+      <p:sp>
+        <p:nvSpPr>
+          <p:cNvPr id="4" name="Slide Number Placeholder 3"/>
+          <p:cNvSpPr>
+            <a:spLocks noGrp="1"/>
+          </p:cNvSpPr>
+          <p:nvPr>
+            <p:ph type="sldNum" sz="quarter" idx="10"/>
+          </p:nvPr>
+        </p:nvSpPr>
+        <p:spPr/>
+        <p:txBody>
+          <a:bodyPr/>
+          <a:lstStyle/>
+          <a:p>
+            <a:fld id="{F7021451-1387-4CA6-816F-3879F97B5CBC}" type="slidenum">
+              <a:rPr lang="en-US"/>
+              <a:t>28</a:t>
             </a:fld>
             <a:endParaRPr lang="en-US"/>
           </a:p>
@@ -2463,7 +2641,7 @@
           <a:p>
             <a:r>
               <a:rPr lang="en-US" dirty="0"/>
-              <a:t>7–8 Min. Bedeutung erklären (direkt). Falls die Schule/Fachschaft eigene Operatorenlisten oder Aufgabenformate nutzt, hier einsetzen. „Analysieren“ heißt: Quelle beschreiben, Inhalt wiedergeben, einordnen – noch ohne eigenes Urteil; das Urteil folgt meist in einer eigenen Aufgabe.</a:t>
+              <a:t>7–8 Min. Bedeutung erklären (direkt). Die Arbeitsschritte sind die der Fachschaft (Übersicht im Hefter). Operatoren: analysieren (Schritt 2), einordnen/erläutern (3), beurteilen = Sachurteil, bewerten/Stellung nehmen = Werturteil (4)</a:t>
             </a:r>
             <a:endParaRPr lang="en-US" dirty="0"/>
           </a:p>
@@ -2551,7 +2729,7 @@
           <a:p>
             <a:r>
               <a:rPr lang="en-US" dirty="0"/>
-              <a:t>8–10 Min. Erklärportion 1 (ca. 2 Min.): Die vier Schritte sind wie ein Trichter – erst die Rahmendaten, dann der Inhalt, dann der Zusammenhang, erst zuletzt die eigene Meinung. Prüffragen an 4–6 Schüler: „Welcher Schritt kommt zuerst?“ – „In welchem Schritt darf ich sagen, was ich davon halte?“ (4) – „Was gehört in Schritt 2?“</a:t>
+              <a:t>8–10 Min. Erklärportion 1 (ca. 2 Min.) mit der Übersicht im Hefter: Die Schritte sind wie ein Trichter – erst die Frage, dann die Quelle selbst, dann der Zusammenhang, zuletzt das Urteil. Die Glaubwürdigkeit gehört ins Sachurteil, die eigene Meinung mit Maßstab ins Werturteil. Prüffragen an 4–6 Schüler: „Was kommt nach der Themenfrage?“ – „In welchem Schritt darf ich sagen, was ich davon halte?“ (4b) – „Wohin gehört: Ist die Quelle glaubwürdig?“ (Sachurteil).</a:t>
             </a:r>
             <a:endParaRPr lang="en-US" dirty="0"/>
           </a:p>
@@ -2639,7 +2817,7 @@
           <a:p>
             <a:r>
               <a:rPr lang="en-US" dirty="0"/>
-              <a:t>10–11 Min. Erklärportion 2: fünf Fragen, alle Antworten stehen im Kasten zum Autor oder unter der Quelle (Nachweis).</a:t>
+              <a:t>10 Min. Heute geben wir die Themenfrage vor. In der Klausur steht sie oft in der Aufgabe; sonst stellen die Schüler sie nach dem ersten Lesen selbst auf (Beispiel M11: „Ein Leben in katastrophalen Verhältnissen?“).</a:t>
             </a:r>
             <a:endParaRPr lang="en-US" dirty="0"/>
           </a:p>
@@ -2727,7 +2905,7 @@
           <a:p>
             <a:r>
               <a:rPr lang="en-US" dirty="0"/>
-              <a:t>11–12 Min. Vormachen an einer anderen Quelle (Solon kennen sie): laut denken. „Wer hat das geschrieben? Solon selbst – also war er dabei. Was für ein Text? Ein Gedicht. Wann? Um 590, kurz nach seinen Reformen. Für wen? Für die Athener. Worüber? Er verteidigt seine Reformen.“</a:t>
+              <a:t>10–11 Min. Erklärportion 2: fünf Fragen, alle Antworten stehen im Kasten zum Autor oder unter der Quelle (Nachweis).</a:t>
             </a:r>
             <a:endParaRPr lang="en-US" dirty="0"/>
           </a:p>
@@ -3710,7 +3888,7 @@
                 <a:ea typeface="Cambria" pitchFamily="34" charset="-122"/>
                 <a:cs typeface="Cambria" pitchFamily="34" charset="-120"/>
               </a:rPr>
-              <a:t>Daraus wird ein Satz</a:t>
+              <a:t>So geht's – ein Beispiel</a:t>
             </a:r>
             <a:endParaRPr lang="en-US" sz="3600" dirty="0"/>
           </a:p>
@@ -3761,41 +3939,14 @@
       </p:sp>
       <p:sp>
         <p:nvSpPr>
-          <p:cNvPr id="9" name="Shape 7"/>
-          <p:cNvSpPr/>
+          <p:cNvPr id="9" name="Text 7"/>
+          <p:cNvSpPr txBox="1"/>
           <p:nvPr/>
         </p:nvSpPr>
         <p:spPr>
           <a:xfrm>
             <a:off x="411480" y="1188720"/>
-            <a:ext cx="8321040" cy="2377440"/>
-          </a:xfrm>
-          <a:prstGeom prst="roundRect">
-            <a:avLst>
-              <a:gd name="adj" fmla="val 3077"/>
-            </a:avLst>
-          </a:prstGeom>
-          <a:solidFill>
-            <a:srgbClr val="F4ECDE"/>
-          </a:solidFill>
-          <a:ln w="12700">
-            <a:solidFill>
-              <a:srgbClr val="F4ECDE"/>
-            </a:solidFill>
-            <a:prstDash val="solid"/>
-          </a:ln>
-        </p:spPr>
-      </p:sp>
-      <p:sp>
-        <p:nvSpPr>
-          <p:cNvPr id="10" name="Text 8"/>
-          <p:cNvSpPr txBox="1"/>
-          <p:nvPr/>
-        </p:nvSpPr>
-        <p:spPr>
-          <a:xfrm>
-            <a:off x="594360" y="1188720"/>
-            <a:ext cx="7955280" cy="2377440"/>
+            <a:ext cx="3017520" cy="566928"/>
           </a:xfrm>
           <a:prstGeom prst="rect">
             <a:avLst/>
@@ -3811,57 +3962,30 @@
               <a:buNone/>
             </a:pPr>
             <a:r>
-              <a:rPr lang="en-US" sz="2700" i="1" dirty="0">
-                <a:solidFill>
-                  <a:srgbClr val="2B2318"/>
-                </a:solidFill>
-                <a:latin typeface="Calibri" pitchFamily="34" charset="0"/>
-                <a:ea typeface="Calibri" pitchFamily="34" charset="-122"/>
-                <a:cs typeface="Calibri" pitchFamily="34" charset="-120"/>
-              </a:rPr>
-              <a:t>„Bei der Quelle handelt es sich um ein Gedicht des athenischen Gesetzgebers Solon, das um 590 v. Chr. entstand. Er wendet sich an die Athener und rechtfertigt seine Reformen.“</a:t>
-            </a:r>
-            <a:endParaRPr lang="en-US" sz="2700" dirty="0"/>
-          </a:p>
-        </p:txBody>
-      </p:sp>
-      <p:sp>
-        <p:nvSpPr>
-          <p:cNvPr id="11" name="Shape 9"/>
-          <p:cNvSpPr/>
-          <p:nvPr/>
-        </p:nvSpPr>
-        <p:spPr>
-          <a:xfrm>
-            <a:off x="411480" y="3794760"/>
-            <a:ext cx="8321040" cy="822960"/>
-          </a:xfrm>
-          <a:prstGeom prst="roundRect">
-            <a:avLst>
-              <a:gd name="adj" fmla="val 8889"/>
-            </a:avLst>
-          </a:prstGeom>
-          <a:solidFill>
-            <a:srgbClr val="2B2318"/>
-          </a:solidFill>
-          <a:ln w="12700">
-            <a:solidFill>
-              <a:srgbClr val="2B2318"/>
-            </a:solidFill>
-            <a:prstDash val="solid"/>
-          </a:ln>
-        </p:spPr>
-      </p:sp>
-      <p:sp>
-        <p:nvSpPr>
-          <p:cNvPr id="12" name="Text 10"/>
-          <p:cNvSpPr txBox="1"/>
-          <p:nvPr/>
-        </p:nvSpPr>
-        <p:spPr>
-          <a:xfrm>
-            <a:off x="594360" y="3794760"/>
-            <a:ext cx="7955280" cy="822960"/>
+              <a:rPr lang="en-US" sz="2700" b="1" dirty="0">
+                <a:solidFill>
+                  <a:srgbClr val="AD4426"/>
+                </a:solidFill>
+                <a:latin typeface="Calibri" pitchFamily="34" charset="0"/>
+                <a:ea typeface="Calibri" pitchFamily="34" charset="-122"/>
+                <a:cs typeface="Calibri" pitchFamily="34" charset="-120"/>
+              </a:rPr>
+              <a:t>Autor</a:t>
+            </a:r>
+            <a:endParaRPr lang="en-US" sz="2700" dirty="0"/>
+          </a:p>
+        </p:txBody>
+      </p:sp>
+      <p:sp>
+        <p:nvSpPr>
+          <p:cNvPr id="10" name="Text 8"/>
+          <p:cNvSpPr txBox="1"/>
+          <p:nvPr/>
+        </p:nvSpPr>
+        <p:spPr>
+          <a:xfrm>
+            <a:off x="3611880" y="1188720"/>
+            <a:ext cx="5120640" cy="566928"/>
           </a:xfrm>
           <a:prstGeom prst="rect">
             <a:avLst/>
@@ -3877,15 +4001,327 @@
               <a:buNone/>
             </a:pPr>
             <a:r>
-              <a:rPr lang="en-US" sz="2700" b="1" dirty="0">
-                <a:solidFill>
-                  <a:srgbClr val="D9A441"/>
-                </a:solidFill>
-                <a:latin typeface="Calibri" pitchFamily="34" charset="0"/>
-                <a:ea typeface="Calibri" pitchFamily="34" charset="-122"/>
-                <a:cs typeface="Calibri" pitchFamily="34" charset="-120"/>
-              </a:rPr>
-              <a:t>⚠ Lebensdaten prüfen: War der Autor dabei?</a:t>
+              <a:rPr lang="en-US" sz="2700" dirty="0">
+                <a:solidFill>
+                  <a:srgbClr val="2B2318"/>
+                </a:solidFill>
+                <a:latin typeface="Calibri" pitchFamily="34" charset="0"/>
+                <a:ea typeface="Calibri" pitchFamily="34" charset="-122"/>
+                <a:cs typeface="Calibri" pitchFamily="34" charset="-120"/>
+              </a:rPr>
+              <a:t>Solon, Archon und Gesetzgeber Athens</a:t>
+            </a:r>
+            <a:endParaRPr lang="en-US" sz="2700" dirty="0"/>
+          </a:p>
+        </p:txBody>
+      </p:sp>
+      <p:sp>
+        <p:nvSpPr>
+          <p:cNvPr id="11" name="Text 9"/>
+          <p:cNvSpPr txBox="1"/>
+          <p:nvPr/>
+        </p:nvSpPr>
+        <p:spPr>
+          <a:xfrm>
+            <a:off x="411480" y="1874520"/>
+            <a:ext cx="3017520" cy="566928"/>
+          </a:xfrm>
+          <a:prstGeom prst="rect">
+            <a:avLst/>
+          </a:prstGeom>
+          <a:noFill/>
+          <a:ln/>
+        </p:spPr>
+        <p:txBody>
+          <a:bodyPr wrap="square" lIns="0" tIns="0" rIns="0" bIns="0" rtlCol="0" anchor="ctr"/>
+          <a:lstStyle/>
+          <a:p>
+            <a:pPr indent="0" marL="0">
+              <a:buNone/>
+            </a:pPr>
+            <a:r>
+              <a:rPr lang="en-US" sz="2700" b="1" dirty="0">
+                <a:solidFill>
+                  <a:srgbClr val="AD4426"/>
+                </a:solidFill>
+                <a:latin typeface="Calibri" pitchFamily="34" charset="0"/>
+                <a:ea typeface="Calibri" pitchFamily="34" charset="-122"/>
+                <a:cs typeface="Calibri" pitchFamily="34" charset="-120"/>
+              </a:rPr>
+              <a:t>Zeit und Ort</a:t>
+            </a:r>
+            <a:endParaRPr lang="en-US" sz="2700" dirty="0"/>
+          </a:p>
+        </p:txBody>
+      </p:sp>
+      <p:sp>
+        <p:nvSpPr>
+          <p:cNvPr id="12" name="Text 10"/>
+          <p:cNvSpPr txBox="1"/>
+          <p:nvPr/>
+        </p:nvSpPr>
+        <p:spPr>
+          <a:xfrm>
+            <a:off x="3611880" y="1874520"/>
+            <a:ext cx="5120640" cy="566928"/>
+          </a:xfrm>
+          <a:prstGeom prst="rect">
+            <a:avLst/>
+          </a:prstGeom>
+          <a:noFill/>
+          <a:ln/>
+        </p:spPr>
+        <p:txBody>
+          <a:bodyPr wrap="square" lIns="0" tIns="0" rIns="0" bIns="0" rtlCol="0" anchor="ctr"/>
+          <a:lstStyle/>
+          <a:p>
+            <a:pPr indent="0" marL="0">
+              <a:buNone/>
+            </a:pPr>
+            <a:r>
+              <a:rPr lang="en-US" sz="2700" dirty="0">
+                <a:solidFill>
+                  <a:srgbClr val="2B2318"/>
+                </a:solidFill>
+                <a:latin typeface="Calibri" pitchFamily="34" charset="0"/>
+                <a:ea typeface="Calibri" pitchFamily="34" charset="-122"/>
+                <a:cs typeface="Calibri" pitchFamily="34" charset="-120"/>
+              </a:rPr>
+              <a:t>um 590 v. Chr. in Athen</a:t>
+            </a:r>
+            <a:endParaRPr lang="en-US" sz="2700" dirty="0"/>
+          </a:p>
+        </p:txBody>
+      </p:sp>
+      <p:sp>
+        <p:nvSpPr>
+          <p:cNvPr id="13" name="Text 11"/>
+          <p:cNvSpPr txBox="1"/>
+          <p:nvPr/>
+        </p:nvSpPr>
+        <p:spPr>
+          <a:xfrm>
+            <a:off x="411480" y="2560320"/>
+            <a:ext cx="3017520" cy="566928"/>
+          </a:xfrm>
+          <a:prstGeom prst="rect">
+            <a:avLst/>
+          </a:prstGeom>
+          <a:noFill/>
+          <a:ln/>
+        </p:spPr>
+        <p:txBody>
+          <a:bodyPr wrap="square" lIns="0" tIns="0" rIns="0" bIns="0" rtlCol="0" anchor="ctr"/>
+          <a:lstStyle/>
+          <a:p>
+            <a:pPr indent="0" marL="0">
+              <a:buNone/>
+            </a:pPr>
+            <a:r>
+              <a:rPr lang="en-US" sz="2700" b="1" dirty="0">
+                <a:solidFill>
+                  <a:srgbClr val="AD4426"/>
+                </a:solidFill>
+                <a:latin typeface="Calibri" pitchFamily="34" charset="0"/>
+                <a:ea typeface="Calibri" pitchFamily="34" charset="-122"/>
+                <a:cs typeface="Calibri" pitchFamily="34" charset="-120"/>
+              </a:rPr>
+              <a:t>Textart</a:t>
+            </a:r>
+            <a:endParaRPr lang="en-US" sz="2700" dirty="0"/>
+          </a:p>
+        </p:txBody>
+      </p:sp>
+      <p:sp>
+        <p:nvSpPr>
+          <p:cNvPr id="14" name="Text 12"/>
+          <p:cNvSpPr txBox="1"/>
+          <p:nvPr/>
+        </p:nvSpPr>
+        <p:spPr>
+          <a:xfrm>
+            <a:off x="3611880" y="2560320"/>
+            <a:ext cx="5120640" cy="566928"/>
+          </a:xfrm>
+          <a:prstGeom prst="rect">
+            <a:avLst/>
+          </a:prstGeom>
+          <a:noFill/>
+          <a:ln/>
+        </p:spPr>
+        <p:txBody>
+          <a:bodyPr wrap="square" lIns="0" tIns="0" rIns="0" bIns="0" rtlCol="0" anchor="ctr"/>
+          <a:lstStyle/>
+          <a:p>
+            <a:pPr indent="0" marL="0">
+              <a:buNone/>
+            </a:pPr>
+            <a:r>
+              <a:rPr lang="en-US" sz="2700" dirty="0">
+                <a:solidFill>
+                  <a:srgbClr val="2B2318"/>
+                </a:solidFill>
+                <a:latin typeface="Calibri" pitchFamily="34" charset="0"/>
+                <a:ea typeface="Calibri" pitchFamily="34" charset="-122"/>
+                <a:cs typeface="Calibri" pitchFamily="34" charset="-120"/>
+              </a:rPr>
+              <a:t>Gedicht</a:t>
+            </a:r>
+            <a:endParaRPr lang="en-US" sz="2700" dirty="0"/>
+          </a:p>
+        </p:txBody>
+      </p:sp>
+      <p:sp>
+        <p:nvSpPr>
+          <p:cNvPr id="15" name="Text 13"/>
+          <p:cNvSpPr txBox="1"/>
+          <p:nvPr/>
+        </p:nvSpPr>
+        <p:spPr>
+          <a:xfrm>
+            <a:off x="411480" y="3246120"/>
+            <a:ext cx="3017520" cy="566928"/>
+          </a:xfrm>
+          <a:prstGeom prst="rect">
+            <a:avLst/>
+          </a:prstGeom>
+          <a:noFill/>
+          <a:ln/>
+        </p:spPr>
+        <p:txBody>
+          <a:bodyPr wrap="square" lIns="0" tIns="0" rIns="0" bIns="0" rtlCol="0" anchor="ctr"/>
+          <a:lstStyle/>
+          <a:p>
+            <a:pPr indent="0" marL="0">
+              <a:buNone/>
+            </a:pPr>
+            <a:r>
+              <a:rPr lang="en-US" sz="2700" b="1" dirty="0">
+                <a:solidFill>
+                  <a:srgbClr val="AD4426"/>
+                </a:solidFill>
+                <a:latin typeface="Calibri" pitchFamily="34" charset="0"/>
+                <a:ea typeface="Calibri" pitchFamily="34" charset="-122"/>
+                <a:cs typeface="Calibri" pitchFamily="34" charset="-120"/>
+              </a:rPr>
+              <a:t>Thema</a:t>
+            </a:r>
+            <a:endParaRPr lang="en-US" sz="2700" dirty="0"/>
+          </a:p>
+        </p:txBody>
+      </p:sp>
+      <p:sp>
+        <p:nvSpPr>
+          <p:cNvPr id="16" name="Text 14"/>
+          <p:cNvSpPr txBox="1"/>
+          <p:nvPr/>
+        </p:nvSpPr>
+        <p:spPr>
+          <a:xfrm>
+            <a:off x="3611880" y="3246120"/>
+            <a:ext cx="5120640" cy="566928"/>
+          </a:xfrm>
+          <a:prstGeom prst="rect">
+            <a:avLst/>
+          </a:prstGeom>
+          <a:noFill/>
+          <a:ln/>
+        </p:spPr>
+        <p:txBody>
+          <a:bodyPr wrap="square" lIns="0" tIns="0" rIns="0" bIns="0" rtlCol="0" anchor="ctr"/>
+          <a:lstStyle/>
+          <a:p>
+            <a:pPr indent="0" marL="0">
+              <a:buNone/>
+            </a:pPr>
+            <a:r>
+              <a:rPr lang="en-US" sz="2700" dirty="0">
+                <a:solidFill>
+                  <a:srgbClr val="2B2318"/>
+                </a:solidFill>
+                <a:latin typeface="Calibri" pitchFamily="34" charset="0"/>
+                <a:ea typeface="Calibri" pitchFamily="34" charset="-122"/>
+                <a:cs typeface="Calibri" pitchFamily="34" charset="-120"/>
+              </a:rPr>
+              <a:t>Rechtfertigung seiner Reformen</a:t>
+            </a:r>
+            <a:endParaRPr lang="en-US" sz="2700" dirty="0"/>
+          </a:p>
+        </p:txBody>
+      </p:sp>
+      <p:sp>
+        <p:nvSpPr>
+          <p:cNvPr id="17" name="Text 15"/>
+          <p:cNvSpPr txBox="1"/>
+          <p:nvPr/>
+        </p:nvSpPr>
+        <p:spPr>
+          <a:xfrm>
+            <a:off x="411480" y="3931920"/>
+            <a:ext cx="3017520" cy="566928"/>
+          </a:xfrm>
+          <a:prstGeom prst="rect">
+            <a:avLst/>
+          </a:prstGeom>
+          <a:noFill/>
+          <a:ln/>
+        </p:spPr>
+        <p:txBody>
+          <a:bodyPr wrap="square" lIns="0" tIns="0" rIns="0" bIns="0" rtlCol="0" anchor="ctr"/>
+          <a:lstStyle/>
+          <a:p>
+            <a:pPr indent="0" marL="0">
+              <a:buNone/>
+            </a:pPr>
+            <a:r>
+              <a:rPr lang="en-US" sz="2700" b="1" dirty="0">
+                <a:solidFill>
+                  <a:srgbClr val="AD4426"/>
+                </a:solidFill>
+                <a:latin typeface="Calibri" pitchFamily="34" charset="0"/>
+                <a:ea typeface="Calibri" pitchFamily="34" charset="-122"/>
+                <a:cs typeface="Calibri" pitchFamily="34" charset="-120"/>
+              </a:rPr>
+              <a:t>Adressat</a:t>
+            </a:r>
+            <a:endParaRPr lang="en-US" sz="2700" dirty="0"/>
+          </a:p>
+        </p:txBody>
+      </p:sp>
+      <p:sp>
+        <p:nvSpPr>
+          <p:cNvPr id="18" name="Text 16"/>
+          <p:cNvSpPr txBox="1"/>
+          <p:nvPr/>
+        </p:nvSpPr>
+        <p:spPr>
+          <a:xfrm>
+            <a:off x="3611880" y="3931920"/>
+            <a:ext cx="5120640" cy="566928"/>
+          </a:xfrm>
+          <a:prstGeom prst="rect">
+            <a:avLst/>
+          </a:prstGeom>
+          <a:noFill/>
+          <a:ln/>
+        </p:spPr>
+        <p:txBody>
+          <a:bodyPr wrap="square" lIns="0" tIns="0" rIns="0" bIns="0" rtlCol="0" anchor="ctr"/>
+          <a:lstStyle/>
+          <a:p>
+            <a:pPr indent="0" marL="0">
+              <a:buNone/>
+            </a:pPr>
+            <a:r>
+              <a:rPr lang="en-US" sz="2700" dirty="0">
+                <a:solidFill>
+                  <a:srgbClr val="2B2318"/>
+                </a:solidFill>
+                <a:latin typeface="Calibri" pitchFamily="34" charset="0"/>
+                <a:ea typeface="Calibri" pitchFamily="34" charset="-122"/>
+                <a:cs typeface="Calibri" pitchFamily="34" charset="-120"/>
+              </a:rPr>
+              <a:t>die Athener</a:t>
             </a:r>
             <a:endParaRPr lang="en-US" sz="2700" dirty="0"/>
           </a:p>
@@ -4074,7 +4510,7 @@
             </a:avLst>
           </a:prstGeom>
           <a:solidFill>
-            <a:srgbClr val="F4ECDE"/>
+            <a:srgbClr val="AD4426"/>
           </a:solidFill>
           <a:ln/>
         </p:spPr>
@@ -4088,7 +4524,7 @@
             <a:r>
               <a:rPr lang="en-US" sz="2700" b="1" dirty="0">
                 <a:solidFill>
-                  <a:srgbClr val="998C77"/>
+                  <a:srgbClr val="FFFFFF"/>
                 </a:solidFill>
                 <a:latin typeface="Calibri" pitchFamily="34" charset="0"/>
                 <a:ea typeface="Calibri" pitchFamily="34" charset="-122"/>
@@ -4117,7 +4553,7 @@
             </a:avLst>
           </a:prstGeom>
           <a:solidFill>
-            <a:srgbClr val="AD4426"/>
+            <a:srgbClr val="F4ECDE"/>
           </a:solidFill>
           <a:ln/>
         </p:spPr>
@@ -4131,7 +4567,7 @@
             <a:r>
               <a:rPr lang="en-US" sz="2700" b="1" dirty="0">
                 <a:solidFill>
-                  <a:srgbClr val="FFFFFF"/>
+                  <a:srgbClr val="998C77"/>
                 </a:solidFill>
                 <a:latin typeface="Calibri" pitchFamily="34" charset="0"/>
                 <a:ea typeface="Calibri" pitchFamily="34" charset="-122"/>
@@ -4219,7 +4655,7 @@
                 <a:ea typeface="Cambria" pitchFamily="34" charset="-122"/>
                 <a:cs typeface="Cambria" pitchFamily="34" charset="-120"/>
               </a:rPr>
-              <a:t>Jetzt du: Einleitung</a:t>
+              <a:t>Daraus wird ein Satz</a:t>
             </a:r>
             <a:endParaRPr lang="en-US" sz="3600" dirty="0"/>
           </a:p>
@@ -4262,52 +4698,38 @@
                 <a:ea typeface="Calibri" pitchFamily="34" charset="-122"/>
                 <a:cs typeface="Calibri" pitchFamily="34" charset="-120"/>
               </a:rPr>
-              <a:t>4 Min.</a:t>
-            </a:r>
-            <a:endParaRPr lang="en-US" sz="2700" dirty="0"/>
-          </a:p>
-        </p:txBody>
-      </p:sp>
-      <p:sp>
-        <p:nvSpPr>
-          <p:cNvPr id="9" name="Text 7"/>
-          <p:cNvSpPr txBox="1"/>
-          <p:nvPr/>
-        </p:nvSpPr>
-        <p:spPr>
-          <a:xfrm>
-            <a:off x="411480" y="1234440"/>
-            <a:ext cx="457200" cy="457200"/>
-          </a:xfrm>
-          <a:prstGeom prst="ellipse">
-            <a:avLst/>
-          </a:prstGeom>
-          <a:solidFill>
-            <a:srgbClr val="AD4426"/>
-          </a:solidFill>
-          <a:ln/>
-        </p:spPr>
-        <p:txBody>
-          <a:bodyPr wrap="square" lIns="0" tIns="0" rIns="0" bIns="0" rtlCol="0" anchor="ctr"/>
-          <a:lstStyle/>
-          <a:p>
-            <a:pPr algn="ctr" indent="0" marL="0">
-              <a:buNone/>
-            </a:pPr>
-            <a:r>
-              <a:rPr lang="en-US" sz="2700" b="1" dirty="0">
-                <a:solidFill>
-                  <a:srgbClr val="FFFFFF"/>
-                </a:solidFill>
-                <a:latin typeface="Cambria" pitchFamily="34" charset="0"/>
-                <a:ea typeface="Cambria" pitchFamily="34" charset="-122"/>
-                <a:cs typeface="Cambria" pitchFamily="34" charset="-120"/>
-              </a:rPr>
-              <a:t>1</a:t>
-            </a:r>
-            <a:endParaRPr lang="en-US" sz="2700" dirty="0"/>
-          </a:p>
-        </p:txBody>
+              <a:t>Lehrkraft</a:t>
+            </a:r>
+            <a:endParaRPr lang="en-US" sz="2700" dirty="0"/>
+          </a:p>
+        </p:txBody>
+      </p:sp>
+      <p:sp>
+        <p:nvSpPr>
+          <p:cNvPr id="9" name="Shape 7"/>
+          <p:cNvSpPr/>
+          <p:nvPr/>
+        </p:nvSpPr>
+        <p:spPr>
+          <a:xfrm>
+            <a:off x="411480" y="1188720"/>
+            <a:ext cx="8321040" cy="2377440"/>
+          </a:xfrm>
+          <a:prstGeom prst="roundRect">
+            <a:avLst>
+              <a:gd name="adj" fmla="val 3077"/>
+            </a:avLst>
+          </a:prstGeom>
+          <a:solidFill>
+            <a:srgbClr val="F4ECDE"/>
+          </a:solidFill>
+          <a:ln w="12700">
+            <a:solidFill>
+              <a:srgbClr val="F4ECDE"/>
+            </a:solidFill>
+            <a:prstDash val="solid"/>
+          </a:ln>
+        </p:spPr>
       </p:sp>
       <p:sp>
         <p:nvSpPr>
@@ -4317,8 +4739,8 @@
         </p:nvSpPr>
         <p:spPr>
           <a:xfrm>
-            <a:off x="1005840" y="1216152"/>
-            <a:ext cx="7772400" cy="502920"/>
+            <a:off x="594360" y="1188720"/>
+            <a:ext cx="7955280" cy="2377440"/>
           </a:xfrm>
           <a:prstGeom prst="rect">
             <a:avLst/>
@@ -4334,7 +4756,7 @@
               <a:buNone/>
             </a:pPr>
             <a:r>
-              <a:rPr lang="en-US" sz="2700" dirty="0">
+              <a:rPr lang="en-US" sz="2700" i="1" dirty="0">
                 <a:solidFill>
                   <a:srgbClr val="2B2318"/>
                 </a:solidFill>
@@ -4342,52 +4764,38 @@
                 <a:ea typeface="Calibri" pitchFamily="34" charset="-122"/>
                 <a:cs typeface="Calibri" pitchFamily="34" charset="-120"/>
               </a:rPr>
-              <a:t>Lies den Kasten „Zum Autor“ auf dem Blatt.</a:t>
-            </a:r>
-            <a:endParaRPr lang="en-US" sz="2700" dirty="0"/>
-          </a:p>
-        </p:txBody>
-      </p:sp>
-      <p:sp>
-        <p:nvSpPr>
-          <p:cNvPr id="11" name="Text 9"/>
-          <p:cNvSpPr txBox="1"/>
-          <p:nvPr/>
-        </p:nvSpPr>
-        <p:spPr>
-          <a:xfrm>
-            <a:off x="411480" y="2011680"/>
-            <a:ext cx="457200" cy="457200"/>
-          </a:xfrm>
-          <a:prstGeom prst="ellipse">
-            <a:avLst/>
-          </a:prstGeom>
-          <a:solidFill>
-            <a:srgbClr val="AD4426"/>
-          </a:solidFill>
-          <a:ln/>
-        </p:spPr>
-        <p:txBody>
-          <a:bodyPr wrap="square" lIns="0" tIns="0" rIns="0" bIns="0" rtlCol="0" anchor="ctr"/>
-          <a:lstStyle/>
-          <a:p>
-            <a:pPr algn="ctr" indent="0" marL="0">
-              <a:buNone/>
-            </a:pPr>
-            <a:r>
-              <a:rPr lang="en-US" sz="2700" b="1" dirty="0">
-                <a:solidFill>
-                  <a:srgbClr val="FFFFFF"/>
-                </a:solidFill>
-                <a:latin typeface="Cambria" pitchFamily="34" charset="0"/>
-                <a:ea typeface="Cambria" pitchFamily="34" charset="-122"/>
-                <a:cs typeface="Cambria" pitchFamily="34" charset="-120"/>
-              </a:rPr>
-              <a:t>2</a:t>
-            </a:r>
-            <a:endParaRPr lang="en-US" sz="2700" dirty="0"/>
-          </a:p>
-        </p:txBody>
+              <a:t>„Bei der Quelle handelt es sich um ein Gedicht des athenischen Gesetzgebers Solon, das um 590 v. Chr. in Athen entstand. Er wendet sich an die Athener und rechtfertigt seine Reformen.“</a:t>
+            </a:r>
+            <a:endParaRPr lang="en-US" sz="2700" dirty="0"/>
+          </a:p>
+        </p:txBody>
+      </p:sp>
+      <p:sp>
+        <p:nvSpPr>
+          <p:cNvPr id="11" name="Shape 9"/>
+          <p:cNvSpPr/>
+          <p:nvPr/>
+        </p:nvSpPr>
+        <p:spPr>
+          <a:xfrm>
+            <a:off x="411480" y="3794760"/>
+            <a:ext cx="8321040" cy="822960"/>
+          </a:xfrm>
+          <a:prstGeom prst="roundRect">
+            <a:avLst>
+              <a:gd name="adj" fmla="val 8889"/>
+            </a:avLst>
+          </a:prstGeom>
+          <a:solidFill>
+            <a:srgbClr val="2B2318"/>
+          </a:solidFill>
+          <a:ln w="12700">
+            <a:solidFill>
+              <a:srgbClr val="2B2318"/>
+            </a:solidFill>
+            <a:prstDash val="solid"/>
+          </a:ln>
+        </p:spPr>
       </p:sp>
       <p:sp>
         <p:nvSpPr>
@@ -4397,8 +4805,8 @@
         </p:nvSpPr>
         <p:spPr>
           <a:xfrm>
-            <a:off x="1005840" y="1993392"/>
-            <a:ext cx="7772400" cy="502920"/>
+            <a:off x="594360" y="3794760"/>
+            <a:ext cx="7955280" cy="822960"/>
           </a:xfrm>
           <a:prstGeom prst="rect">
             <a:avLst/>
@@ -4414,175 +4822,15 @@
               <a:buNone/>
             </a:pPr>
             <a:r>
-              <a:rPr lang="en-US" sz="2700" dirty="0">
-                <a:solidFill>
-                  <a:srgbClr val="2B2318"/>
-                </a:solidFill>
-                <a:latin typeface="Calibri" pitchFamily="34" charset="0"/>
-                <a:ea typeface="Calibri" pitchFamily="34" charset="-122"/>
-                <a:cs typeface="Calibri" pitchFamily="34" charset="-120"/>
-              </a:rPr>
-              <a:t>Fülle die fünf Felder in Schritt 1 aus.</a:t>
-            </a:r>
-            <a:endParaRPr lang="en-US" sz="2700" dirty="0"/>
-          </a:p>
-        </p:txBody>
-      </p:sp>
-      <p:sp>
-        <p:nvSpPr>
-          <p:cNvPr id="13" name="Text 11"/>
-          <p:cNvSpPr txBox="1"/>
-          <p:nvPr/>
-        </p:nvSpPr>
-        <p:spPr>
-          <a:xfrm>
-            <a:off x="411480" y="2788920"/>
-            <a:ext cx="457200" cy="457200"/>
-          </a:xfrm>
-          <a:prstGeom prst="ellipse">
-            <a:avLst/>
-          </a:prstGeom>
-          <a:solidFill>
-            <a:srgbClr val="AD4426"/>
-          </a:solidFill>
-          <a:ln/>
-        </p:spPr>
-        <p:txBody>
-          <a:bodyPr wrap="square" lIns="0" tIns="0" rIns="0" bIns="0" rtlCol="0" anchor="ctr"/>
-          <a:lstStyle/>
-          <a:p>
-            <a:pPr algn="ctr" indent="0" marL="0">
-              <a:buNone/>
-            </a:pPr>
-            <a:r>
-              <a:rPr lang="en-US" sz="2700" b="1" dirty="0">
-                <a:solidFill>
-                  <a:srgbClr val="FFFFFF"/>
-                </a:solidFill>
-                <a:latin typeface="Cambria" pitchFamily="34" charset="0"/>
-                <a:ea typeface="Cambria" pitchFamily="34" charset="-122"/>
-                <a:cs typeface="Cambria" pitchFamily="34" charset="-120"/>
-              </a:rPr>
-              <a:t>3</a:t>
-            </a:r>
-            <a:endParaRPr lang="en-US" sz="2700" dirty="0"/>
-          </a:p>
-        </p:txBody>
-      </p:sp>
-      <p:sp>
-        <p:nvSpPr>
-          <p:cNvPr id="14" name="Text 12"/>
-          <p:cNvSpPr txBox="1"/>
-          <p:nvPr/>
-        </p:nvSpPr>
-        <p:spPr>
-          <a:xfrm>
-            <a:off x="1005840" y="2770632"/>
-            <a:ext cx="7772400" cy="502920"/>
-          </a:xfrm>
-          <a:prstGeom prst="rect">
-            <a:avLst/>
-          </a:prstGeom>
-          <a:noFill/>
-          <a:ln/>
-        </p:spPr>
-        <p:txBody>
-          <a:bodyPr wrap="square" lIns="0" tIns="0" rIns="0" bIns="0" rtlCol="0" anchor="ctr"/>
-          <a:lstStyle/>
-          <a:p>
-            <a:pPr indent="0" marL="0">
-              <a:buNone/>
-            </a:pPr>
-            <a:r>
-              <a:rPr lang="en-US" sz="2700" dirty="0">
-                <a:solidFill>
-                  <a:srgbClr val="2B2318"/>
-                </a:solidFill>
-                <a:latin typeface="Calibri" pitchFamily="34" charset="0"/>
-                <a:ea typeface="Calibri" pitchFamily="34" charset="-122"/>
-                <a:cs typeface="Calibri" pitchFamily="34" charset="-120"/>
-              </a:rPr>
-              <a:t>Schreibe einen Einleitungssatz.</a:t>
-            </a:r>
-            <a:endParaRPr lang="en-US" sz="2700" dirty="0"/>
-          </a:p>
-        </p:txBody>
-      </p:sp>
-      <p:sp>
-        <p:nvSpPr>
-          <p:cNvPr id="15" name="Text 13"/>
-          <p:cNvSpPr txBox="1"/>
-          <p:nvPr/>
-        </p:nvSpPr>
-        <p:spPr>
-          <a:xfrm>
-            <a:off x="411480" y="3566160"/>
-            <a:ext cx="457200" cy="457200"/>
-          </a:xfrm>
-          <a:prstGeom prst="ellipse">
-            <a:avLst/>
-          </a:prstGeom>
-          <a:solidFill>
-            <a:srgbClr val="AD4426"/>
-          </a:solidFill>
-          <a:ln/>
-        </p:spPr>
-        <p:txBody>
-          <a:bodyPr wrap="square" lIns="0" tIns="0" rIns="0" bIns="0" rtlCol="0" anchor="ctr"/>
-          <a:lstStyle/>
-          <a:p>
-            <a:pPr algn="ctr" indent="0" marL="0">
-              <a:buNone/>
-            </a:pPr>
-            <a:r>
-              <a:rPr lang="en-US" sz="2700" b="1" dirty="0">
-                <a:solidFill>
-                  <a:srgbClr val="FFFFFF"/>
-                </a:solidFill>
-                <a:latin typeface="Cambria" pitchFamily="34" charset="0"/>
-                <a:ea typeface="Cambria" pitchFamily="34" charset="-122"/>
-                <a:cs typeface="Cambria" pitchFamily="34" charset="-120"/>
-              </a:rPr>
-              <a:t>4</a:t>
-            </a:r>
-            <a:endParaRPr lang="en-US" sz="2700" dirty="0"/>
-          </a:p>
-        </p:txBody>
-      </p:sp>
-      <p:sp>
-        <p:nvSpPr>
-          <p:cNvPr id="16" name="Text 14"/>
-          <p:cNvSpPr txBox="1"/>
-          <p:nvPr/>
-        </p:nvSpPr>
-        <p:spPr>
-          <a:xfrm>
-            <a:off x="1005840" y="3547872"/>
-            <a:ext cx="7772400" cy="502920"/>
-          </a:xfrm>
-          <a:prstGeom prst="rect">
-            <a:avLst/>
-          </a:prstGeom>
-          <a:noFill/>
-          <a:ln/>
-        </p:spPr>
-        <p:txBody>
-          <a:bodyPr wrap="square" lIns="0" tIns="0" rIns="0" bIns="0" rtlCol="0" anchor="ctr"/>
-          <a:lstStyle/>
-          <a:p>
-            <a:pPr indent="0" marL="0">
-              <a:buNone/>
-            </a:pPr>
-            <a:r>
-              <a:rPr lang="en-US" sz="2700" dirty="0">
-                <a:solidFill>
-                  <a:srgbClr val="2B2318"/>
-                </a:solidFill>
-                <a:latin typeface="Calibri" pitchFamily="34" charset="0"/>
-                <a:ea typeface="Calibri" pitchFamily="34" charset="-122"/>
-                <a:cs typeface="Calibri" pitchFamily="34" charset="-120"/>
-              </a:rPr>
-              <a:t>Fertig? Lies die Quelle schon einmal.</a:t>
+              <a:rPr lang="en-US" sz="2700" b="1" dirty="0">
+                <a:solidFill>
+                  <a:srgbClr val="D9A441"/>
+                </a:solidFill>
+                <a:latin typeface="Calibri" pitchFamily="34" charset="0"/>
+                <a:ea typeface="Calibri" pitchFamily="34" charset="-122"/>
+                <a:cs typeface="Calibri" pitchFamily="34" charset="-120"/>
+              </a:rPr>
+              <a:t>⚠ Lebensdaten prüfen: War der Autor dabei?</a:t>
             </a:r>
             <a:endParaRPr lang="en-US" sz="2700" dirty="0"/>
           </a:p>
@@ -4916,7 +5164,7 @@
                 <a:ea typeface="Cambria" pitchFamily="34" charset="-122"/>
                 <a:cs typeface="Cambria" pitchFamily="34" charset="-120"/>
               </a:rPr>
-              <a:t>Zum Autor und zur Schrift</a:t>
+              <a:t>Jetzt du: formale Aspekte</a:t>
             </a:r>
             <a:endParaRPr lang="en-US" sz="3600" dirty="0"/>
           </a:p>
@@ -4924,30 +5172,46 @@
       </p:sp>
       <p:sp>
         <p:nvSpPr>
-          <p:cNvPr id="8" name="Shape 6"/>
-          <p:cNvSpPr/>
-          <p:nvPr/>
-        </p:nvSpPr>
-        <p:spPr>
-          <a:xfrm>
-            <a:off x="411480" y="1188720"/>
-            <a:ext cx="8321040" cy="1051560"/>
-          </a:xfrm>
-          <a:prstGeom prst="roundRect">
-            <a:avLst>
-              <a:gd name="adj" fmla="val 6957"/>
-            </a:avLst>
-          </a:prstGeom>
-          <a:solidFill>
-            <a:srgbClr val="F4ECDE"/>
-          </a:solidFill>
-          <a:ln w="12700">
-            <a:solidFill>
-              <a:srgbClr val="F4ECDE"/>
-            </a:solidFill>
-            <a:prstDash val="solid"/>
-          </a:ln>
-        </p:spPr>
+          <p:cNvPr id="8" name="Text 6"/>
+          <p:cNvSpPr txBox="1"/>
+          <p:nvPr/>
+        </p:nvSpPr>
+        <p:spPr>
+          <a:xfrm>
+            <a:off x="6537960" y="603504"/>
+            <a:ext cx="2194560" cy="457200"/>
+          </a:xfrm>
+          <a:prstGeom prst="roundRect">
+            <a:avLst>
+              <a:gd name="adj" fmla="val 16000"/>
+            </a:avLst>
+          </a:prstGeom>
+          <a:solidFill>
+            <a:srgbClr val="2B2318"/>
+          </a:solidFill>
+          <a:ln/>
+        </p:spPr>
+        <p:txBody>
+          <a:bodyPr wrap="square" lIns="0" tIns="0" rIns="0" bIns="0" rtlCol="0" anchor="ctr"/>
+          <a:lstStyle/>
+          <a:p>
+            <a:pPr algn="ctr" indent="0" marL="0">
+              <a:buNone/>
+            </a:pPr>
+            <a:r>
+              <a:rPr lang="en-US" sz="2700" b="1" dirty="0">
+                <a:solidFill>
+                  <a:srgbClr val="FFFFFF"/>
+                </a:solidFill>
+                <a:latin typeface="Calibri" pitchFamily="34" charset="0"/>
+                <a:ea typeface="Calibri" pitchFamily="34" charset="-122"/>
+                <a:cs typeface="Calibri" pitchFamily="34" charset="-120"/>
+              </a:rPr>
+              <a:t>4 Min.</a:t>
+            </a:r>
+            <a:endParaRPr lang="en-US" sz="2700" dirty="0"/>
+          </a:p>
+        </p:txBody>
       </p:sp>
       <p:sp>
         <p:nvSpPr>
@@ -4957,8 +5221,49 @@
         </p:nvSpPr>
         <p:spPr>
           <a:xfrm>
-            <a:off x="594360" y="1188720"/>
-            <a:ext cx="7955280" cy="1051560"/>
+            <a:off x="411480" y="1234440"/>
+            <a:ext cx="457200" cy="457200"/>
+          </a:xfrm>
+          <a:prstGeom prst="ellipse">
+            <a:avLst/>
+          </a:prstGeom>
+          <a:solidFill>
+            <a:srgbClr val="AD4426"/>
+          </a:solidFill>
+          <a:ln/>
+        </p:spPr>
+        <p:txBody>
+          <a:bodyPr wrap="square" lIns="0" tIns="0" rIns="0" bIns="0" rtlCol="0" anchor="ctr"/>
+          <a:lstStyle/>
+          <a:p>
+            <a:pPr algn="ctr" indent="0" marL="0">
+              <a:buNone/>
+            </a:pPr>
+            <a:r>
+              <a:rPr lang="en-US" sz="2700" b="1" dirty="0">
+                <a:solidFill>
+                  <a:srgbClr val="FFFFFF"/>
+                </a:solidFill>
+                <a:latin typeface="Cambria" pitchFamily="34" charset="0"/>
+                <a:ea typeface="Cambria" pitchFamily="34" charset="-122"/>
+                <a:cs typeface="Cambria" pitchFamily="34" charset="-120"/>
+              </a:rPr>
+              <a:t>1</a:t>
+            </a:r>
+            <a:endParaRPr lang="en-US" sz="2700" dirty="0"/>
+          </a:p>
+        </p:txBody>
+      </p:sp>
+      <p:sp>
+        <p:nvSpPr>
+          <p:cNvPr id="10" name="Text 8"/>
+          <p:cNvSpPr txBox="1"/>
+          <p:nvPr/>
+        </p:nvSpPr>
+        <p:spPr>
+          <a:xfrm>
+            <a:off x="1005840" y="1216152"/>
+            <a:ext cx="7772400" cy="502920"/>
           </a:xfrm>
           <a:prstGeom prst="rect">
             <a:avLst/>
@@ -4982,38 +5287,11 @@
                 <a:ea typeface="Calibri" pitchFamily="34" charset="-122"/>
                 <a:cs typeface="Calibri" pitchFamily="34" charset="-120"/>
               </a:rPr>
-              <a:t>Aristoteles (384–322 v. Chr.): Philosoph, lebte in Athen, kein Bürger.</a:t>
-            </a:r>
-            <a:endParaRPr lang="en-US" sz="2700" dirty="0"/>
-          </a:p>
-        </p:txBody>
-      </p:sp>
-      <p:sp>
-        <p:nvSpPr>
-          <p:cNvPr id="10" name="Shape 8"/>
-          <p:cNvSpPr/>
-          <p:nvPr/>
-        </p:nvSpPr>
-        <p:spPr>
-          <a:xfrm>
-            <a:off x="411480" y="2377440"/>
-            <a:ext cx="8321040" cy="1051560"/>
-          </a:xfrm>
-          <a:prstGeom prst="roundRect">
-            <a:avLst>
-              <a:gd name="adj" fmla="val 6957"/>
-            </a:avLst>
-          </a:prstGeom>
-          <a:solidFill>
-            <a:srgbClr val="FFFFFF"/>
-          </a:solidFill>
-          <a:ln w="12700">
-            <a:solidFill>
-              <a:srgbClr val="FFFFFF"/>
-            </a:solidFill>
-            <a:prstDash val="solid"/>
-          </a:ln>
-        </p:spPr>
+              <a:t>Lies den Kasten „Zum Autor“ auf dem Blatt.</a:t>
+            </a:r>
+            <a:endParaRPr lang="en-US" sz="2700" dirty="0"/>
+          </a:p>
+        </p:txBody>
       </p:sp>
       <p:sp>
         <p:nvSpPr>
@@ -5023,8 +5301,49 @@
         </p:nvSpPr>
         <p:spPr>
           <a:xfrm>
-            <a:off x="594360" y="2377440"/>
-            <a:ext cx="7955280" cy="1051560"/>
+            <a:off x="411480" y="2011680"/>
+            <a:ext cx="457200" cy="457200"/>
+          </a:xfrm>
+          <a:prstGeom prst="ellipse">
+            <a:avLst/>
+          </a:prstGeom>
+          <a:solidFill>
+            <a:srgbClr val="AD4426"/>
+          </a:solidFill>
+          <a:ln/>
+        </p:spPr>
+        <p:txBody>
+          <a:bodyPr wrap="square" lIns="0" tIns="0" rIns="0" bIns="0" rtlCol="0" anchor="ctr"/>
+          <a:lstStyle/>
+          <a:p>
+            <a:pPr algn="ctr" indent="0" marL="0">
+              <a:buNone/>
+            </a:pPr>
+            <a:r>
+              <a:rPr lang="en-US" sz="2700" b="1" dirty="0">
+                <a:solidFill>
+                  <a:srgbClr val="FFFFFF"/>
+                </a:solidFill>
+                <a:latin typeface="Cambria" pitchFamily="34" charset="0"/>
+                <a:ea typeface="Cambria" pitchFamily="34" charset="-122"/>
+                <a:cs typeface="Cambria" pitchFamily="34" charset="-120"/>
+              </a:rPr>
+              <a:t>2</a:t>
+            </a:r>
+            <a:endParaRPr lang="en-US" sz="2700" dirty="0"/>
+          </a:p>
+        </p:txBody>
+      </p:sp>
+      <p:sp>
+        <p:nvSpPr>
+          <p:cNvPr id="12" name="Text 10"/>
+          <p:cNvSpPr txBox="1"/>
+          <p:nvPr/>
+        </p:nvSpPr>
+        <p:spPr>
+          <a:xfrm>
+            <a:off x="1005840" y="1993392"/>
+            <a:ext cx="7772400" cy="502920"/>
           </a:xfrm>
           <a:prstGeom prst="rect">
             <a:avLst/>
@@ -5048,38 +5367,11 @@
                 <a:ea typeface="Calibri" pitchFamily="34" charset="-122"/>
                 <a:cs typeface="Calibri" pitchFamily="34" charset="-120"/>
               </a:rPr>
-              <a:t>„Der Staat der Athener“, um 330 v. Chr., für seine Schüler und gebildete Leser.</a:t>
-            </a:r>
-            <a:endParaRPr lang="en-US" sz="2700" dirty="0"/>
-          </a:p>
-        </p:txBody>
-      </p:sp>
-      <p:sp>
-        <p:nvSpPr>
-          <p:cNvPr id="12" name="Shape 10"/>
-          <p:cNvSpPr/>
-          <p:nvPr/>
-        </p:nvSpPr>
-        <p:spPr>
-          <a:xfrm>
-            <a:off x="411480" y="3566160"/>
-            <a:ext cx="8321040" cy="1051560"/>
-          </a:xfrm>
-          <a:prstGeom prst="roundRect">
-            <a:avLst>
-              <a:gd name="adj" fmla="val 6957"/>
-            </a:avLst>
-          </a:prstGeom>
-          <a:solidFill>
-            <a:srgbClr val="F4ECDE"/>
-          </a:solidFill>
-          <a:ln w="12700">
-            <a:solidFill>
-              <a:srgbClr val="F4ECDE"/>
-            </a:solidFill>
-            <a:prstDash val="solid"/>
-          </a:ln>
-        </p:spPr>
+              <a:t>Fülle die fünf Felder in 2a aus.</a:t>
+            </a:r>
+            <a:endParaRPr lang="en-US" sz="2700" dirty="0"/>
+          </a:p>
+        </p:txBody>
       </p:sp>
       <p:sp>
         <p:nvSpPr>
@@ -5089,8 +5381,49 @@
         </p:nvSpPr>
         <p:spPr>
           <a:xfrm>
-            <a:off x="594360" y="3566160"/>
-            <a:ext cx="7955280" cy="1051560"/>
+            <a:off x="411480" y="2788920"/>
+            <a:ext cx="457200" cy="457200"/>
+          </a:xfrm>
+          <a:prstGeom prst="ellipse">
+            <a:avLst/>
+          </a:prstGeom>
+          <a:solidFill>
+            <a:srgbClr val="AD4426"/>
+          </a:solidFill>
+          <a:ln/>
+        </p:spPr>
+        <p:txBody>
+          <a:bodyPr wrap="square" lIns="0" tIns="0" rIns="0" bIns="0" rtlCol="0" anchor="ctr"/>
+          <a:lstStyle/>
+          <a:p>
+            <a:pPr algn="ctr" indent="0" marL="0">
+              <a:buNone/>
+            </a:pPr>
+            <a:r>
+              <a:rPr lang="en-US" sz="2700" b="1" dirty="0">
+                <a:solidFill>
+                  <a:srgbClr val="FFFFFF"/>
+                </a:solidFill>
+                <a:latin typeface="Cambria" pitchFamily="34" charset="0"/>
+                <a:ea typeface="Cambria" pitchFamily="34" charset="-122"/>
+                <a:cs typeface="Cambria" pitchFamily="34" charset="-120"/>
+              </a:rPr>
+              <a:t>3</a:t>
+            </a:r>
+            <a:endParaRPr lang="en-US" sz="2700" dirty="0"/>
+          </a:p>
+        </p:txBody>
+      </p:sp>
+      <p:sp>
+        <p:nvSpPr>
+          <p:cNvPr id="14" name="Text 12"/>
+          <p:cNvSpPr txBox="1"/>
+          <p:nvPr/>
+        </p:nvSpPr>
+        <p:spPr>
+          <a:xfrm>
+            <a:off x="1005840" y="2770632"/>
+            <a:ext cx="7772400" cy="502920"/>
           </a:xfrm>
           <a:prstGeom prst="rect">
             <a:avLst/>
@@ -5114,7 +5447,87 @@
                 <a:ea typeface="Calibri" pitchFamily="34" charset="-122"/>
                 <a:cs typeface="Calibri" pitchFamily="34" charset="-120"/>
               </a:rPr>
-              <a:t>Kleisthenes’ Reform war damals rund 180 Jahre her.</a:t>
+              <a:t>Schreibe einen Einleitungssatz.</a:t>
+            </a:r>
+            <a:endParaRPr lang="en-US" sz="2700" dirty="0"/>
+          </a:p>
+        </p:txBody>
+      </p:sp>
+      <p:sp>
+        <p:nvSpPr>
+          <p:cNvPr id="15" name="Text 13"/>
+          <p:cNvSpPr txBox="1"/>
+          <p:nvPr/>
+        </p:nvSpPr>
+        <p:spPr>
+          <a:xfrm>
+            <a:off x="411480" y="3566160"/>
+            <a:ext cx="457200" cy="457200"/>
+          </a:xfrm>
+          <a:prstGeom prst="ellipse">
+            <a:avLst/>
+          </a:prstGeom>
+          <a:solidFill>
+            <a:srgbClr val="AD4426"/>
+          </a:solidFill>
+          <a:ln/>
+        </p:spPr>
+        <p:txBody>
+          <a:bodyPr wrap="square" lIns="0" tIns="0" rIns="0" bIns="0" rtlCol="0" anchor="ctr"/>
+          <a:lstStyle/>
+          <a:p>
+            <a:pPr algn="ctr" indent="0" marL="0">
+              <a:buNone/>
+            </a:pPr>
+            <a:r>
+              <a:rPr lang="en-US" sz="2700" b="1" dirty="0">
+                <a:solidFill>
+                  <a:srgbClr val="FFFFFF"/>
+                </a:solidFill>
+                <a:latin typeface="Cambria" pitchFamily="34" charset="0"/>
+                <a:ea typeface="Cambria" pitchFamily="34" charset="-122"/>
+                <a:cs typeface="Cambria" pitchFamily="34" charset="-120"/>
+              </a:rPr>
+              <a:t>4</a:t>
+            </a:r>
+            <a:endParaRPr lang="en-US" sz="2700" dirty="0"/>
+          </a:p>
+        </p:txBody>
+      </p:sp>
+      <p:sp>
+        <p:nvSpPr>
+          <p:cNvPr id="16" name="Text 14"/>
+          <p:cNvSpPr txBox="1"/>
+          <p:nvPr/>
+        </p:nvSpPr>
+        <p:spPr>
+          <a:xfrm>
+            <a:off x="1005840" y="3547872"/>
+            <a:ext cx="7772400" cy="502920"/>
+          </a:xfrm>
+          <a:prstGeom prst="rect">
+            <a:avLst/>
+          </a:prstGeom>
+          <a:noFill/>
+          <a:ln/>
+        </p:spPr>
+        <p:txBody>
+          <a:bodyPr wrap="square" lIns="0" tIns="0" rIns="0" bIns="0" rtlCol="0" anchor="ctr"/>
+          <a:lstStyle/>
+          <a:p>
+            <a:pPr indent="0" marL="0">
+              <a:buNone/>
+            </a:pPr>
+            <a:r>
+              <a:rPr lang="en-US" sz="2700" dirty="0">
+                <a:solidFill>
+                  <a:srgbClr val="2B2318"/>
+                </a:solidFill>
+                <a:latin typeface="Calibri" pitchFamily="34" charset="0"/>
+                <a:ea typeface="Calibri" pitchFamily="34" charset="-122"/>
+                <a:cs typeface="Calibri" pitchFamily="34" charset="-120"/>
+              </a:rPr>
+              <a:t>Fertig? Lies die Quelle schon einmal.</a:t>
             </a:r>
             <a:endParaRPr lang="en-US" sz="2700" dirty="0"/>
           </a:p>
@@ -5448,7 +5861,7 @@
                 <a:ea typeface="Cambria" pitchFamily="34" charset="-122"/>
                 <a:cs typeface="Cambria" pitchFamily="34" charset="-120"/>
               </a:rPr>
-              <a:t>Lösung: Einleitung</a:t>
+              <a:t>Zum Autor und zur Schrift</a:t>
             </a:r>
             <a:endParaRPr lang="en-US" sz="3600" dirty="0"/>
           </a:p>
@@ -5456,46 +5869,30 @@
       </p:sp>
       <p:sp>
         <p:nvSpPr>
-          <p:cNvPr id="8" name="Text 6"/>
-          <p:cNvSpPr txBox="1"/>
-          <p:nvPr/>
-        </p:nvSpPr>
-        <p:spPr>
-          <a:xfrm>
-            <a:off x="6537960" y="603504"/>
-            <a:ext cx="2194560" cy="457200"/>
-          </a:xfrm>
-          <a:prstGeom prst="roundRect">
-            <a:avLst>
-              <a:gd name="adj" fmla="val 16000"/>
-            </a:avLst>
-          </a:prstGeom>
-          <a:solidFill>
-            <a:srgbClr val="D9A441"/>
-          </a:solidFill>
-          <a:ln/>
-        </p:spPr>
-        <p:txBody>
-          <a:bodyPr wrap="square" lIns="0" tIns="0" rIns="0" bIns="0" rtlCol="0" anchor="ctr"/>
-          <a:lstStyle/>
-          <a:p>
-            <a:pPr algn="ctr" indent="0" marL="0">
-              <a:buNone/>
-            </a:pPr>
-            <a:r>
-              <a:rPr lang="en-US" sz="2700" b="1" dirty="0">
-                <a:solidFill>
-                  <a:srgbClr val="2B2318"/>
-                </a:solidFill>
-                <a:latin typeface="Calibri" pitchFamily="34" charset="0"/>
-                <a:ea typeface="Calibri" pitchFamily="34" charset="-122"/>
-                <a:cs typeface="Calibri" pitchFamily="34" charset="-120"/>
-              </a:rPr>
-              <a:t>Lösung</a:t>
-            </a:r>
-            <a:endParaRPr lang="en-US" sz="2700" dirty="0"/>
-          </a:p>
-        </p:txBody>
+          <p:cNvPr id="8" name="Shape 6"/>
+          <p:cNvSpPr/>
+          <p:nvPr/>
+        </p:nvSpPr>
+        <p:spPr>
+          <a:xfrm>
+            <a:off x="411480" y="1188720"/>
+            <a:ext cx="8321040" cy="1051560"/>
+          </a:xfrm>
+          <a:prstGeom prst="roundRect">
+            <a:avLst>
+              <a:gd name="adj" fmla="val 6957"/>
+            </a:avLst>
+          </a:prstGeom>
+          <a:solidFill>
+            <a:srgbClr val="F4ECDE"/>
+          </a:solidFill>
+          <a:ln w="12700">
+            <a:solidFill>
+              <a:srgbClr val="F4ECDE"/>
+            </a:solidFill>
+            <a:prstDash val="solid"/>
+          </a:ln>
+        </p:spPr>
       </p:sp>
       <p:sp>
         <p:nvSpPr>
@@ -5505,8 +5902,8 @@
         </p:nvSpPr>
         <p:spPr>
           <a:xfrm>
-            <a:off x="411480" y="1188720"/>
-            <a:ext cx="8321040" cy="3566160"/>
+            <a:off x="594360" y="1188720"/>
+            <a:ext cx="7955280" cy="1051560"/>
           </a:xfrm>
           <a:prstGeom prst="rect">
             <a:avLst/>
@@ -5515,14 +5912,14 @@
           <a:ln/>
         </p:spPr>
         <p:txBody>
-          <a:bodyPr wrap="square" lIns="0" tIns="0" rIns="0" bIns="0" rtlCol="0" anchor="t"/>
+          <a:bodyPr wrap="square" lIns="0" tIns="0" rIns="0" bIns="0" rtlCol="0" anchor="ctr"/>
           <a:lstStyle/>
           <a:p>
             <a:pPr indent="0" marL="0">
               <a:buNone/>
             </a:pPr>
             <a:r>
-              <a:rPr lang="en-US" sz="2700" i="1" dirty="0">
+              <a:rPr lang="en-US" sz="2700" dirty="0">
                 <a:solidFill>
                   <a:srgbClr val="2B2318"/>
                 </a:solidFill>
@@ -5530,7 +5927,139 @@
                 <a:ea typeface="Calibri" pitchFamily="34" charset="-122"/>
                 <a:cs typeface="Calibri" pitchFamily="34" charset="-120"/>
               </a:rPr>
-              <a:t>„Bei der Quelle handelt es sich um einen Auszug aus der Schrift „Der Staat der Athener“ des griechischen Philosophen Aristoteles, die um 330 v. Chr. entstand. Sie richtet sich an seine Schüler und gebildete Leser und behandelt die Reformen des Kleisthenes 508/07 v. Chr.“</a:t>
+              <a:t>Aristoteles (384–322 v. Chr.): Philosoph, lebte in Athen, kein Bürger.</a:t>
+            </a:r>
+            <a:endParaRPr lang="en-US" sz="2700" dirty="0"/>
+          </a:p>
+        </p:txBody>
+      </p:sp>
+      <p:sp>
+        <p:nvSpPr>
+          <p:cNvPr id="10" name="Shape 8"/>
+          <p:cNvSpPr/>
+          <p:nvPr/>
+        </p:nvSpPr>
+        <p:spPr>
+          <a:xfrm>
+            <a:off x="411480" y="2377440"/>
+            <a:ext cx="8321040" cy="1051560"/>
+          </a:xfrm>
+          <a:prstGeom prst="roundRect">
+            <a:avLst>
+              <a:gd name="adj" fmla="val 6957"/>
+            </a:avLst>
+          </a:prstGeom>
+          <a:solidFill>
+            <a:srgbClr val="FFFFFF"/>
+          </a:solidFill>
+          <a:ln w="12700">
+            <a:solidFill>
+              <a:srgbClr val="FFFFFF"/>
+            </a:solidFill>
+            <a:prstDash val="solid"/>
+          </a:ln>
+        </p:spPr>
+      </p:sp>
+      <p:sp>
+        <p:nvSpPr>
+          <p:cNvPr id="11" name="Text 9"/>
+          <p:cNvSpPr txBox="1"/>
+          <p:nvPr/>
+        </p:nvSpPr>
+        <p:spPr>
+          <a:xfrm>
+            <a:off x="594360" y="2377440"/>
+            <a:ext cx="7955280" cy="1051560"/>
+          </a:xfrm>
+          <a:prstGeom prst="rect">
+            <a:avLst/>
+          </a:prstGeom>
+          <a:noFill/>
+          <a:ln/>
+        </p:spPr>
+        <p:txBody>
+          <a:bodyPr wrap="square" lIns="0" tIns="0" rIns="0" bIns="0" rtlCol="0" anchor="ctr"/>
+          <a:lstStyle/>
+          <a:p>
+            <a:pPr indent="0" marL="0">
+              <a:buNone/>
+            </a:pPr>
+            <a:r>
+              <a:rPr lang="en-US" sz="2700" dirty="0">
+                <a:solidFill>
+                  <a:srgbClr val="2B2318"/>
+                </a:solidFill>
+                <a:latin typeface="Calibri" pitchFamily="34" charset="0"/>
+                <a:ea typeface="Calibri" pitchFamily="34" charset="-122"/>
+                <a:cs typeface="Calibri" pitchFamily="34" charset="-120"/>
+              </a:rPr>
+              <a:t>„Der Staat der Athener“, um 330 v. Chr., für seine Schüler und gebildete Leser.</a:t>
+            </a:r>
+            <a:endParaRPr lang="en-US" sz="2700" dirty="0"/>
+          </a:p>
+        </p:txBody>
+      </p:sp>
+      <p:sp>
+        <p:nvSpPr>
+          <p:cNvPr id="12" name="Shape 10"/>
+          <p:cNvSpPr/>
+          <p:nvPr/>
+        </p:nvSpPr>
+        <p:spPr>
+          <a:xfrm>
+            <a:off x="411480" y="3566160"/>
+            <a:ext cx="8321040" cy="1051560"/>
+          </a:xfrm>
+          <a:prstGeom prst="roundRect">
+            <a:avLst>
+              <a:gd name="adj" fmla="val 6957"/>
+            </a:avLst>
+          </a:prstGeom>
+          <a:solidFill>
+            <a:srgbClr val="F4ECDE"/>
+          </a:solidFill>
+          <a:ln w="12700">
+            <a:solidFill>
+              <a:srgbClr val="F4ECDE"/>
+            </a:solidFill>
+            <a:prstDash val="solid"/>
+          </a:ln>
+        </p:spPr>
+      </p:sp>
+      <p:sp>
+        <p:nvSpPr>
+          <p:cNvPr id="13" name="Text 11"/>
+          <p:cNvSpPr txBox="1"/>
+          <p:nvPr/>
+        </p:nvSpPr>
+        <p:spPr>
+          <a:xfrm>
+            <a:off x="594360" y="3566160"/>
+            <a:ext cx="7955280" cy="1051560"/>
+          </a:xfrm>
+          <a:prstGeom prst="rect">
+            <a:avLst/>
+          </a:prstGeom>
+          <a:noFill/>
+          <a:ln/>
+        </p:spPr>
+        <p:txBody>
+          <a:bodyPr wrap="square" lIns="0" tIns="0" rIns="0" bIns="0" rtlCol="0" anchor="ctr"/>
+          <a:lstStyle/>
+          <a:p>
+            <a:pPr indent="0" marL="0">
+              <a:buNone/>
+            </a:pPr>
+            <a:r>
+              <a:rPr lang="en-US" sz="2700" dirty="0">
+                <a:solidFill>
+                  <a:srgbClr val="2B2318"/>
+                </a:solidFill>
+                <a:latin typeface="Calibri" pitchFamily="34" charset="0"/>
+                <a:ea typeface="Calibri" pitchFamily="34" charset="-122"/>
+                <a:cs typeface="Calibri" pitchFamily="34" charset="-120"/>
+              </a:rPr>
+              <a:t>Kleisthenes’ Reform war damals rund 180 Jahre her.</a:t>
             </a:r>
             <a:endParaRPr lang="en-US" sz="2700" dirty="0"/>
           </a:p>
@@ -5719,7 +6248,7 @@
             </a:avLst>
           </a:prstGeom>
           <a:solidFill>
-            <a:srgbClr val="AD4426"/>
+            <a:srgbClr val="F4ECDE"/>
           </a:solidFill>
           <a:ln/>
         </p:spPr>
@@ -5733,7 +6262,7 @@
             <a:r>
               <a:rPr lang="en-US" sz="2700" b="1" dirty="0">
                 <a:solidFill>
-                  <a:srgbClr val="FFFFFF"/>
+                  <a:srgbClr val="998C77"/>
                 </a:solidFill>
                 <a:latin typeface="Calibri" pitchFamily="34" charset="0"/>
                 <a:ea typeface="Calibri" pitchFamily="34" charset="-122"/>
@@ -5762,7 +6291,7 @@
             </a:avLst>
           </a:prstGeom>
           <a:solidFill>
-            <a:srgbClr val="F4ECDE"/>
+            <a:srgbClr val="AD4426"/>
           </a:solidFill>
           <a:ln/>
         </p:spPr>
@@ -5776,7 +6305,7 @@
             <a:r>
               <a:rPr lang="en-US" sz="2700" b="1" dirty="0">
                 <a:solidFill>
-                  <a:srgbClr val="998C77"/>
+                  <a:srgbClr val="FFFFFF"/>
                 </a:solidFill>
                 <a:latin typeface="Calibri" pitchFamily="34" charset="0"/>
                 <a:ea typeface="Calibri" pitchFamily="34" charset="-122"/>
@@ -5864,7 +6393,7 @@
                 <a:ea typeface="Cambria" pitchFamily="34" charset="-122"/>
                 <a:cs typeface="Cambria" pitchFamily="34" charset="-120"/>
               </a:rPr>
-              <a:t>Schritt 2: Inhalt</a:t>
+              <a:t>Lösung: formale Aspekte</a:t>
             </a:r>
             <a:endParaRPr lang="en-US" sz="3600" dirty="0"/>
           </a:p>
@@ -5887,7 +6416,7 @@
             </a:avLst>
           </a:prstGeom>
           <a:solidFill>
-            <a:srgbClr val="2B2318"/>
+            <a:srgbClr val="D9A441"/>
           </a:solidFill>
           <a:ln/>
         </p:spPr>
@@ -5901,13 +6430,13 @@
             <a:r>
               <a:rPr lang="en-US" sz="2700" b="1" dirty="0">
                 <a:solidFill>
-                  <a:srgbClr val="FFFFFF"/>
-                </a:solidFill>
-                <a:latin typeface="Calibri" pitchFamily="34" charset="0"/>
-                <a:ea typeface="Calibri" pitchFamily="34" charset="-122"/>
-                <a:cs typeface="Calibri" pitchFamily="34" charset="-120"/>
-              </a:rPr>
-              <a:t>Portion 3</a:t>
+                  <a:srgbClr val="2B2318"/>
+                </a:solidFill>
+                <a:latin typeface="Calibri" pitchFamily="34" charset="0"/>
+                <a:ea typeface="Calibri" pitchFamily="34" charset="-122"/>
+                <a:cs typeface="Calibri" pitchFamily="34" charset="-120"/>
+              </a:rPr>
+              <a:t>Lösung</a:t>
             </a:r>
             <a:endParaRPr lang="en-US" sz="2700" dirty="0"/>
           </a:p>
@@ -5921,49 +6450,8 @@
         </p:nvSpPr>
         <p:spPr>
           <a:xfrm>
-            <a:off x="411480" y="1234440"/>
-            <a:ext cx="457200" cy="457200"/>
-          </a:xfrm>
-          <a:prstGeom prst="ellipse">
-            <a:avLst/>
-          </a:prstGeom>
-          <a:solidFill>
-            <a:srgbClr val="AD4426"/>
-          </a:solidFill>
-          <a:ln/>
-        </p:spPr>
-        <p:txBody>
-          <a:bodyPr wrap="square" lIns="0" tIns="0" rIns="0" bIns="0" rtlCol="0" anchor="ctr"/>
-          <a:lstStyle/>
-          <a:p>
-            <a:pPr algn="ctr" indent="0" marL="0">
-              <a:buNone/>
-            </a:pPr>
-            <a:r>
-              <a:rPr lang="en-US" sz="2700" b="1" dirty="0">
-                <a:solidFill>
-                  <a:srgbClr val="FFFFFF"/>
-                </a:solidFill>
-                <a:latin typeface="Cambria" pitchFamily="34" charset="0"/>
-                <a:ea typeface="Cambria" pitchFamily="34" charset="-122"/>
-                <a:cs typeface="Cambria" pitchFamily="34" charset="-120"/>
-              </a:rPr>
-              <a:t>1</a:t>
-            </a:r>
-            <a:endParaRPr lang="en-US" sz="2700" dirty="0"/>
-          </a:p>
-        </p:txBody>
-      </p:sp>
-      <p:sp>
-        <p:nvSpPr>
-          <p:cNvPr id="10" name="Text 8"/>
-          <p:cNvSpPr txBox="1"/>
-          <p:nvPr/>
-        </p:nvSpPr>
-        <p:spPr>
-          <a:xfrm>
-            <a:off x="1005840" y="1216152"/>
-            <a:ext cx="7772400" cy="502920"/>
+            <a:off x="411480" y="1188720"/>
+            <a:ext cx="8321040" cy="3566160"/>
           </a:xfrm>
           <a:prstGeom prst="rect">
             <a:avLst/>
@@ -5972,14 +6460,14 @@
           <a:ln/>
         </p:spPr>
         <p:txBody>
-          <a:bodyPr wrap="square" lIns="0" tIns="0" rIns="0" bIns="0" rtlCol="0" anchor="ctr"/>
+          <a:bodyPr wrap="square" lIns="0" tIns="0" rIns="0" bIns="0" rtlCol="0" anchor="t"/>
           <a:lstStyle/>
           <a:p>
             <a:pPr indent="0" marL="0">
               <a:buNone/>
             </a:pPr>
             <a:r>
-              <a:rPr lang="en-US" sz="2700" dirty="0">
+              <a:rPr lang="en-US" sz="2700" i="1" dirty="0">
                 <a:solidFill>
                   <a:srgbClr val="2B2318"/>
                 </a:solidFill>
@@ -5987,313 +6475,7 @@
                 <a:ea typeface="Calibri" pitchFamily="34" charset="-122"/>
                 <a:cs typeface="Calibri" pitchFamily="34" charset="-120"/>
               </a:rPr>
-              <a:t>In Sinnabschnitte teilen.</a:t>
-            </a:r>
-            <a:endParaRPr lang="en-US" sz="2700" dirty="0"/>
-          </a:p>
-        </p:txBody>
-      </p:sp>
-      <p:sp>
-        <p:nvSpPr>
-          <p:cNvPr id="11" name="Text 9"/>
-          <p:cNvSpPr txBox="1"/>
-          <p:nvPr/>
-        </p:nvSpPr>
-        <p:spPr>
-          <a:xfrm>
-            <a:off x="411480" y="1892808"/>
-            <a:ext cx="457200" cy="457200"/>
-          </a:xfrm>
-          <a:prstGeom prst="ellipse">
-            <a:avLst/>
-          </a:prstGeom>
-          <a:solidFill>
-            <a:srgbClr val="AD4426"/>
-          </a:solidFill>
-          <a:ln/>
-        </p:spPr>
-        <p:txBody>
-          <a:bodyPr wrap="square" lIns="0" tIns="0" rIns="0" bIns="0" rtlCol="0" anchor="ctr"/>
-          <a:lstStyle/>
-          <a:p>
-            <a:pPr algn="ctr" indent="0" marL="0">
-              <a:buNone/>
-            </a:pPr>
-            <a:r>
-              <a:rPr lang="en-US" sz="2700" b="1" dirty="0">
-                <a:solidFill>
-                  <a:srgbClr val="FFFFFF"/>
-                </a:solidFill>
-                <a:latin typeface="Cambria" pitchFamily="34" charset="0"/>
-                <a:ea typeface="Cambria" pitchFamily="34" charset="-122"/>
-                <a:cs typeface="Cambria" pitchFamily="34" charset="-120"/>
-              </a:rPr>
-              <a:t>2</a:t>
-            </a:r>
-            <a:endParaRPr lang="en-US" sz="2700" dirty="0"/>
-          </a:p>
-        </p:txBody>
-      </p:sp>
-      <p:sp>
-        <p:nvSpPr>
-          <p:cNvPr id="12" name="Text 10"/>
-          <p:cNvSpPr txBox="1"/>
-          <p:nvPr/>
-        </p:nvSpPr>
-        <p:spPr>
-          <a:xfrm>
-            <a:off x="1005840" y="1874520"/>
-            <a:ext cx="7772400" cy="502920"/>
-          </a:xfrm>
-          <a:prstGeom prst="rect">
-            <a:avLst/>
-          </a:prstGeom>
-          <a:noFill/>
-          <a:ln/>
-        </p:spPr>
-        <p:txBody>
-          <a:bodyPr wrap="square" lIns="0" tIns="0" rIns="0" bIns="0" rtlCol="0" anchor="ctr"/>
-          <a:lstStyle/>
-          <a:p>
-            <a:pPr indent="0" marL="0">
-              <a:buNone/>
-            </a:pPr>
-            <a:r>
-              <a:rPr lang="en-US" sz="2700" dirty="0">
-                <a:solidFill>
-                  <a:srgbClr val="2B2318"/>
-                </a:solidFill>
-                <a:latin typeface="Calibri" pitchFamily="34" charset="0"/>
-                <a:ea typeface="Calibri" pitchFamily="34" charset="-122"/>
-                <a:cs typeface="Calibri" pitchFamily="34" charset="-120"/>
-              </a:rPr>
-              <a:t>Kern in eigenen Worten.</a:t>
-            </a:r>
-            <a:endParaRPr lang="en-US" sz="2700" dirty="0"/>
-          </a:p>
-        </p:txBody>
-      </p:sp>
-      <p:sp>
-        <p:nvSpPr>
-          <p:cNvPr id="13" name="Text 11"/>
-          <p:cNvSpPr txBox="1"/>
-          <p:nvPr/>
-        </p:nvSpPr>
-        <p:spPr>
-          <a:xfrm>
-            <a:off x="411480" y="2551176"/>
-            <a:ext cx="457200" cy="457200"/>
-          </a:xfrm>
-          <a:prstGeom prst="ellipse">
-            <a:avLst/>
-          </a:prstGeom>
-          <a:solidFill>
-            <a:srgbClr val="AD4426"/>
-          </a:solidFill>
-          <a:ln/>
-        </p:spPr>
-        <p:txBody>
-          <a:bodyPr wrap="square" lIns="0" tIns="0" rIns="0" bIns="0" rtlCol="0" anchor="ctr"/>
-          <a:lstStyle/>
-          <a:p>
-            <a:pPr algn="ctr" indent="0" marL="0">
-              <a:buNone/>
-            </a:pPr>
-            <a:r>
-              <a:rPr lang="en-US" sz="2700" b="1" dirty="0">
-                <a:solidFill>
-                  <a:srgbClr val="FFFFFF"/>
-                </a:solidFill>
-                <a:latin typeface="Cambria" pitchFamily="34" charset="0"/>
-                <a:ea typeface="Cambria" pitchFamily="34" charset="-122"/>
-                <a:cs typeface="Cambria" pitchFamily="34" charset="-120"/>
-              </a:rPr>
-              <a:t>3</a:t>
-            </a:r>
-            <a:endParaRPr lang="en-US" sz="2700" dirty="0"/>
-          </a:p>
-        </p:txBody>
-      </p:sp>
-      <p:sp>
-        <p:nvSpPr>
-          <p:cNvPr id="14" name="Text 12"/>
-          <p:cNvSpPr txBox="1"/>
-          <p:nvPr/>
-        </p:nvSpPr>
-        <p:spPr>
-          <a:xfrm>
-            <a:off x="1005840" y="2532888"/>
-            <a:ext cx="7772400" cy="502920"/>
-          </a:xfrm>
-          <a:prstGeom prst="rect">
-            <a:avLst/>
-          </a:prstGeom>
-          <a:noFill/>
-          <a:ln/>
-        </p:spPr>
-        <p:txBody>
-          <a:bodyPr wrap="square" lIns="0" tIns="0" rIns="0" bIns="0" rtlCol="0" anchor="ctr"/>
-          <a:lstStyle/>
-          <a:p>
-            <a:pPr indent="0" marL="0">
-              <a:buNone/>
-            </a:pPr>
-            <a:r>
-              <a:rPr lang="en-US" sz="2700" dirty="0">
-                <a:solidFill>
-                  <a:srgbClr val="2B2318"/>
-                </a:solidFill>
-                <a:latin typeface="Calibri" pitchFamily="34" charset="0"/>
-                <a:ea typeface="Calibri" pitchFamily="34" charset="-122"/>
-                <a:cs typeface="Calibri" pitchFamily="34" charset="-120"/>
-              </a:rPr>
-              <a:t>Indirekte Rede: „er habe …“</a:t>
-            </a:r>
-            <a:endParaRPr lang="en-US" sz="2700" dirty="0"/>
-          </a:p>
-        </p:txBody>
-      </p:sp>
-      <p:sp>
-        <p:nvSpPr>
-          <p:cNvPr id="15" name="Text 13"/>
-          <p:cNvSpPr txBox="1"/>
-          <p:nvPr/>
-        </p:nvSpPr>
-        <p:spPr>
-          <a:xfrm>
-            <a:off x="411480" y="3209544"/>
-            <a:ext cx="457200" cy="457200"/>
-          </a:xfrm>
-          <a:prstGeom prst="ellipse">
-            <a:avLst/>
-          </a:prstGeom>
-          <a:solidFill>
-            <a:srgbClr val="AD4426"/>
-          </a:solidFill>
-          <a:ln/>
-        </p:spPr>
-        <p:txBody>
-          <a:bodyPr wrap="square" lIns="0" tIns="0" rIns="0" bIns="0" rtlCol="0" anchor="ctr"/>
-          <a:lstStyle/>
-          <a:p>
-            <a:pPr algn="ctr" indent="0" marL="0">
-              <a:buNone/>
-            </a:pPr>
-            <a:r>
-              <a:rPr lang="en-US" sz="2700" b="1" dirty="0">
-                <a:solidFill>
-                  <a:srgbClr val="FFFFFF"/>
-                </a:solidFill>
-                <a:latin typeface="Cambria" pitchFamily="34" charset="0"/>
-                <a:ea typeface="Cambria" pitchFamily="34" charset="-122"/>
-                <a:cs typeface="Cambria" pitchFamily="34" charset="-120"/>
-              </a:rPr>
-              <a:t>4</a:t>
-            </a:r>
-            <a:endParaRPr lang="en-US" sz="2700" dirty="0"/>
-          </a:p>
-        </p:txBody>
-      </p:sp>
-      <p:sp>
-        <p:nvSpPr>
-          <p:cNvPr id="16" name="Text 14"/>
-          <p:cNvSpPr txBox="1"/>
-          <p:nvPr/>
-        </p:nvSpPr>
-        <p:spPr>
-          <a:xfrm>
-            <a:off x="1005840" y="3191256"/>
-            <a:ext cx="7772400" cy="502920"/>
-          </a:xfrm>
-          <a:prstGeom prst="rect">
-            <a:avLst/>
-          </a:prstGeom>
-          <a:noFill/>
-          <a:ln/>
-        </p:spPr>
-        <p:txBody>
-          <a:bodyPr wrap="square" lIns="0" tIns="0" rIns="0" bIns="0" rtlCol="0" anchor="ctr"/>
-          <a:lstStyle/>
-          <a:p>
-            <a:pPr indent="0" marL="0">
-              <a:buNone/>
-            </a:pPr>
-            <a:r>
-              <a:rPr lang="en-US" sz="2700" dirty="0">
-                <a:solidFill>
-                  <a:srgbClr val="2B2318"/>
-                </a:solidFill>
-                <a:latin typeface="Calibri" pitchFamily="34" charset="0"/>
-                <a:ea typeface="Calibri" pitchFamily="34" charset="-122"/>
-                <a:cs typeface="Calibri" pitchFamily="34" charset="-120"/>
-              </a:rPr>
-              <a:t>Zeilen angeben: (Z. 6)</a:t>
-            </a:r>
-            <a:endParaRPr lang="en-US" sz="2700" dirty="0"/>
-          </a:p>
-        </p:txBody>
-      </p:sp>
-      <p:sp>
-        <p:nvSpPr>
-          <p:cNvPr id="17" name="Shape 15"/>
-          <p:cNvSpPr/>
-          <p:nvPr/>
-        </p:nvSpPr>
-        <p:spPr>
-          <a:xfrm>
-            <a:off x="411480" y="3931920"/>
-            <a:ext cx="8321040" cy="777240"/>
-          </a:xfrm>
-          <a:prstGeom prst="roundRect">
-            <a:avLst>
-              <a:gd name="adj" fmla="val 9412"/>
-            </a:avLst>
-          </a:prstGeom>
-          <a:solidFill>
-            <a:srgbClr val="2B2318"/>
-          </a:solidFill>
-          <a:ln w="12700">
-            <a:solidFill>
-              <a:srgbClr val="2B2318"/>
-            </a:solidFill>
-            <a:prstDash val="solid"/>
-          </a:ln>
-        </p:spPr>
-      </p:sp>
-      <p:sp>
-        <p:nvSpPr>
-          <p:cNvPr id="18" name="Text 16"/>
-          <p:cNvSpPr txBox="1"/>
-          <p:nvPr/>
-        </p:nvSpPr>
-        <p:spPr>
-          <a:xfrm>
-            <a:off x="594360" y="3931920"/>
-            <a:ext cx="7955280" cy="777240"/>
-          </a:xfrm>
-          <a:prstGeom prst="rect">
-            <a:avLst/>
-          </a:prstGeom>
-          <a:noFill/>
-          <a:ln/>
-        </p:spPr>
-        <p:txBody>
-          <a:bodyPr wrap="square" lIns="0" tIns="0" rIns="0" bIns="0" rtlCol="0" anchor="ctr"/>
-          <a:lstStyle/>
-          <a:p>
-            <a:pPr indent="0" marL="0">
-              <a:buNone/>
-            </a:pPr>
-            <a:r>
-              <a:rPr lang="en-US" sz="2700" b="1" dirty="0">
-                <a:solidFill>
-                  <a:srgbClr val="D9A441"/>
-                </a:solidFill>
-                <a:latin typeface="Calibri" pitchFamily="34" charset="0"/>
-                <a:ea typeface="Calibri" pitchFamily="34" charset="-122"/>
-                <a:cs typeface="Calibri" pitchFamily="34" charset="-120"/>
-              </a:rPr>
-              <a:t>⚠ Noch keine Meinung – die kommt erst in Schritt 4.</a:t>
+              <a:t>„Bei der Quelle handelt es sich um einen Auszug aus der Schrift „Der Staat der Athener“ des griechischen Philosophen Aristoteles, die um 330 v. Chr. in Athen entstand. Sie richtet sich an seine Schüler und gebildete Leser und behandelt die Reformen des Kleisthenes 508/07 v. Chr.“</a:t>
             </a:r>
             <a:endParaRPr lang="en-US" sz="2700" dirty="0"/>
           </a:p>
@@ -6627,7 +6809,7 @@
                 <a:ea typeface="Cambria" pitchFamily="34" charset="-122"/>
                 <a:cs typeface="Cambria" pitchFamily="34" charset="-120"/>
               </a:rPr>
-              <a:t>So geht's: Z. 1–4</a:t>
+              <a:t>2b Inhaltliche Aspekte</a:t>
             </a:r>
             <a:endParaRPr lang="en-US" sz="3600" dirty="0"/>
           </a:p>
@@ -6670,7 +6852,7 @@
                 <a:ea typeface="Calibri" pitchFamily="34" charset="-122"/>
                 <a:cs typeface="Calibri" pitchFamily="34" charset="-120"/>
               </a:rPr>
-              <a:t>Lehrkraft</a:t>
+              <a:t>Portion 3</a:t>
             </a:r>
             <a:endParaRPr lang="en-US" sz="2700" dirty="0"/>
           </a:p>
@@ -6684,8 +6866,49 @@
         </p:nvSpPr>
         <p:spPr>
           <a:xfrm>
-            <a:off x="411480" y="1188720"/>
-            <a:ext cx="8321040" cy="3566160"/>
+            <a:off x="411480" y="1234440"/>
+            <a:ext cx="457200" cy="457200"/>
+          </a:xfrm>
+          <a:prstGeom prst="ellipse">
+            <a:avLst/>
+          </a:prstGeom>
+          <a:solidFill>
+            <a:srgbClr val="AD4426"/>
+          </a:solidFill>
+          <a:ln/>
+        </p:spPr>
+        <p:txBody>
+          <a:bodyPr wrap="square" lIns="0" tIns="0" rIns="0" bIns="0" rtlCol="0" anchor="ctr"/>
+          <a:lstStyle/>
+          <a:p>
+            <a:pPr algn="ctr" indent="0" marL="0">
+              <a:buNone/>
+            </a:pPr>
+            <a:r>
+              <a:rPr lang="en-US" sz="2700" b="1" dirty="0">
+                <a:solidFill>
+                  <a:srgbClr val="FFFFFF"/>
+                </a:solidFill>
+                <a:latin typeface="Cambria" pitchFamily="34" charset="0"/>
+                <a:ea typeface="Cambria" pitchFamily="34" charset="-122"/>
+                <a:cs typeface="Cambria" pitchFamily="34" charset="-120"/>
+              </a:rPr>
+              <a:t>1</a:t>
+            </a:r>
+            <a:endParaRPr lang="en-US" sz="2700" dirty="0"/>
+          </a:p>
+        </p:txBody>
+      </p:sp>
+      <p:sp>
+        <p:nvSpPr>
+          <p:cNvPr id="10" name="Text 8"/>
+          <p:cNvSpPr txBox="1"/>
+          <p:nvPr/>
+        </p:nvSpPr>
+        <p:spPr>
+          <a:xfrm>
+            <a:off x="1005840" y="1216152"/>
+            <a:ext cx="7772400" cy="502920"/>
           </a:xfrm>
           <a:prstGeom prst="rect">
             <a:avLst/>
@@ -6694,14 +6917,14 @@
           <a:ln/>
         </p:spPr>
         <p:txBody>
-          <a:bodyPr wrap="square" lIns="0" tIns="0" rIns="0" bIns="0" rtlCol="0" anchor="t"/>
+          <a:bodyPr wrap="square" lIns="0" tIns="0" rIns="0" bIns="0" rtlCol="0" anchor="ctr"/>
           <a:lstStyle/>
           <a:p>
             <a:pPr indent="0" marL="0">
               <a:buNone/>
             </a:pPr>
             <a:r>
-              <a:rPr lang="en-US" sz="2700" i="1" dirty="0">
+              <a:rPr lang="en-US" sz="2700" dirty="0">
                 <a:solidFill>
                   <a:srgbClr val="2B2318"/>
                 </a:solidFill>
@@ -6709,7 +6932,313 @@
                 <a:ea typeface="Calibri" pitchFamily="34" charset="-122"/>
                 <a:cs typeface="Calibri" pitchFamily="34" charset="-120"/>
               </a:rPr>
-              <a:t>„Zunächst berichtet Aristoteles, nach dem Sturz der Tyrannen hätten Isagoras und Kleisthenes um die Macht gekämpft (Z. 1). Kleisthenes habe das Volk für sich gewonnen, indem er ihm die Macht im Staat übergeben habe (Z. 2–4).“</a:t>
+              <a:t>Wesentliche Aussage je Abschnitt.</a:t>
+            </a:r>
+            <a:endParaRPr lang="en-US" sz="2700" dirty="0"/>
+          </a:p>
+        </p:txBody>
+      </p:sp>
+      <p:sp>
+        <p:nvSpPr>
+          <p:cNvPr id="11" name="Text 9"/>
+          <p:cNvSpPr txBox="1"/>
+          <p:nvPr/>
+        </p:nvSpPr>
+        <p:spPr>
+          <a:xfrm>
+            <a:off x="411480" y="1892808"/>
+            <a:ext cx="457200" cy="457200"/>
+          </a:xfrm>
+          <a:prstGeom prst="ellipse">
+            <a:avLst/>
+          </a:prstGeom>
+          <a:solidFill>
+            <a:srgbClr val="AD4426"/>
+          </a:solidFill>
+          <a:ln/>
+        </p:spPr>
+        <p:txBody>
+          <a:bodyPr wrap="square" lIns="0" tIns="0" rIns="0" bIns="0" rtlCol="0" anchor="ctr"/>
+          <a:lstStyle/>
+          <a:p>
+            <a:pPr algn="ctr" indent="0" marL="0">
+              <a:buNone/>
+            </a:pPr>
+            <a:r>
+              <a:rPr lang="en-US" sz="2700" b="1" dirty="0">
+                <a:solidFill>
+                  <a:srgbClr val="FFFFFF"/>
+                </a:solidFill>
+                <a:latin typeface="Cambria" pitchFamily="34" charset="0"/>
+                <a:ea typeface="Cambria" pitchFamily="34" charset="-122"/>
+                <a:cs typeface="Cambria" pitchFamily="34" charset="-120"/>
+              </a:rPr>
+              <a:t>2</a:t>
+            </a:r>
+            <a:endParaRPr lang="en-US" sz="2700" dirty="0"/>
+          </a:p>
+        </p:txBody>
+      </p:sp>
+      <p:sp>
+        <p:nvSpPr>
+          <p:cNvPr id="12" name="Text 10"/>
+          <p:cNvSpPr txBox="1"/>
+          <p:nvPr/>
+        </p:nvSpPr>
+        <p:spPr>
+          <a:xfrm>
+            <a:off x="1005840" y="1874520"/>
+            <a:ext cx="7772400" cy="502920"/>
+          </a:xfrm>
+          <a:prstGeom prst="rect">
+            <a:avLst/>
+          </a:prstGeom>
+          <a:noFill/>
+          <a:ln/>
+        </p:spPr>
+        <p:txBody>
+          <a:bodyPr wrap="square" lIns="0" tIns="0" rIns="0" bIns="0" rtlCol="0" anchor="ctr"/>
+          <a:lstStyle/>
+          <a:p>
+            <a:pPr indent="0" marL="0">
+              <a:buNone/>
+            </a:pPr>
+            <a:r>
+              <a:rPr lang="en-US" sz="2700" dirty="0">
+                <a:solidFill>
+                  <a:srgbClr val="2B2318"/>
+                </a:solidFill>
+                <a:latin typeface="Calibri" pitchFamily="34" charset="0"/>
+                <a:ea typeface="Calibri" pitchFamily="34" charset="-122"/>
+                <a:cs typeface="Calibri" pitchFamily="34" charset="-120"/>
+              </a:rPr>
+              <a:t>Eigene Worte, indirekte Rede: „er habe …“</a:t>
+            </a:r>
+            <a:endParaRPr lang="en-US" sz="2700" dirty="0"/>
+          </a:p>
+        </p:txBody>
+      </p:sp>
+      <p:sp>
+        <p:nvSpPr>
+          <p:cNvPr id="13" name="Text 11"/>
+          <p:cNvSpPr txBox="1"/>
+          <p:nvPr/>
+        </p:nvSpPr>
+        <p:spPr>
+          <a:xfrm>
+            <a:off x="411480" y="2551176"/>
+            <a:ext cx="457200" cy="457200"/>
+          </a:xfrm>
+          <a:prstGeom prst="ellipse">
+            <a:avLst/>
+          </a:prstGeom>
+          <a:solidFill>
+            <a:srgbClr val="AD4426"/>
+          </a:solidFill>
+          <a:ln/>
+        </p:spPr>
+        <p:txBody>
+          <a:bodyPr wrap="square" lIns="0" tIns="0" rIns="0" bIns="0" rtlCol="0" anchor="ctr"/>
+          <a:lstStyle/>
+          <a:p>
+            <a:pPr algn="ctr" indent="0" marL="0">
+              <a:buNone/>
+            </a:pPr>
+            <a:r>
+              <a:rPr lang="en-US" sz="2700" b="1" dirty="0">
+                <a:solidFill>
+                  <a:srgbClr val="FFFFFF"/>
+                </a:solidFill>
+                <a:latin typeface="Cambria" pitchFamily="34" charset="0"/>
+                <a:ea typeface="Cambria" pitchFamily="34" charset="-122"/>
+                <a:cs typeface="Cambria" pitchFamily="34" charset="-120"/>
+              </a:rPr>
+              <a:t>3</a:t>
+            </a:r>
+            <a:endParaRPr lang="en-US" sz="2700" dirty="0"/>
+          </a:p>
+        </p:txBody>
+      </p:sp>
+      <p:sp>
+        <p:nvSpPr>
+          <p:cNvPr id="14" name="Text 12"/>
+          <p:cNvSpPr txBox="1"/>
+          <p:nvPr/>
+        </p:nvSpPr>
+        <p:spPr>
+          <a:xfrm>
+            <a:off x="1005840" y="2532888"/>
+            <a:ext cx="7772400" cy="502920"/>
+          </a:xfrm>
+          <a:prstGeom prst="rect">
+            <a:avLst/>
+          </a:prstGeom>
+          <a:noFill/>
+          <a:ln/>
+        </p:spPr>
+        <p:txBody>
+          <a:bodyPr wrap="square" lIns="0" tIns="0" rIns="0" bIns="0" rtlCol="0" anchor="ctr"/>
+          <a:lstStyle/>
+          <a:p>
+            <a:pPr indent="0" marL="0">
+              <a:buNone/>
+            </a:pPr>
+            <a:r>
+              <a:rPr lang="en-US" sz="2700" dirty="0">
+                <a:solidFill>
+                  <a:srgbClr val="2B2318"/>
+                </a:solidFill>
+                <a:latin typeface="Calibri" pitchFamily="34" charset="0"/>
+                <a:ea typeface="Calibri" pitchFamily="34" charset="-122"/>
+                <a:cs typeface="Calibri" pitchFamily="34" charset="-120"/>
+              </a:rPr>
+              <a:t>Zeilen angeben: (Z. 6)</a:t>
+            </a:r>
+            <a:endParaRPr lang="en-US" sz="2700" dirty="0"/>
+          </a:p>
+        </p:txBody>
+      </p:sp>
+      <p:sp>
+        <p:nvSpPr>
+          <p:cNvPr id="15" name="Text 13"/>
+          <p:cNvSpPr txBox="1"/>
+          <p:nvPr/>
+        </p:nvSpPr>
+        <p:spPr>
+          <a:xfrm>
+            <a:off x="411480" y="3209544"/>
+            <a:ext cx="457200" cy="457200"/>
+          </a:xfrm>
+          <a:prstGeom prst="ellipse">
+            <a:avLst/>
+          </a:prstGeom>
+          <a:solidFill>
+            <a:srgbClr val="AD4426"/>
+          </a:solidFill>
+          <a:ln/>
+        </p:spPr>
+        <p:txBody>
+          <a:bodyPr wrap="square" lIns="0" tIns="0" rIns="0" bIns="0" rtlCol="0" anchor="ctr"/>
+          <a:lstStyle/>
+          <a:p>
+            <a:pPr algn="ctr" indent="0" marL="0">
+              <a:buNone/>
+            </a:pPr>
+            <a:r>
+              <a:rPr lang="en-US" sz="2700" b="1" dirty="0">
+                <a:solidFill>
+                  <a:srgbClr val="FFFFFF"/>
+                </a:solidFill>
+                <a:latin typeface="Cambria" pitchFamily="34" charset="0"/>
+                <a:ea typeface="Cambria" pitchFamily="34" charset="-122"/>
+                <a:cs typeface="Cambria" pitchFamily="34" charset="-120"/>
+              </a:rPr>
+              <a:t>4</a:t>
+            </a:r>
+            <a:endParaRPr lang="en-US" sz="2700" dirty="0"/>
+          </a:p>
+        </p:txBody>
+      </p:sp>
+      <p:sp>
+        <p:nvSpPr>
+          <p:cNvPr id="16" name="Text 14"/>
+          <p:cNvSpPr txBox="1"/>
+          <p:nvPr/>
+        </p:nvSpPr>
+        <p:spPr>
+          <a:xfrm>
+            <a:off x="1005840" y="3191256"/>
+            <a:ext cx="7772400" cy="502920"/>
+          </a:xfrm>
+          <a:prstGeom prst="rect">
+            <a:avLst/>
+          </a:prstGeom>
+          <a:noFill/>
+          <a:ln/>
+        </p:spPr>
+        <p:txBody>
+          <a:bodyPr wrap="square" lIns="0" tIns="0" rIns="0" bIns="0" rtlCol="0" anchor="ctr"/>
+          <a:lstStyle/>
+          <a:p>
+            <a:pPr indent="0" marL="0">
+              <a:buNone/>
+            </a:pPr>
+            <a:r>
+              <a:rPr lang="en-US" sz="2700" dirty="0">
+                <a:solidFill>
+                  <a:srgbClr val="2B2318"/>
+                </a:solidFill>
+                <a:latin typeface="Calibri" pitchFamily="34" charset="0"/>
+                <a:ea typeface="Calibri" pitchFamily="34" charset="-122"/>
+                <a:cs typeface="Calibri" pitchFamily="34" charset="-120"/>
+              </a:rPr>
+              <a:t>Schlüsselbegriffe und Textsprache</a:t>
+            </a:r>
+            <a:endParaRPr lang="en-US" sz="2700" dirty="0"/>
+          </a:p>
+        </p:txBody>
+      </p:sp>
+      <p:sp>
+        <p:nvSpPr>
+          <p:cNvPr id="17" name="Shape 15"/>
+          <p:cNvSpPr/>
+          <p:nvPr/>
+        </p:nvSpPr>
+        <p:spPr>
+          <a:xfrm>
+            <a:off x="411480" y="3931920"/>
+            <a:ext cx="8321040" cy="777240"/>
+          </a:xfrm>
+          <a:prstGeom prst="roundRect">
+            <a:avLst>
+              <a:gd name="adj" fmla="val 9412"/>
+            </a:avLst>
+          </a:prstGeom>
+          <a:solidFill>
+            <a:srgbClr val="2B2318"/>
+          </a:solidFill>
+          <a:ln w="12700">
+            <a:solidFill>
+              <a:srgbClr val="2B2318"/>
+            </a:solidFill>
+            <a:prstDash val="solid"/>
+          </a:ln>
+        </p:spPr>
+      </p:sp>
+      <p:sp>
+        <p:nvSpPr>
+          <p:cNvPr id="18" name="Text 16"/>
+          <p:cNvSpPr txBox="1"/>
+          <p:nvPr/>
+        </p:nvSpPr>
+        <p:spPr>
+          <a:xfrm>
+            <a:off x="594360" y="3931920"/>
+            <a:ext cx="7955280" cy="777240"/>
+          </a:xfrm>
+          <a:prstGeom prst="rect">
+            <a:avLst/>
+          </a:prstGeom>
+          <a:noFill/>
+          <a:ln/>
+        </p:spPr>
+        <p:txBody>
+          <a:bodyPr wrap="square" lIns="0" tIns="0" rIns="0" bIns="0" rtlCol="0" anchor="ctr"/>
+          <a:lstStyle/>
+          <a:p>
+            <a:pPr indent="0" marL="0">
+              <a:buNone/>
+            </a:pPr>
+            <a:r>
+              <a:rPr lang="en-US" sz="2700" b="1" dirty="0">
+                <a:solidFill>
+                  <a:srgbClr val="D9A441"/>
+                </a:solidFill>
+                <a:latin typeface="Calibri" pitchFamily="34" charset="0"/>
+                <a:ea typeface="Calibri" pitchFamily="34" charset="-122"/>
+                <a:cs typeface="Calibri" pitchFamily="34" charset="-120"/>
+              </a:rPr>
+              <a:t>⚠ Noch keine Meinung – die kommt erst in Schritt 4.</a:t>
             </a:r>
             <a:endParaRPr lang="en-US" sz="2700" dirty="0"/>
           </a:p>
@@ -6898,7 +7427,7 @@
             </a:avLst>
           </a:prstGeom>
           <a:solidFill>
-            <a:srgbClr val="F4ECDE"/>
+            <a:srgbClr val="AD4426"/>
           </a:solidFill>
           <a:ln/>
         </p:spPr>
@@ -6912,7 +7441,7 @@
             <a:r>
               <a:rPr lang="en-US" sz="2700" b="1" dirty="0">
                 <a:solidFill>
-                  <a:srgbClr val="998C77"/>
+                  <a:srgbClr val="FFFFFF"/>
                 </a:solidFill>
                 <a:latin typeface="Calibri" pitchFamily="34" charset="0"/>
                 <a:ea typeface="Calibri" pitchFamily="34" charset="-122"/>
@@ -6941,7 +7470,7 @@
             </a:avLst>
           </a:prstGeom>
           <a:solidFill>
-            <a:srgbClr val="AD4426"/>
+            <a:srgbClr val="F4ECDE"/>
           </a:solidFill>
           <a:ln/>
         </p:spPr>
@@ -6955,7 +7484,7 @@
             <a:r>
               <a:rPr lang="en-US" sz="2700" b="1" dirty="0">
                 <a:solidFill>
-                  <a:srgbClr val="FFFFFF"/>
+                  <a:srgbClr val="998C77"/>
                 </a:solidFill>
                 <a:latin typeface="Calibri" pitchFamily="34" charset="0"/>
                 <a:ea typeface="Calibri" pitchFamily="34" charset="-122"/>
@@ -7043,7 +7572,7 @@
                 <a:ea typeface="Cambria" pitchFamily="34" charset="-122"/>
                 <a:cs typeface="Cambria" pitchFamily="34" charset="-120"/>
               </a:rPr>
-              <a:t>Jetzt ihr: Inhalt</a:t>
+              <a:t>So geht's: Z. 1–4</a:t>
             </a:r>
             <a:endParaRPr lang="en-US" sz="3600" dirty="0"/>
           </a:p>
@@ -7086,7 +7615,7 @@
                 <a:ea typeface="Calibri" pitchFamily="34" charset="-122"/>
                 <a:cs typeface="Calibri" pitchFamily="34" charset="-120"/>
               </a:rPr>
-              <a:t>10 Min.</a:t>
+              <a:t>Lehrkraft</a:t>
             </a:r>
             <a:endParaRPr lang="en-US" sz="2700" dirty="0"/>
           </a:p>
@@ -7100,49 +7629,8 @@
         </p:nvSpPr>
         <p:spPr>
           <a:xfrm>
-            <a:off x="411480" y="1234440"/>
-            <a:ext cx="457200" cy="457200"/>
-          </a:xfrm>
-          <a:prstGeom prst="ellipse">
-            <a:avLst/>
-          </a:prstGeom>
-          <a:solidFill>
-            <a:srgbClr val="AD4426"/>
-          </a:solidFill>
-          <a:ln/>
-        </p:spPr>
-        <p:txBody>
-          <a:bodyPr wrap="square" lIns="0" tIns="0" rIns="0" bIns="0" rtlCol="0" anchor="ctr"/>
-          <a:lstStyle/>
-          <a:p>
-            <a:pPr algn="ctr" indent="0" marL="0">
-              <a:buNone/>
-            </a:pPr>
-            <a:r>
-              <a:rPr lang="en-US" sz="2700" b="1" dirty="0">
-                <a:solidFill>
-                  <a:srgbClr val="FFFFFF"/>
-                </a:solidFill>
-                <a:latin typeface="Cambria" pitchFamily="34" charset="0"/>
-                <a:ea typeface="Cambria" pitchFamily="34" charset="-122"/>
-                <a:cs typeface="Cambria" pitchFamily="34" charset="-120"/>
-              </a:rPr>
-              <a:t>1</a:t>
-            </a:r>
-            <a:endParaRPr lang="en-US" sz="2700" dirty="0"/>
-          </a:p>
-        </p:txBody>
-      </p:sp>
-      <p:sp>
-        <p:nvSpPr>
-          <p:cNvPr id="10" name="Text 8"/>
-          <p:cNvSpPr txBox="1"/>
-          <p:nvPr/>
-        </p:nvSpPr>
-        <p:spPr>
-          <a:xfrm>
-            <a:off x="1005840" y="1216152"/>
-            <a:ext cx="7772400" cy="502920"/>
+            <a:off x="411480" y="1188720"/>
+            <a:ext cx="8321040" cy="3566160"/>
           </a:xfrm>
           <a:prstGeom prst="rect">
             <a:avLst/>
@@ -7151,14 +7639,14 @@
           <a:ln/>
         </p:spPr>
         <p:txBody>
-          <a:bodyPr wrap="square" lIns="0" tIns="0" rIns="0" bIns="0" rtlCol="0" anchor="ctr"/>
+          <a:bodyPr wrap="square" lIns="0" tIns="0" rIns="0" bIns="0" rtlCol="0" anchor="t"/>
           <a:lstStyle/>
           <a:p>
             <a:pPr indent="0" marL="0">
               <a:buNone/>
             </a:pPr>
             <a:r>
-              <a:rPr lang="en-US" sz="2700" dirty="0">
+              <a:rPr lang="en-US" sz="2700" i="1" dirty="0">
                 <a:solidFill>
                   <a:srgbClr val="2B2318"/>
                 </a:solidFill>
@@ -7166,247 +7654,7 @@
                 <a:ea typeface="Calibri" pitchFamily="34" charset="-122"/>
                 <a:cs typeface="Calibri" pitchFamily="34" charset="-120"/>
               </a:rPr>
-              <a:t>Lest Z. 5–14 zu zweit.</a:t>
-            </a:r>
-            <a:endParaRPr lang="en-US" sz="2700" dirty="0"/>
-          </a:p>
-        </p:txBody>
-      </p:sp>
-      <p:sp>
-        <p:nvSpPr>
-          <p:cNvPr id="11" name="Text 9"/>
-          <p:cNvSpPr txBox="1"/>
-          <p:nvPr/>
-        </p:nvSpPr>
-        <p:spPr>
-          <a:xfrm>
-            <a:off x="411480" y="2011680"/>
-            <a:ext cx="457200" cy="457200"/>
-          </a:xfrm>
-          <a:prstGeom prst="ellipse">
-            <a:avLst/>
-          </a:prstGeom>
-          <a:solidFill>
-            <a:srgbClr val="AD4426"/>
-          </a:solidFill>
-          <a:ln/>
-        </p:spPr>
-        <p:txBody>
-          <a:bodyPr wrap="square" lIns="0" tIns="0" rIns="0" bIns="0" rtlCol="0" anchor="ctr"/>
-          <a:lstStyle/>
-          <a:p>
-            <a:pPr algn="ctr" indent="0" marL="0">
-              <a:buNone/>
-            </a:pPr>
-            <a:r>
-              <a:rPr lang="en-US" sz="2700" b="1" dirty="0">
-                <a:solidFill>
-                  <a:srgbClr val="FFFFFF"/>
-                </a:solidFill>
-                <a:latin typeface="Cambria" pitchFamily="34" charset="0"/>
-                <a:ea typeface="Cambria" pitchFamily="34" charset="-122"/>
-                <a:cs typeface="Cambria" pitchFamily="34" charset="-120"/>
-              </a:rPr>
-              <a:t>2</a:t>
-            </a:r>
-            <a:endParaRPr lang="en-US" sz="2700" dirty="0"/>
-          </a:p>
-        </p:txBody>
-      </p:sp>
-      <p:sp>
-        <p:nvSpPr>
-          <p:cNvPr id="12" name="Text 10"/>
-          <p:cNvSpPr txBox="1"/>
-          <p:nvPr/>
-        </p:nvSpPr>
-        <p:spPr>
-          <a:xfrm>
-            <a:off x="1005840" y="1993392"/>
-            <a:ext cx="7772400" cy="502920"/>
-          </a:xfrm>
-          <a:prstGeom prst="rect">
-            <a:avLst/>
-          </a:prstGeom>
-          <a:noFill/>
-          <a:ln/>
-        </p:spPr>
-        <p:txBody>
-          <a:bodyPr wrap="square" lIns="0" tIns="0" rIns="0" bIns="0" rtlCol="0" anchor="ctr"/>
-          <a:lstStyle/>
-          <a:p>
-            <a:pPr indent="0" marL="0">
-              <a:buNone/>
-            </a:pPr>
-            <a:r>
-              <a:rPr lang="en-US" sz="2700" dirty="0">
-                <a:solidFill>
-                  <a:srgbClr val="2B2318"/>
-                </a:solidFill>
-                <a:latin typeface="Calibri" pitchFamily="34" charset="0"/>
-                <a:ea typeface="Calibri" pitchFamily="34" charset="-122"/>
-                <a:cs typeface="Calibri" pitchFamily="34" charset="-120"/>
-              </a:rPr>
-              <a:t>Schreibt Z. 5–8 mit dem Satzanfang.</a:t>
-            </a:r>
-            <a:endParaRPr lang="en-US" sz="2700" dirty="0"/>
-          </a:p>
-        </p:txBody>
-      </p:sp>
-      <p:sp>
-        <p:nvSpPr>
-          <p:cNvPr id="13" name="Text 11"/>
-          <p:cNvSpPr txBox="1"/>
-          <p:nvPr/>
-        </p:nvSpPr>
-        <p:spPr>
-          <a:xfrm>
-            <a:off x="411480" y="2788920"/>
-            <a:ext cx="457200" cy="457200"/>
-          </a:xfrm>
-          <a:prstGeom prst="ellipse">
-            <a:avLst/>
-          </a:prstGeom>
-          <a:solidFill>
-            <a:srgbClr val="AD4426"/>
-          </a:solidFill>
-          <a:ln/>
-        </p:spPr>
-        <p:txBody>
-          <a:bodyPr wrap="square" lIns="0" tIns="0" rIns="0" bIns="0" rtlCol="0" anchor="ctr"/>
-          <a:lstStyle/>
-          <a:p>
-            <a:pPr algn="ctr" indent="0" marL="0">
-              <a:buNone/>
-            </a:pPr>
-            <a:r>
-              <a:rPr lang="en-US" sz="2700" b="1" dirty="0">
-                <a:solidFill>
-                  <a:srgbClr val="FFFFFF"/>
-                </a:solidFill>
-                <a:latin typeface="Cambria" pitchFamily="34" charset="0"/>
-                <a:ea typeface="Cambria" pitchFamily="34" charset="-122"/>
-                <a:cs typeface="Cambria" pitchFamily="34" charset="-120"/>
-              </a:rPr>
-              <a:t>3</a:t>
-            </a:r>
-            <a:endParaRPr lang="en-US" sz="2700" dirty="0"/>
-          </a:p>
-        </p:txBody>
-      </p:sp>
-      <p:sp>
-        <p:nvSpPr>
-          <p:cNvPr id="14" name="Text 12"/>
-          <p:cNvSpPr txBox="1"/>
-          <p:nvPr/>
-        </p:nvSpPr>
-        <p:spPr>
-          <a:xfrm>
-            <a:off x="1005840" y="2770632"/>
-            <a:ext cx="7772400" cy="502920"/>
-          </a:xfrm>
-          <a:prstGeom prst="rect">
-            <a:avLst/>
-          </a:prstGeom>
-          <a:noFill/>
-          <a:ln/>
-        </p:spPr>
-        <p:txBody>
-          <a:bodyPr wrap="square" lIns="0" tIns="0" rIns="0" bIns="0" rtlCol="0" anchor="ctr"/>
-          <a:lstStyle/>
-          <a:p>
-            <a:pPr indent="0" marL="0">
-              <a:buNone/>
-            </a:pPr>
-            <a:r>
-              <a:rPr lang="en-US" sz="2700" dirty="0">
-                <a:solidFill>
-                  <a:srgbClr val="2B2318"/>
-                </a:solidFill>
-                <a:latin typeface="Calibri" pitchFamily="34" charset="0"/>
-                <a:ea typeface="Calibri" pitchFamily="34" charset="-122"/>
-                <a:cs typeface="Calibri" pitchFamily="34" charset="-120"/>
-              </a:rPr>
-              <a:t>Schreibt Z. 9–12 mit dem Satzanfang.</a:t>
-            </a:r>
-            <a:endParaRPr lang="en-US" sz="2700" dirty="0"/>
-          </a:p>
-        </p:txBody>
-      </p:sp>
-      <p:sp>
-        <p:nvSpPr>
-          <p:cNvPr id="15" name="Text 13"/>
-          <p:cNvSpPr txBox="1"/>
-          <p:nvPr/>
-        </p:nvSpPr>
-        <p:spPr>
-          <a:xfrm>
-            <a:off x="411480" y="3566160"/>
-            <a:ext cx="457200" cy="457200"/>
-          </a:xfrm>
-          <a:prstGeom prst="ellipse">
-            <a:avLst/>
-          </a:prstGeom>
-          <a:solidFill>
-            <a:srgbClr val="AD4426"/>
-          </a:solidFill>
-          <a:ln/>
-        </p:spPr>
-        <p:txBody>
-          <a:bodyPr wrap="square" lIns="0" tIns="0" rIns="0" bIns="0" rtlCol="0" anchor="ctr"/>
-          <a:lstStyle/>
-          <a:p>
-            <a:pPr algn="ctr" indent="0" marL="0">
-              <a:buNone/>
-            </a:pPr>
-            <a:r>
-              <a:rPr lang="en-US" sz="2700" b="1" dirty="0">
-                <a:solidFill>
-                  <a:srgbClr val="FFFFFF"/>
-                </a:solidFill>
-                <a:latin typeface="Cambria" pitchFamily="34" charset="0"/>
-                <a:ea typeface="Cambria" pitchFamily="34" charset="-122"/>
-                <a:cs typeface="Cambria" pitchFamily="34" charset="-120"/>
-              </a:rPr>
-              <a:t>4</a:t>
-            </a:r>
-            <a:endParaRPr lang="en-US" sz="2700" dirty="0"/>
-          </a:p>
-        </p:txBody>
-      </p:sp>
-      <p:sp>
-        <p:nvSpPr>
-          <p:cNvPr id="16" name="Text 14"/>
-          <p:cNvSpPr txBox="1"/>
-          <p:nvPr/>
-        </p:nvSpPr>
-        <p:spPr>
-          <a:xfrm>
-            <a:off x="1005840" y="3547872"/>
-            <a:ext cx="7772400" cy="502920"/>
-          </a:xfrm>
-          <a:prstGeom prst="rect">
-            <a:avLst/>
-          </a:prstGeom>
-          <a:noFill/>
-          <a:ln/>
-        </p:spPr>
-        <p:txBody>
-          <a:bodyPr wrap="square" lIns="0" tIns="0" rIns="0" bIns="0" rtlCol="0" anchor="ctr"/>
-          <a:lstStyle/>
-          <a:p>
-            <a:pPr indent="0" marL="0">
-              <a:buNone/>
-            </a:pPr>
-            <a:r>
-              <a:rPr lang="en-US" sz="2700" dirty="0">
-                <a:solidFill>
-                  <a:srgbClr val="2B2318"/>
-                </a:solidFill>
-                <a:latin typeface="Calibri" pitchFamily="34" charset="0"/>
-                <a:ea typeface="Calibri" pitchFamily="34" charset="-122"/>
-                <a:cs typeface="Calibri" pitchFamily="34" charset="-120"/>
-              </a:rPr>
-              <a:t>Schreibt Z. 12–14 ganz allein.</a:t>
+              <a:t>„Zunächst berichtet Aristoteles, nach dem Sturz der Tyrannen hätten Isagoras und Kleisthenes um die Macht gekämpft (Z. 1). Kleisthenes habe das Volk für sich gewonnen, indem er ihm die Macht im Staat übergeben habe (Z. 2–4).“</a:t>
             </a:r>
             <a:endParaRPr lang="en-US" sz="2700" dirty="0"/>
           </a:p>
@@ -7740,7 +7988,7 @@
                 <a:ea typeface="Cambria" pitchFamily="34" charset="-122"/>
                 <a:cs typeface="Cambria" pitchFamily="34" charset="-120"/>
               </a:rPr>
-              <a:t>Aristoteles</a:t>
+              <a:t>Jetzt ihr: Inhalt</a:t>
             </a:r>
             <a:endParaRPr lang="en-US" sz="3600" dirty="0"/>
           </a:p>
@@ -7763,7 +8011,7 @@
             </a:avLst>
           </a:prstGeom>
           <a:solidFill>
-            <a:srgbClr val="F4ECDE"/>
+            <a:srgbClr val="2B2318"/>
           </a:solidFill>
           <a:ln/>
         </p:spPr>
@@ -7777,13 +8025,13 @@
             <a:r>
               <a:rPr lang="en-US" sz="2700" b="1" dirty="0">
                 <a:solidFill>
-                  <a:srgbClr val="2B2318"/>
-                </a:solidFill>
-                <a:latin typeface="Calibri" pitchFamily="34" charset="0"/>
-                <a:ea typeface="Calibri" pitchFamily="34" charset="-122"/>
-                <a:cs typeface="Calibri" pitchFamily="34" charset="-120"/>
-              </a:rPr>
-              <a:t>Z. 1–4</a:t>
+                  <a:srgbClr val="FFFFFF"/>
+                </a:solidFill>
+                <a:latin typeface="Calibri" pitchFamily="34" charset="0"/>
+                <a:ea typeface="Calibri" pitchFamily="34" charset="-122"/>
+                <a:cs typeface="Calibri" pitchFamily="34" charset="-120"/>
+              </a:rPr>
+              <a:t>10 Min.</a:t>
             </a:r>
             <a:endParaRPr lang="en-US" sz="2700" dirty="0"/>
           </a:p>
@@ -7797,8 +8045,49 @@
         </p:nvSpPr>
         <p:spPr>
           <a:xfrm>
-            <a:off x="411480" y="1188720"/>
-            <a:ext cx="8321040" cy="3657600"/>
+            <a:off x="411480" y="1234440"/>
+            <a:ext cx="457200" cy="457200"/>
+          </a:xfrm>
+          <a:prstGeom prst="ellipse">
+            <a:avLst/>
+          </a:prstGeom>
+          <a:solidFill>
+            <a:srgbClr val="AD4426"/>
+          </a:solidFill>
+          <a:ln/>
+        </p:spPr>
+        <p:txBody>
+          <a:bodyPr wrap="square" lIns="0" tIns="0" rIns="0" bIns="0" rtlCol="0" anchor="ctr"/>
+          <a:lstStyle/>
+          <a:p>
+            <a:pPr algn="ctr" indent="0" marL="0">
+              <a:buNone/>
+            </a:pPr>
+            <a:r>
+              <a:rPr lang="en-US" sz="2700" b="1" dirty="0">
+                <a:solidFill>
+                  <a:srgbClr val="FFFFFF"/>
+                </a:solidFill>
+                <a:latin typeface="Cambria" pitchFamily="34" charset="0"/>
+                <a:ea typeface="Cambria" pitchFamily="34" charset="-122"/>
+                <a:cs typeface="Cambria" pitchFamily="34" charset="-120"/>
+              </a:rPr>
+              <a:t>1</a:t>
+            </a:r>
+            <a:endParaRPr lang="en-US" sz="2700" dirty="0"/>
+          </a:p>
+        </p:txBody>
+      </p:sp>
+      <p:sp>
+        <p:nvSpPr>
+          <p:cNvPr id="10" name="Text 8"/>
+          <p:cNvSpPr txBox="1"/>
+          <p:nvPr/>
+        </p:nvSpPr>
+        <p:spPr>
+          <a:xfrm>
+            <a:off x="1005840" y="1216152"/>
+            <a:ext cx="7772400" cy="502920"/>
           </a:xfrm>
           <a:prstGeom prst="rect">
             <a:avLst/>
@@ -7807,7 +8096,7 @@
           <a:ln/>
         </p:spPr>
         <p:txBody>
-          <a:bodyPr wrap="square" lIns="0" tIns="0" rIns="0" bIns="0" rtlCol="0" anchor="t"/>
+          <a:bodyPr wrap="square" lIns="0" tIns="0" rIns="0" bIns="0" rtlCol="0" anchor="ctr"/>
           <a:lstStyle/>
           <a:p>
             <a:pPr indent="0" marL="0">
@@ -7822,7 +8111,327 @@
                 <a:ea typeface="Calibri" pitchFamily="34" charset="-122"/>
                 <a:cs typeface="Calibri" pitchFamily="34" charset="-120"/>
               </a:rPr>
-              <a:t>Nach dem Sturz der Tyrannen kämpften Isagoras und Kleisthenes um die Macht. Kleisthenes stammte aus der Familie der Alkmeoniden. Weil er in den Bünden der Adligen unterlag, gewann er das Volk für sich, indem er der Menge die Macht im Staat übergab. […] Da das Volk ihm vertraute, wurde er sein Anführer.</a:t>
+              <a:t>Lest Z. 5–14 zu zweit.</a:t>
+            </a:r>
+            <a:endParaRPr lang="en-US" sz="2700" dirty="0"/>
+          </a:p>
+        </p:txBody>
+      </p:sp>
+      <p:sp>
+        <p:nvSpPr>
+          <p:cNvPr id="11" name="Text 9"/>
+          <p:cNvSpPr txBox="1"/>
+          <p:nvPr/>
+        </p:nvSpPr>
+        <p:spPr>
+          <a:xfrm>
+            <a:off x="411480" y="1920240"/>
+            <a:ext cx="457200" cy="457200"/>
+          </a:xfrm>
+          <a:prstGeom prst="ellipse">
+            <a:avLst/>
+          </a:prstGeom>
+          <a:solidFill>
+            <a:srgbClr val="AD4426"/>
+          </a:solidFill>
+          <a:ln/>
+        </p:spPr>
+        <p:txBody>
+          <a:bodyPr wrap="square" lIns="0" tIns="0" rIns="0" bIns="0" rtlCol="0" anchor="ctr"/>
+          <a:lstStyle/>
+          <a:p>
+            <a:pPr algn="ctr" indent="0" marL="0">
+              <a:buNone/>
+            </a:pPr>
+            <a:r>
+              <a:rPr lang="en-US" sz="2700" b="1" dirty="0">
+                <a:solidFill>
+                  <a:srgbClr val="FFFFFF"/>
+                </a:solidFill>
+                <a:latin typeface="Cambria" pitchFamily="34" charset="0"/>
+                <a:ea typeface="Cambria" pitchFamily="34" charset="-122"/>
+                <a:cs typeface="Cambria" pitchFamily="34" charset="-120"/>
+              </a:rPr>
+              <a:t>2</a:t>
+            </a:r>
+            <a:endParaRPr lang="en-US" sz="2700" dirty="0"/>
+          </a:p>
+        </p:txBody>
+      </p:sp>
+      <p:sp>
+        <p:nvSpPr>
+          <p:cNvPr id="12" name="Text 10"/>
+          <p:cNvSpPr txBox="1"/>
+          <p:nvPr/>
+        </p:nvSpPr>
+        <p:spPr>
+          <a:xfrm>
+            <a:off x="1005840" y="1901952"/>
+            <a:ext cx="7772400" cy="502920"/>
+          </a:xfrm>
+          <a:prstGeom prst="rect">
+            <a:avLst/>
+          </a:prstGeom>
+          <a:noFill/>
+          <a:ln/>
+        </p:spPr>
+        <p:txBody>
+          <a:bodyPr wrap="square" lIns="0" tIns="0" rIns="0" bIns="0" rtlCol="0" anchor="ctr"/>
+          <a:lstStyle/>
+          <a:p>
+            <a:pPr indent="0" marL="0">
+              <a:buNone/>
+            </a:pPr>
+            <a:r>
+              <a:rPr lang="en-US" sz="2700" dirty="0">
+                <a:solidFill>
+                  <a:srgbClr val="2B2318"/>
+                </a:solidFill>
+                <a:latin typeface="Calibri" pitchFamily="34" charset="0"/>
+                <a:ea typeface="Calibri" pitchFamily="34" charset="-122"/>
+                <a:cs typeface="Calibri" pitchFamily="34" charset="-120"/>
+              </a:rPr>
+              <a:t>Schreibt Z. 5–8 mit dem Satzanfang.</a:t>
+            </a:r>
+            <a:endParaRPr lang="en-US" sz="2700" dirty="0"/>
+          </a:p>
+        </p:txBody>
+      </p:sp>
+      <p:sp>
+        <p:nvSpPr>
+          <p:cNvPr id="13" name="Text 11"/>
+          <p:cNvSpPr txBox="1"/>
+          <p:nvPr/>
+        </p:nvSpPr>
+        <p:spPr>
+          <a:xfrm>
+            <a:off x="411480" y="2606040"/>
+            <a:ext cx="457200" cy="457200"/>
+          </a:xfrm>
+          <a:prstGeom prst="ellipse">
+            <a:avLst/>
+          </a:prstGeom>
+          <a:solidFill>
+            <a:srgbClr val="AD4426"/>
+          </a:solidFill>
+          <a:ln/>
+        </p:spPr>
+        <p:txBody>
+          <a:bodyPr wrap="square" lIns="0" tIns="0" rIns="0" bIns="0" rtlCol="0" anchor="ctr"/>
+          <a:lstStyle/>
+          <a:p>
+            <a:pPr algn="ctr" indent="0" marL="0">
+              <a:buNone/>
+            </a:pPr>
+            <a:r>
+              <a:rPr lang="en-US" sz="2700" b="1" dirty="0">
+                <a:solidFill>
+                  <a:srgbClr val="FFFFFF"/>
+                </a:solidFill>
+                <a:latin typeface="Cambria" pitchFamily="34" charset="0"/>
+                <a:ea typeface="Cambria" pitchFamily="34" charset="-122"/>
+                <a:cs typeface="Cambria" pitchFamily="34" charset="-120"/>
+              </a:rPr>
+              <a:t>3</a:t>
+            </a:r>
+            <a:endParaRPr lang="en-US" sz="2700" dirty="0"/>
+          </a:p>
+        </p:txBody>
+      </p:sp>
+      <p:sp>
+        <p:nvSpPr>
+          <p:cNvPr id="14" name="Text 12"/>
+          <p:cNvSpPr txBox="1"/>
+          <p:nvPr/>
+        </p:nvSpPr>
+        <p:spPr>
+          <a:xfrm>
+            <a:off x="1005840" y="2587752"/>
+            <a:ext cx="7772400" cy="502920"/>
+          </a:xfrm>
+          <a:prstGeom prst="rect">
+            <a:avLst/>
+          </a:prstGeom>
+          <a:noFill/>
+          <a:ln/>
+        </p:spPr>
+        <p:txBody>
+          <a:bodyPr wrap="square" lIns="0" tIns="0" rIns="0" bIns="0" rtlCol="0" anchor="ctr"/>
+          <a:lstStyle/>
+          <a:p>
+            <a:pPr indent="0" marL="0">
+              <a:buNone/>
+            </a:pPr>
+            <a:r>
+              <a:rPr lang="en-US" sz="2700" dirty="0">
+                <a:solidFill>
+                  <a:srgbClr val="2B2318"/>
+                </a:solidFill>
+                <a:latin typeface="Calibri" pitchFamily="34" charset="0"/>
+                <a:ea typeface="Calibri" pitchFamily="34" charset="-122"/>
+                <a:cs typeface="Calibri" pitchFamily="34" charset="-120"/>
+              </a:rPr>
+              <a:t>Schreibt Z. 9–12 mit dem Satzanfang.</a:t>
+            </a:r>
+            <a:endParaRPr lang="en-US" sz="2700" dirty="0"/>
+          </a:p>
+        </p:txBody>
+      </p:sp>
+      <p:sp>
+        <p:nvSpPr>
+          <p:cNvPr id="15" name="Text 13"/>
+          <p:cNvSpPr txBox="1"/>
+          <p:nvPr/>
+        </p:nvSpPr>
+        <p:spPr>
+          <a:xfrm>
+            <a:off x="411480" y="3291840"/>
+            <a:ext cx="457200" cy="457200"/>
+          </a:xfrm>
+          <a:prstGeom prst="ellipse">
+            <a:avLst/>
+          </a:prstGeom>
+          <a:solidFill>
+            <a:srgbClr val="AD4426"/>
+          </a:solidFill>
+          <a:ln/>
+        </p:spPr>
+        <p:txBody>
+          <a:bodyPr wrap="square" lIns="0" tIns="0" rIns="0" bIns="0" rtlCol="0" anchor="ctr"/>
+          <a:lstStyle/>
+          <a:p>
+            <a:pPr algn="ctr" indent="0" marL="0">
+              <a:buNone/>
+            </a:pPr>
+            <a:r>
+              <a:rPr lang="en-US" sz="2700" b="1" dirty="0">
+                <a:solidFill>
+                  <a:srgbClr val="FFFFFF"/>
+                </a:solidFill>
+                <a:latin typeface="Cambria" pitchFamily="34" charset="0"/>
+                <a:ea typeface="Cambria" pitchFamily="34" charset="-122"/>
+                <a:cs typeface="Cambria" pitchFamily="34" charset="-120"/>
+              </a:rPr>
+              <a:t>4</a:t>
+            </a:r>
+            <a:endParaRPr lang="en-US" sz="2700" dirty="0"/>
+          </a:p>
+        </p:txBody>
+      </p:sp>
+      <p:sp>
+        <p:nvSpPr>
+          <p:cNvPr id="16" name="Text 14"/>
+          <p:cNvSpPr txBox="1"/>
+          <p:nvPr/>
+        </p:nvSpPr>
+        <p:spPr>
+          <a:xfrm>
+            <a:off x="1005840" y="3273552"/>
+            <a:ext cx="7772400" cy="502920"/>
+          </a:xfrm>
+          <a:prstGeom prst="rect">
+            <a:avLst/>
+          </a:prstGeom>
+          <a:noFill/>
+          <a:ln/>
+        </p:spPr>
+        <p:txBody>
+          <a:bodyPr wrap="square" lIns="0" tIns="0" rIns="0" bIns="0" rtlCol="0" anchor="ctr"/>
+          <a:lstStyle/>
+          <a:p>
+            <a:pPr indent="0" marL="0">
+              <a:buNone/>
+            </a:pPr>
+            <a:r>
+              <a:rPr lang="en-US" sz="2700" dirty="0">
+                <a:solidFill>
+                  <a:srgbClr val="2B2318"/>
+                </a:solidFill>
+                <a:latin typeface="Calibri" pitchFamily="34" charset="0"/>
+                <a:ea typeface="Calibri" pitchFamily="34" charset="-122"/>
+                <a:cs typeface="Calibri" pitchFamily="34" charset="-120"/>
+              </a:rPr>
+              <a:t>Schreibt Z. 12–14 ganz allein.</a:t>
+            </a:r>
+            <a:endParaRPr lang="en-US" sz="2700" dirty="0"/>
+          </a:p>
+        </p:txBody>
+      </p:sp>
+      <p:sp>
+        <p:nvSpPr>
+          <p:cNvPr id="17" name="Text 15"/>
+          <p:cNvSpPr txBox="1"/>
+          <p:nvPr/>
+        </p:nvSpPr>
+        <p:spPr>
+          <a:xfrm>
+            <a:off x="411480" y="3977640"/>
+            <a:ext cx="457200" cy="457200"/>
+          </a:xfrm>
+          <a:prstGeom prst="ellipse">
+            <a:avLst/>
+          </a:prstGeom>
+          <a:solidFill>
+            <a:srgbClr val="AD4426"/>
+          </a:solidFill>
+          <a:ln/>
+        </p:spPr>
+        <p:txBody>
+          <a:bodyPr wrap="square" lIns="0" tIns="0" rIns="0" bIns="0" rtlCol="0" anchor="ctr"/>
+          <a:lstStyle/>
+          <a:p>
+            <a:pPr algn="ctr" indent="0" marL="0">
+              <a:buNone/>
+            </a:pPr>
+            <a:r>
+              <a:rPr lang="en-US" sz="2700" b="1" dirty="0">
+                <a:solidFill>
+                  <a:srgbClr val="FFFFFF"/>
+                </a:solidFill>
+                <a:latin typeface="Cambria" pitchFamily="34" charset="0"/>
+                <a:ea typeface="Cambria" pitchFamily="34" charset="-122"/>
+                <a:cs typeface="Cambria" pitchFamily="34" charset="-120"/>
+              </a:rPr>
+              <a:t>5</a:t>
+            </a:r>
+            <a:endParaRPr lang="en-US" sz="2700" dirty="0"/>
+          </a:p>
+        </p:txBody>
+      </p:sp>
+      <p:sp>
+        <p:nvSpPr>
+          <p:cNvPr id="18" name="Text 16"/>
+          <p:cNvSpPr txBox="1"/>
+          <p:nvPr/>
+        </p:nvSpPr>
+        <p:spPr>
+          <a:xfrm>
+            <a:off x="1005840" y="3959352"/>
+            <a:ext cx="7772400" cy="502920"/>
+          </a:xfrm>
+          <a:prstGeom prst="rect">
+            <a:avLst/>
+          </a:prstGeom>
+          <a:noFill/>
+          <a:ln/>
+        </p:spPr>
+        <p:txBody>
+          <a:bodyPr wrap="square" lIns="0" tIns="0" rIns="0" bIns="0" rtlCol="0" anchor="ctr"/>
+          <a:lstStyle/>
+          <a:p>
+            <a:pPr indent="0" marL="0">
+              <a:buNone/>
+            </a:pPr>
+            <a:r>
+              <a:rPr lang="en-US" sz="2700" dirty="0">
+                <a:solidFill>
+                  <a:srgbClr val="2B2318"/>
+                </a:solidFill>
+                <a:latin typeface="Calibri" pitchFamily="34" charset="0"/>
+                <a:ea typeface="Calibri" pitchFamily="34" charset="-122"/>
+                <a:cs typeface="Calibri" pitchFamily="34" charset="-120"/>
+              </a:rPr>
+              <a:t>Notiert Begriffe, kreuzt die Sprache an.</a:t>
             </a:r>
             <a:endParaRPr lang="en-US" sz="2700" dirty="0"/>
           </a:p>
@@ -8199,7 +8808,7 @@
                 <a:ea typeface="Calibri" pitchFamily="34" charset="-122"/>
                 <a:cs typeface="Calibri" pitchFamily="34" charset="-120"/>
               </a:rPr>
-              <a:t>Z. 5–8</a:t>
+              <a:t>Z. 1–4</a:t>
             </a:r>
             <a:endParaRPr lang="en-US" sz="2700" dirty="0"/>
           </a:p>
@@ -8238,7 +8847,7 @@
                 <a:ea typeface="Calibri" pitchFamily="34" charset="-122"/>
                 <a:cs typeface="Calibri" pitchFamily="34" charset="-120"/>
               </a:rPr>
-              <a:t>Im vierten Jahr nach dem Sturz der Tyrannen teilte er zuerst alle Bürger in zehn Phylen statt in vier ein. Er wollte sie miteinander vermischen, damit mehr Menschen an der Leitung des Staates teilhätten. Dann richtete er einen Rat der 500 statt der 400 ein, fünfzig Männer aus jeder Phyle.</a:t>
+              <a:t>Nach dem Sturz der Tyrannen kämpften Isagoras und Kleisthenes um die Macht. Kleisthenes stammte aus der Familie der Alkmeoniden. Weil er in den Bünden der Adligen unterlag, gewann er das Volk für sich, indem er der Menge die Macht im Staat übergab. […] Da das Volk ihm vertraute, wurde er sein Anführer.</a:t>
             </a:r>
             <a:endParaRPr lang="en-US" sz="2700" dirty="0"/>
           </a:p>
@@ -8615,7 +9224,7 @@
                 <a:ea typeface="Calibri" pitchFamily="34" charset="-122"/>
                 <a:cs typeface="Calibri" pitchFamily="34" charset="-120"/>
               </a:rPr>
-              <a:t>Z. 9–14</a:t>
+              <a:t>Z. 5–8</a:t>
             </a:r>
             <a:endParaRPr lang="en-US" sz="2700" dirty="0"/>
           </a:p>
@@ -8654,7 +9263,7 @@
                 <a:ea typeface="Calibri" pitchFamily="34" charset="-122"/>
                 <a:cs typeface="Calibri" pitchFamily="34" charset="-120"/>
               </a:rPr>
-              <a:t>Das Land teilte er nach den Demen in dreißig Teile: zehn um die Stadt, zehn an der Küste und zehn im Binnenland. Diese Teile nannte er Trittyen. Durch das Los teilte er jeder Phyle drei Trittyen zu, damit jede Phyle an allen Gebieten Anteil hatte. Die Bewohner eines Demos ließ er nach ihrem Demos benennen und nicht mehr nach ihrem Vater, damit man die neuen Bürger nicht an ihrem Namen erkennen konnte.</a:t>
+              <a:t>Im vierten Jahr nach dem Sturz der Tyrannen teilte er zuerst alle Bürger in zehn Phylen statt in vier ein. Er wollte sie miteinander vermischen, damit mehr Menschen an der Leitung des Staates teilhätten. Dann richtete er einen Rat der 500 statt der 400 ein, fünfzig Männer aus jeder Phyle.</a:t>
             </a:r>
             <a:endParaRPr lang="en-US" sz="2700" dirty="0"/>
           </a:p>
@@ -8788,7 +9397,7 @@
         <p:spPr>
           <a:xfrm>
             <a:off x="640080" y="1417320"/>
-            <a:ext cx="7863840" cy="822960"/>
+            <a:ext cx="7863840" cy="1280160"/>
           </a:xfrm>
           <a:prstGeom prst="rect">
             <a:avLst/>
@@ -8812,7 +9421,7 @@
                 <a:ea typeface="Cambria" pitchFamily="34" charset="-122"/>
                 <a:cs typeface="Cambria" pitchFamily="34" charset="-120"/>
               </a:rPr>
-              <a:t>Wie analysiert man eine Quelle?</a:t>
+              <a:t>Wie interpretiert man eine Quelle?</a:t>
             </a:r>
             <a:endParaRPr lang="en-US" sz="4000" dirty="0"/>
           </a:p>
@@ -8826,7 +9435,7 @@
         </p:nvSpPr>
         <p:spPr>
           <a:xfrm>
-            <a:off x="640080" y="2377440"/>
+            <a:off x="640080" y="2880360"/>
             <a:ext cx="7863840" cy="548640"/>
           </a:xfrm>
           <a:prstGeom prst="rect">
@@ -9137,7 +9746,7 @@
                 <a:ea typeface="Cambria" pitchFamily="34" charset="-122"/>
                 <a:cs typeface="Cambria" pitchFamily="34" charset="-120"/>
               </a:rPr>
-              <a:t>Lösung: Z. 5–8</a:t>
+              <a:t>Aristoteles</a:t>
             </a:r>
             <a:endParaRPr lang="en-US" sz="3600" dirty="0"/>
           </a:p>
@@ -9160,7 +9769,7 @@
             </a:avLst>
           </a:prstGeom>
           <a:solidFill>
-            <a:srgbClr val="D9A441"/>
+            <a:srgbClr val="F4ECDE"/>
           </a:solidFill>
           <a:ln/>
         </p:spPr>
@@ -9180,7 +9789,7 @@
                 <a:ea typeface="Calibri" pitchFamily="34" charset="-122"/>
                 <a:cs typeface="Calibri" pitchFamily="34" charset="-120"/>
               </a:rPr>
-              <a:t>Lösung</a:t>
+              <a:t>Z. 9–14</a:t>
             </a:r>
             <a:endParaRPr lang="en-US" sz="2700" dirty="0"/>
           </a:p>
@@ -9195,7 +9804,7 @@
         <p:spPr>
           <a:xfrm>
             <a:off x="411480" y="1188720"/>
-            <a:ext cx="8321040" cy="3566160"/>
+            <a:ext cx="8321040" cy="3657600"/>
           </a:xfrm>
           <a:prstGeom prst="rect">
             <a:avLst/>
@@ -9211,7 +9820,7 @@
               <a:buNone/>
             </a:pPr>
             <a:r>
-              <a:rPr lang="en-US" sz="2700" i="1" dirty="0">
+              <a:rPr lang="en-US" sz="2700" dirty="0">
                 <a:solidFill>
                   <a:srgbClr val="2B2318"/>
                 </a:solidFill>
@@ -9219,7 +9828,7 @@
                 <a:ea typeface="Calibri" pitchFamily="34" charset="-122"/>
                 <a:cs typeface="Calibri" pitchFamily="34" charset="-120"/>
               </a:rPr>
-              <a:t>„Anschließend erklärt er, Kleisthenes habe die Bürger in zehn statt vier Phylen eingeteilt, um sie zu vermischen und mehr Menschen an der Politik zu beteiligen (Z. 5–7). Außerdem habe er einen Rat der 500 mit fünfzig Männern aus jeder Phyle geschaffen (Z. 7f.).“</a:t>
+              <a:t>Das Land teilte er nach den Demen in dreißig Teile: zehn um die Stadt, zehn an der Küste und zehn im Binnenland. Diese Teile nannte er Trittyen. Durch das Los teilte er jeder Phyle drei Trittyen zu, damit jede Phyle an allen Gebieten Anteil hatte. Die Bewohner eines Demos ließ er nach ihrem Demos benennen und nicht mehr nach ihrem Vater, damit man die neuen Bürger nicht an ihrem Namen erkennen konnte.</a:t>
             </a:r>
             <a:endParaRPr lang="en-US" sz="2700" dirty="0"/>
           </a:p>
@@ -9553,7 +10162,7 @@
                 <a:ea typeface="Cambria" pitchFamily="34" charset="-122"/>
                 <a:cs typeface="Cambria" pitchFamily="34" charset="-120"/>
               </a:rPr>
-              <a:t>Lösung: Z. 9–12</a:t>
+              <a:t>Lösung: Z. 5–8</a:t>
             </a:r>
             <a:endParaRPr lang="en-US" sz="3600" dirty="0"/>
           </a:p>
@@ -9635,7 +10244,7 @@
                 <a:ea typeface="Calibri" pitchFamily="34" charset="-122"/>
                 <a:cs typeface="Calibri" pitchFamily="34" charset="-120"/>
               </a:rPr>
-              <a:t>„Außerdem habe Kleisthenes das Land in dreißig Trittyen geteilt, je zehn um die Stadt, an der Küste und im Binnenland (Z. 9f.). Jeder Phyle seien durch das Los drei Trittyen zugeteilt worden, damit sie an allen Gebieten Anteil habe (Z. 11f.).“</a:t>
+              <a:t>„Anschließend erklärt er, Kleisthenes habe die Bürger in zehn statt vier Phylen eingeteilt, um sie zu vermischen und mehr Menschen an der Politik zu beteiligen (Z. 5–7). Außerdem habe er einen Rat der 500 mit fünfzig Männern aus jeder Phyle geschaffen (Z. 7f.).“</a:t>
             </a:r>
             <a:endParaRPr lang="en-US" sz="2700" dirty="0"/>
           </a:p>
@@ -9969,7 +10578,7 @@
                 <a:ea typeface="Cambria" pitchFamily="34" charset="-122"/>
                 <a:cs typeface="Cambria" pitchFamily="34" charset="-120"/>
               </a:rPr>
-              <a:t>Lösung: Z. 12–14</a:t>
+              <a:t>Lösung: Z. 9–12</a:t>
             </a:r>
             <a:endParaRPr lang="en-US" sz="3600" dirty="0"/>
           </a:p>
@@ -10051,7 +10660,7 @@
                 <a:ea typeface="Calibri" pitchFamily="34" charset="-122"/>
                 <a:cs typeface="Calibri" pitchFamily="34" charset="-120"/>
               </a:rPr>
-              <a:t>„Schließlich habe er bestimmt, dass man sich nach seinem Demos und nicht mehr nach dem Vater benennt, damit man die neuen Bürger nicht erkennen konnte (Z. 12–14).“</a:t>
+              <a:t>„Außerdem habe Kleisthenes das Land in dreißig Trittyen geteilt, je zehn um die Stadt, an der Küste und im Binnenland (Z. 9f.). Jeder Phyle seien durch das Los drei Trittyen zugeteilt worden, damit sie an allen Gebieten Anteil habe (Z. 11f.).“</a:t>
             </a:r>
             <a:endParaRPr lang="en-US" sz="2700" dirty="0"/>
           </a:p>
@@ -10385,7 +10994,7 @@
                 <a:ea typeface="Cambria" pitchFamily="34" charset="-122"/>
                 <a:cs typeface="Cambria" pitchFamily="34" charset="-120"/>
               </a:rPr>
-              <a:t>Schritte 3 und 4*</a:t>
+              <a:t>Lösung: Z. 12–14</a:t>
             </a:r>
             <a:endParaRPr lang="en-US" sz="3600" dirty="0"/>
           </a:p>
@@ -10408,7 +11017,7 @@
             </a:avLst>
           </a:prstGeom>
           <a:solidFill>
-            <a:srgbClr val="F4ECDE"/>
+            <a:srgbClr val="D9A441"/>
           </a:solidFill>
           <a:ln/>
         </p:spPr>
@@ -10428,49 +11037,22 @@
                 <a:ea typeface="Calibri" pitchFamily="34" charset="-122"/>
                 <a:cs typeface="Calibri" pitchFamily="34" charset="-120"/>
               </a:rPr>
-              <a:t>nur bei Zeit</a:t>
-            </a:r>
-            <a:endParaRPr lang="en-US" sz="2700" dirty="0"/>
-          </a:p>
-        </p:txBody>
-      </p:sp>
-      <p:sp>
-        <p:nvSpPr>
-          <p:cNvPr id="9" name="Shape 7"/>
-          <p:cNvSpPr/>
+              <a:t>Lösung</a:t>
+            </a:r>
+            <a:endParaRPr lang="en-US" sz="2700" dirty="0"/>
+          </a:p>
+        </p:txBody>
+      </p:sp>
+      <p:sp>
+        <p:nvSpPr>
+          <p:cNvPr id="9" name="Text 7"/>
+          <p:cNvSpPr txBox="1"/>
           <p:nvPr/>
         </p:nvSpPr>
         <p:spPr>
           <a:xfrm>
             <a:off x="411480" y="1188720"/>
-            <a:ext cx="8321040" cy="1508760"/>
-          </a:xfrm>
-          <a:prstGeom prst="roundRect">
-            <a:avLst>
-              <a:gd name="adj" fmla="val 4848"/>
-            </a:avLst>
-          </a:prstGeom>
-          <a:solidFill>
-            <a:srgbClr val="F4ECDE"/>
-          </a:solidFill>
-          <a:ln w="12700">
-            <a:solidFill>
-              <a:srgbClr val="F4ECDE"/>
-            </a:solidFill>
-            <a:prstDash val="solid"/>
-          </a:ln>
-        </p:spPr>
-      </p:sp>
-      <p:sp>
-        <p:nvSpPr>
-          <p:cNvPr id="10" name="Text 8"/>
-          <p:cNvSpPr txBox="1"/>
-          <p:nvPr/>
-        </p:nvSpPr>
-        <p:spPr>
-          <a:xfrm>
-            <a:off x="594360" y="1188720"/>
-            <a:ext cx="7955280" cy="1508760"/>
+            <a:ext cx="8321040" cy="3566160"/>
           </a:xfrm>
           <a:prstGeom prst="rect">
             <a:avLst/>
@@ -10479,14 +11061,14 @@
           <a:ln/>
         </p:spPr>
         <p:txBody>
-          <a:bodyPr wrap="square" lIns="0" tIns="0" rIns="0" bIns="0" rtlCol="0" anchor="ctr"/>
+          <a:bodyPr wrap="square" lIns="0" tIns="0" rIns="0" bIns="0" rtlCol="0" anchor="t"/>
           <a:lstStyle/>
           <a:p>
             <a:pPr indent="0" marL="0">
               <a:buNone/>
             </a:pPr>
             <a:r>
-              <a:rPr lang="en-US" sz="2700" dirty="0">
+              <a:rPr lang="en-US" sz="2700" i="1" dirty="0">
                 <a:solidFill>
                   <a:srgbClr val="2B2318"/>
                 </a:solidFill>
@@ -10494,73 +11076,7 @@
                 <a:ea typeface="Calibri" pitchFamily="34" charset="-122"/>
                 <a:cs typeface="Calibri" pitchFamily="34" charset="-120"/>
               </a:rPr>
-              <a:t>Einordnen: Nach dem Sturz der Tyrannis (510) wollte Kleisthenes das Volk beteiligen (Z. 6f.).</a:t>
-            </a:r>
-            <a:endParaRPr lang="en-US" sz="2700" dirty="0"/>
-          </a:p>
-        </p:txBody>
-      </p:sp>
-      <p:sp>
-        <p:nvSpPr>
-          <p:cNvPr id="11" name="Shape 9"/>
-          <p:cNvSpPr/>
-          <p:nvPr/>
-        </p:nvSpPr>
-        <p:spPr>
-          <a:xfrm>
-            <a:off x="411480" y="2880360"/>
-            <a:ext cx="8321040" cy="1280160"/>
-          </a:xfrm>
-          <a:prstGeom prst="roundRect">
-            <a:avLst>
-              <a:gd name="adj" fmla="val 5714"/>
-            </a:avLst>
-          </a:prstGeom>
-          <a:solidFill>
-            <a:srgbClr val="2B2318"/>
-          </a:solidFill>
-          <a:ln w="12700">
-            <a:solidFill>
-              <a:srgbClr val="2B2318"/>
-            </a:solidFill>
-            <a:prstDash val="solid"/>
-          </a:ln>
-        </p:spPr>
-      </p:sp>
-      <p:sp>
-        <p:nvSpPr>
-          <p:cNvPr id="12" name="Text 10"/>
-          <p:cNvSpPr txBox="1"/>
-          <p:nvPr/>
-        </p:nvSpPr>
-        <p:spPr>
-          <a:xfrm>
-            <a:off x="594360" y="2880360"/>
-            <a:ext cx="7955280" cy="1280160"/>
-          </a:xfrm>
-          <a:prstGeom prst="rect">
-            <a:avLst/>
-          </a:prstGeom>
-          <a:noFill/>
-          <a:ln/>
-        </p:spPr>
-        <p:txBody>
-          <a:bodyPr wrap="square" lIns="0" tIns="0" rIns="0" bIns="0" rtlCol="0" anchor="ctr"/>
-          <a:lstStyle/>
-          <a:p>
-            <a:pPr indent="0" marL="0">
-              <a:buNone/>
-            </a:pPr>
-            <a:r>
-              <a:rPr lang="en-US" sz="2700" b="1" dirty="0">
-                <a:solidFill>
-                  <a:srgbClr val="D9A441"/>
-                </a:solidFill>
-                <a:latin typeface="Calibri" pitchFamily="34" charset="0"/>
-                <a:ea typeface="Calibri" pitchFamily="34" charset="-122"/>
-                <a:cs typeface="Calibri" pitchFamily="34" charset="-120"/>
-              </a:rPr>
-              <a:t>Urteilen: Aristoteles schrieb 180 Jahre später – er war nicht dabei.</a:t>
+              <a:t>„Schließlich habe er bestimmt, dass man sich nach seinem Demos und nicht mehr nach dem Vater benennt, damit man die neuen Bürger nicht erkennen konnte (Z. 12–14).“</a:t>
             </a:r>
             <a:endParaRPr lang="en-US" sz="2700" dirty="0"/>
           </a:p>
@@ -10792,7 +11308,7 @@
             </a:avLst>
           </a:prstGeom>
           <a:solidFill>
-            <a:srgbClr val="F4ECDE"/>
+            <a:srgbClr val="AD4426"/>
           </a:solidFill>
           <a:ln/>
         </p:spPr>
@@ -10806,7 +11322,7 @@
             <a:r>
               <a:rPr lang="en-US" sz="2700" b="1" dirty="0">
                 <a:solidFill>
-                  <a:srgbClr val="998C77"/>
+                  <a:srgbClr val="FFFFFF"/>
                 </a:solidFill>
                 <a:latin typeface="Calibri" pitchFamily="34" charset="0"/>
                 <a:ea typeface="Calibri" pitchFamily="34" charset="-122"/>
@@ -10835,7 +11351,7 @@
             </a:avLst>
           </a:prstGeom>
           <a:solidFill>
-            <a:srgbClr val="AD4426"/>
+            <a:srgbClr val="F4ECDE"/>
           </a:solidFill>
           <a:ln/>
         </p:spPr>
@@ -10849,7 +11365,7 @@
             <a:r>
               <a:rPr lang="en-US" sz="2700" b="1" dirty="0">
                 <a:solidFill>
-                  <a:srgbClr val="FFFFFF"/>
+                  <a:srgbClr val="998C77"/>
                 </a:solidFill>
                 <a:latin typeface="Calibri" pitchFamily="34" charset="0"/>
                 <a:ea typeface="Calibri" pitchFamily="34" charset="-122"/>
@@ -10894,7 +11410,7 @@
                 <a:ea typeface="Cambria" pitchFamily="34" charset="-122"/>
                 <a:cs typeface="Cambria" pitchFamily="34" charset="-120"/>
               </a:rPr>
-              <a:t>Abschlussaufgabe</a:t>
+              <a:t>Lösung: Begriffe, Sprache</a:t>
             </a:r>
             <a:endParaRPr lang="en-US" sz="3600" dirty="0"/>
           </a:p>
@@ -10917,7 +11433,7 @@
             </a:avLst>
           </a:prstGeom>
           <a:solidFill>
-            <a:srgbClr val="2B2318"/>
+            <a:srgbClr val="D9A441"/>
           </a:solidFill>
           <a:ln/>
         </p:spPr>
@@ -10931,71 +11447,32 @@
             <a:r>
               <a:rPr lang="en-US" sz="2700" b="1" dirty="0">
                 <a:solidFill>
-                  <a:srgbClr val="FFFFFF"/>
-                </a:solidFill>
-                <a:latin typeface="Calibri" pitchFamily="34" charset="0"/>
-                <a:ea typeface="Calibri" pitchFamily="34" charset="-122"/>
-                <a:cs typeface="Calibri" pitchFamily="34" charset="-120"/>
-              </a:rPr>
-              <a:t>4 Min.</a:t>
-            </a:r>
-            <a:endParaRPr lang="en-US" sz="2700" dirty="0"/>
-          </a:p>
-        </p:txBody>
-      </p:sp>
-      <p:sp>
-        <p:nvSpPr>
-          <p:cNvPr id="9" name="Text 7"/>
-          <p:cNvSpPr txBox="1"/>
-          <p:nvPr/>
-        </p:nvSpPr>
-        <p:spPr>
-          <a:xfrm>
-            <a:off x="411480" y="1143000"/>
-            <a:ext cx="8321040" cy="457200"/>
-          </a:xfrm>
-          <a:prstGeom prst="rect">
-            <a:avLst/>
-          </a:prstGeom>
-          <a:noFill/>
-          <a:ln/>
-        </p:spPr>
-        <p:txBody>
-          <a:bodyPr wrap="square" lIns="0" tIns="0" rIns="0" bIns="0" rtlCol="0" anchor="ctr"/>
-          <a:lstStyle/>
-          <a:p>
-            <a:pPr indent="0" marL="0">
-              <a:buNone/>
-            </a:pPr>
-            <a:r>
-              <a:rPr lang="en-US" sz="2700" dirty="0">
-                <a:solidFill>
                   <a:srgbClr val="2B2318"/>
                 </a:solidFill>
                 <a:latin typeface="Calibri" pitchFamily="34" charset="0"/>
                 <a:ea typeface="Calibri" pitchFamily="34" charset="-122"/>
                 <a:cs typeface="Calibri" pitchFamily="34" charset="-120"/>
               </a:rPr>
-              <a:t>Ein Mitschüler zeigt dir seinen Klausur-Anfang:</a:t>
-            </a:r>
-            <a:endParaRPr lang="en-US" sz="2700" dirty="0"/>
-          </a:p>
-        </p:txBody>
-      </p:sp>
-      <p:sp>
-        <p:nvSpPr>
-          <p:cNvPr id="10" name="Shape 8"/>
+              <a:t>Lösung</a:t>
+            </a:r>
+            <a:endParaRPr lang="en-US" sz="2700" dirty="0"/>
+          </a:p>
+        </p:txBody>
+      </p:sp>
+      <p:sp>
+        <p:nvSpPr>
+          <p:cNvPr id="9" name="Shape 7"/>
           <p:cNvSpPr/>
           <p:nvPr/>
         </p:nvSpPr>
         <p:spPr>
           <a:xfrm>
-            <a:off x="411480" y="1645920"/>
-            <a:ext cx="8321040" cy="1920240"/>
-          </a:xfrm>
-          <a:prstGeom prst="roundRect">
-            <a:avLst>
-              <a:gd name="adj" fmla="val 3810"/>
+            <a:off x="411480" y="1188720"/>
+            <a:ext cx="8321040" cy="1097280"/>
+          </a:xfrm>
+          <a:prstGeom prst="roundRect">
+            <a:avLst>
+              <a:gd name="adj" fmla="val 6667"/>
             </a:avLst>
           </a:prstGeom>
           <a:solidFill>
@@ -11011,14 +11488,14 @@
       </p:sp>
       <p:sp>
         <p:nvSpPr>
-          <p:cNvPr id="11" name="Text 9"/>
-          <p:cNvSpPr txBox="1"/>
-          <p:nvPr/>
-        </p:nvSpPr>
-        <p:spPr>
-          <a:xfrm>
-            <a:off x="594360" y="1645920"/>
-            <a:ext cx="7955280" cy="1920240"/>
+          <p:cNvPr id="10" name="Text 8"/>
+          <p:cNvSpPr txBox="1"/>
+          <p:nvPr/>
+        </p:nvSpPr>
+        <p:spPr>
+          <a:xfrm>
+            <a:off x="594360" y="1188720"/>
+            <a:ext cx="7955280" cy="1097280"/>
           </a:xfrm>
           <a:prstGeom prst="rect">
             <a:avLst/>
@@ -11034,7 +11511,7 @@
               <a:buNone/>
             </a:pPr>
             <a:r>
-              <a:rPr lang="en-US" sz="2700" i="1" dirty="0">
+              <a:rPr lang="en-US" sz="2700" b="1" dirty="0">
                 <a:solidFill>
                   <a:srgbClr val="2B2318"/>
                 </a:solidFill>
@@ -11042,49 +11519,22 @@
                 <a:ea typeface="Calibri" pitchFamily="34" charset="-122"/>
                 <a:cs typeface="Calibri" pitchFamily="34" charset="-120"/>
               </a:rPr>
-              <a:t>„Aristoteles war dabei, als Kleisthenes die Demokratie einführte. Kleisthenes teilte die Bürger in zehn Phylen ein. Das war eine sehr gute Idee.“</a:t>
-            </a:r>
-            <a:endParaRPr lang="en-US" sz="2700" dirty="0"/>
-          </a:p>
-        </p:txBody>
-      </p:sp>
-      <p:sp>
-        <p:nvSpPr>
-          <p:cNvPr id="12" name="Shape 10"/>
-          <p:cNvSpPr/>
-          <p:nvPr/>
-        </p:nvSpPr>
-        <p:spPr>
-          <a:xfrm>
-            <a:off x="411480" y="3749040"/>
-            <a:ext cx="8321040" cy="822960"/>
-          </a:xfrm>
-          <a:prstGeom prst="roundRect">
-            <a:avLst>
-              <a:gd name="adj" fmla="val 8889"/>
-            </a:avLst>
-          </a:prstGeom>
-          <a:solidFill>
-            <a:srgbClr val="2B2318"/>
-          </a:solidFill>
-          <a:ln w="12700">
-            <a:solidFill>
-              <a:srgbClr val="2B2318"/>
-            </a:solidFill>
-            <a:prstDash val="solid"/>
-          </a:ln>
-        </p:spPr>
-      </p:sp>
-      <p:sp>
-        <p:nvSpPr>
-          <p:cNvPr id="13" name="Text 11"/>
-          <p:cNvSpPr txBox="1"/>
-          <p:nvPr/>
-        </p:nvSpPr>
-        <p:spPr>
-          <a:xfrm>
-            <a:off x="594360" y="3749040"/>
-            <a:ext cx="7955280" cy="822960"/>
+              <a:t>Phylen – vermischen – Rat der 500 – Trittyen – Demos</a:t>
+            </a:r>
+            <a:endParaRPr lang="en-US" sz="2700" dirty="0"/>
+          </a:p>
+        </p:txBody>
+      </p:sp>
+      <p:sp>
+        <p:nvSpPr>
+          <p:cNvPr id="11" name="Text 9"/>
+          <p:cNvSpPr txBox="1"/>
+          <p:nvPr/>
+        </p:nvSpPr>
+        <p:spPr>
+          <a:xfrm>
+            <a:off x="411480" y="2514600"/>
+            <a:ext cx="8321040" cy="1463040"/>
           </a:xfrm>
           <a:prstGeom prst="rect">
             <a:avLst/>
@@ -11093,22 +11543,22 @@
           <a:ln/>
         </p:spPr>
         <p:txBody>
-          <a:bodyPr wrap="square" lIns="0" tIns="0" rIns="0" bIns="0" rtlCol="0" anchor="ctr"/>
+          <a:bodyPr wrap="square" lIns="0" tIns="0" rIns="0" bIns="0" rtlCol="0" anchor="t"/>
           <a:lstStyle/>
           <a:p>
             <a:pPr indent="0" marL="0">
               <a:buNone/>
             </a:pPr>
             <a:r>
-              <a:rPr lang="en-US" sz="2700" b="1" dirty="0">
-                <a:solidFill>
-                  <a:srgbClr val="FFFFFF"/>
-                </a:solidFill>
-                <a:latin typeface="Calibri" pitchFamily="34" charset="0"/>
-                <a:ea typeface="Calibri" pitchFamily="34" charset="-122"/>
-                <a:cs typeface="Calibri" pitchFamily="34" charset="-120"/>
-              </a:rPr>
-              <a:t>Gib ihm drei Ratschläge: „Ich rate dir …, weil …“</a:t>
+              <a:rPr lang="en-US" sz="2700" dirty="0">
+                <a:solidFill>
+                  <a:srgbClr val="2B2318"/>
+                </a:solidFill>
+                <a:latin typeface="Calibri" pitchFamily="34" charset="0"/>
+                <a:ea typeface="Calibri" pitchFamily="34" charset="-122"/>
+                <a:cs typeface="Calibri" pitchFamily="34" charset="-120"/>
+              </a:rPr>
+              <a:t>Sprache: sachlich und erklärend – er nennt mit „damit …“ den Zweck (Z. 7, 11, 13).</a:t>
             </a:r>
             <a:endParaRPr lang="en-US" sz="2700" dirty="0"/>
           </a:p>
@@ -11340,7 +11790,7 @@
             </a:avLst>
           </a:prstGeom>
           <a:solidFill>
-            <a:srgbClr val="F4ECDE"/>
+            <a:srgbClr val="AD4426"/>
           </a:solidFill>
           <a:ln/>
         </p:spPr>
@@ -11354,7 +11804,7 @@
             <a:r>
               <a:rPr lang="en-US" sz="2700" b="1" dirty="0">
                 <a:solidFill>
-                  <a:srgbClr val="998C77"/>
+                  <a:srgbClr val="FFFFFF"/>
                 </a:solidFill>
                 <a:latin typeface="Calibri" pitchFamily="34" charset="0"/>
                 <a:ea typeface="Calibri" pitchFamily="34" charset="-122"/>
@@ -11383,7 +11833,7 @@
             </a:avLst>
           </a:prstGeom>
           <a:solidFill>
-            <a:srgbClr val="AD4426"/>
+            <a:srgbClr val="F4ECDE"/>
           </a:solidFill>
           <a:ln/>
         </p:spPr>
@@ -11397,7 +11847,7 @@
             <a:r>
               <a:rPr lang="en-US" sz="2700" b="1" dirty="0">
                 <a:solidFill>
-                  <a:srgbClr val="FFFFFF"/>
+                  <a:srgbClr val="998C77"/>
                 </a:solidFill>
                 <a:latin typeface="Calibri" pitchFamily="34" charset="0"/>
                 <a:ea typeface="Calibri" pitchFamily="34" charset="-122"/>
@@ -11442,7 +11892,7 @@
                 <a:ea typeface="Cambria" pitchFamily="34" charset="-122"/>
                 <a:cs typeface="Cambria" pitchFamily="34" charset="-120"/>
               </a:rPr>
-              <a:t>So könnte es lauten</a:t>
+              <a:t>Kontext und Urteil*</a:t>
             </a:r>
             <a:endParaRPr lang="en-US" sz="3600" dirty="0"/>
           </a:p>
@@ -11465,7 +11915,7 @@
             </a:avLst>
           </a:prstGeom>
           <a:solidFill>
-            <a:srgbClr val="D9A441"/>
+            <a:srgbClr val="F4ECDE"/>
           </a:solidFill>
           <a:ln/>
         </p:spPr>
@@ -11485,7 +11935,7 @@
                 <a:ea typeface="Calibri" pitchFamily="34" charset="-122"/>
                 <a:cs typeface="Calibri" pitchFamily="34" charset="-120"/>
               </a:rPr>
-              <a:t>Lösung</a:t>
+              <a:t>nur bei Zeit</a:t>
             </a:r>
             <a:endParaRPr lang="en-US" sz="2700" dirty="0"/>
           </a:p>
@@ -11500,11 +11950,11 @@
         <p:spPr>
           <a:xfrm>
             <a:off x="411480" y="1188720"/>
-            <a:ext cx="8321040" cy="1051560"/>
-          </a:xfrm>
-          <a:prstGeom prst="roundRect">
-            <a:avLst>
-              <a:gd name="adj" fmla="val 6957"/>
+            <a:ext cx="8321040" cy="1508760"/>
+          </a:xfrm>
+          <a:prstGeom prst="roundRect">
+            <a:avLst>
+              <a:gd name="adj" fmla="val 4848"/>
             </a:avLst>
           </a:prstGeom>
           <a:solidFill>
@@ -11527,7 +11977,7 @@
         <p:spPr>
           <a:xfrm>
             <a:off x="594360" y="1188720"/>
-            <a:ext cx="7955280" cy="1051560"/>
+            <a:ext cx="7955280" cy="1508760"/>
           </a:xfrm>
           <a:prstGeom prst="rect">
             <a:avLst/>
@@ -11551,7 +12001,7 @@
                 <a:ea typeface="Calibri" pitchFamily="34" charset="-122"/>
                 <a:cs typeface="Calibri" pitchFamily="34" charset="-120"/>
               </a:rPr>
-              <a:t>Ich rate dir, die Lebensdaten zu prüfen, weil Aristoteles 180 Jahre später schrieb.</a:t>
+              <a:t>Kontext: Nach dem Sturz der Tyrannis (510) kämpfte der Adel wieder um die Macht.</a:t>
             </a:r>
             <a:endParaRPr lang="en-US" sz="2700" dirty="0"/>
           </a:p>
@@ -11565,20 +12015,20 @@
         </p:nvSpPr>
         <p:spPr>
           <a:xfrm>
-            <a:off x="411480" y="2377440"/>
-            <a:ext cx="8321040" cy="1051560"/>
-          </a:xfrm>
-          <a:prstGeom prst="roundRect">
-            <a:avLst>
-              <a:gd name="adj" fmla="val 6957"/>
-            </a:avLst>
-          </a:prstGeom>
-          <a:solidFill>
-            <a:srgbClr val="FFFFFF"/>
+            <a:off x="411480" y="2880360"/>
+            <a:ext cx="8321040" cy="1280160"/>
+          </a:xfrm>
+          <a:prstGeom prst="roundRect">
+            <a:avLst>
+              <a:gd name="adj" fmla="val 5714"/>
+            </a:avLst>
+          </a:prstGeom>
+          <a:solidFill>
+            <a:srgbClr val="2B2318"/>
           </a:solidFill>
           <a:ln w="12700">
             <a:solidFill>
-              <a:srgbClr val="FFFFFF"/>
+              <a:srgbClr val="2B2318"/>
             </a:solidFill>
             <a:prstDash val="solid"/>
           </a:ln>
@@ -11592,8 +12042,8 @@
         </p:nvSpPr>
         <p:spPr>
           <a:xfrm>
-            <a:off x="594360" y="2377440"/>
-            <a:ext cx="7955280" cy="1051560"/>
+            <a:off x="594360" y="2880360"/>
+            <a:ext cx="7955280" cy="1280160"/>
           </a:xfrm>
           <a:prstGeom prst="rect">
             <a:avLst/>
@@ -11609,81 +12059,15 @@
               <a:buNone/>
             </a:pPr>
             <a:r>
-              <a:rPr lang="en-US" sz="2700" dirty="0">
-                <a:solidFill>
-                  <a:srgbClr val="2B2318"/>
-                </a:solidFill>
-                <a:latin typeface="Calibri" pitchFamily="34" charset="0"/>
-                <a:ea typeface="Calibri" pitchFamily="34" charset="-122"/>
-                <a:cs typeface="Calibri" pitchFamily="34" charset="-120"/>
-              </a:rPr>
-              <a:t>Ich rate dir, indirekte Rede und Zeilen zu nutzen, weil du wiedergibst, was er sagt.</a:t>
-            </a:r>
-            <a:endParaRPr lang="en-US" sz="2700" dirty="0"/>
-          </a:p>
-        </p:txBody>
-      </p:sp>
-      <p:sp>
-        <p:nvSpPr>
-          <p:cNvPr id="13" name="Shape 11"/>
-          <p:cNvSpPr/>
-          <p:nvPr/>
-        </p:nvSpPr>
-        <p:spPr>
-          <a:xfrm>
-            <a:off x="411480" y="3566160"/>
-            <a:ext cx="8321040" cy="1051560"/>
-          </a:xfrm>
-          <a:prstGeom prst="roundRect">
-            <a:avLst>
-              <a:gd name="adj" fmla="val 6957"/>
-            </a:avLst>
-          </a:prstGeom>
-          <a:solidFill>
-            <a:srgbClr val="F4ECDE"/>
-          </a:solidFill>
-          <a:ln w="12700">
-            <a:solidFill>
-              <a:srgbClr val="F4ECDE"/>
-            </a:solidFill>
-            <a:prstDash val="solid"/>
-          </a:ln>
-        </p:spPr>
-      </p:sp>
-      <p:sp>
-        <p:nvSpPr>
-          <p:cNvPr id="14" name="Text 12"/>
-          <p:cNvSpPr txBox="1"/>
-          <p:nvPr/>
-        </p:nvSpPr>
-        <p:spPr>
-          <a:xfrm>
-            <a:off x="594360" y="3566160"/>
-            <a:ext cx="7955280" cy="1051560"/>
-          </a:xfrm>
-          <a:prstGeom prst="rect">
-            <a:avLst/>
-          </a:prstGeom>
-          <a:noFill/>
-          <a:ln/>
-        </p:spPr>
-        <p:txBody>
-          <a:bodyPr wrap="square" lIns="0" tIns="0" rIns="0" bIns="0" rtlCol="0" anchor="ctr"/>
-          <a:lstStyle/>
-          <a:p>
-            <a:pPr indent="0" marL="0">
-              <a:buNone/>
-            </a:pPr>
-            <a:r>
-              <a:rPr lang="en-US" sz="2700" dirty="0">
-                <a:solidFill>
-                  <a:srgbClr val="2B2318"/>
-                </a:solidFill>
-                <a:latin typeface="Calibri" pitchFamily="34" charset="0"/>
-                <a:ea typeface="Calibri" pitchFamily="34" charset="-122"/>
-                <a:cs typeface="Calibri" pitchFamily="34" charset="-120"/>
-              </a:rPr>
-              <a:t>Ich rate dir, die Meinung wegzulassen, weil sie erst in Schritt 4 gehört.</a:t>
+              <a:rPr lang="en-US" sz="2700" b="1" dirty="0">
+                <a:solidFill>
+                  <a:srgbClr val="D9A441"/>
+                </a:solidFill>
+                <a:latin typeface="Calibri" pitchFamily="34" charset="0"/>
+                <a:ea typeface="Calibri" pitchFamily="34" charset="-122"/>
+                <a:cs typeface="Calibri" pitchFamily="34" charset="-120"/>
+              </a:rPr>
+              <a:t>Sachurteil: Aristoteles schrieb 180 Jahre später – er war nicht dabei.</a:t>
             </a:r>
             <a:endParaRPr lang="en-US" sz="2700" dirty="0"/>
           </a:p>
@@ -11748,6 +12132,1129 @@
 <file path=ppt/slides/slide26.xml><?xml version="1.0" encoding="utf-8"?>
 <p:sld xmlns:a="http://schemas.openxmlformats.org/drawingml/2006/main" xmlns:r="http://schemas.openxmlformats.org/officeDocument/2006/relationships" xmlns:p="http://schemas.openxmlformats.org/presentationml/2006/main">
   <p:cSld name="Slide 26">
+    <p:bg>
+      <p:bgPr>
+        <a:solidFill>
+          <a:srgbClr val="FFFFFF"/>
+        </a:solidFill>
+      </p:bgPr>
+    </p:bg>
+    <p:spTree>
+      <p:nvGrpSpPr>
+        <p:cNvPr id="1" name=""/>
+        <p:cNvGrpSpPr/>
+        <p:nvPr/>
+      </p:nvGrpSpPr>
+      <p:grpSpPr>
+        <a:xfrm>
+          <a:off x="0" y="0"/>
+          <a:ext cx="0" cy="0"/>
+          <a:chOff x="0" y="0"/>
+          <a:chExt cx="0" cy="0"/>
+        </a:xfrm>
+      </p:grpSpPr>
+      <p:sp>
+        <p:nvSpPr>
+          <p:cNvPr id="2" name="Text 0"/>
+          <p:cNvSpPr txBox="1"/>
+          <p:nvPr/>
+        </p:nvSpPr>
+        <p:spPr>
+          <a:xfrm>
+            <a:off x="6537960" y="109728"/>
+            <a:ext cx="402336" cy="402336"/>
+          </a:xfrm>
+          <a:prstGeom prst="roundRect">
+            <a:avLst>
+              <a:gd name="adj" fmla="val 13636"/>
+            </a:avLst>
+          </a:prstGeom>
+          <a:solidFill>
+            <a:srgbClr val="F4ECDE"/>
+          </a:solidFill>
+          <a:ln/>
+        </p:spPr>
+        <p:txBody>
+          <a:bodyPr wrap="square" lIns="0" tIns="0" rIns="0" bIns="0" rtlCol="0" anchor="ctr"/>
+          <a:lstStyle/>
+          <a:p>
+            <a:pPr algn="ctr" indent="0" marL="0">
+              <a:buNone/>
+            </a:pPr>
+            <a:r>
+              <a:rPr lang="en-US" sz="2700" b="1" dirty="0">
+                <a:solidFill>
+                  <a:srgbClr val="998C77"/>
+                </a:solidFill>
+                <a:latin typeface="Calibri" pitchFamily="34" charset="0"/>
+                <a:ea typeface="Calibri" pitchFamily="34" charset="-122"/>
+                <a:cs typeface="Calibri" pitchFamily="34" charset="-120"/>
+              </a:rPr>
+              <a:t>A</a:t>
+            </a:r>
+            <a:endParaRPr lang="en-US" sz="2700" dirty="0"/>
+          </a:p>
+        </p:txBody>
+      </p:sp>
+      <p:sp>
+        <p:nvSpPr>
+          <p:cNvPr id="3" name="Text 1"/>
+          <p:cNvSpPr txBox="1"/>
+          <p:nvPr/>
+        </p:nvSpPr>
+        <p:spPr>
+          <a:xfrm>
+            <a:off x="6995160" y="109728"/>
+            <a:ext cx="402336" cy="402336"/>
+          </a:xfrm>
+          <a:prstGeom prst="roundRect">
+            <a:avLst>
+              <a:gd name="adj" fmla="val 13636"/>
+            </a:avLst>
+          </a:prstGeom>
+          <a:solidFill>
+            <a:srgbClr val="F4ECDE"/>
+          </a:solidFill>
+          <a:ln/>
+        </p:spPr>
+        <p:txBody>
+          <a:bodyPr wrap="square" lIns="0" tIns="0" rIns="0" bIns="0" rtlCol="0" anchor="ctr"/>
+          <a:lstStyle/>
+          <a:p>
+            <a:pPr algn="ctr" indent="0" marL="0">
+              <a:buNone/>
+            </a:pPr>
+            <a:r>
+              <a:rPr lang="en-US" sz="2700" b="1" dirty="0">
+                <a:solidFill>
+                  <a:srgbClr val="998C77"/>
+                </a:solidFill>
+                <a:latin typeface="Calibri" pitchFamily="34" charset="0"/>
+                <a:ea typeface="Calibri" pitchFamily="34" charset="-122"/>
+                <a:cs typeface="Calibri" pitchFamily="34" charset="-120"/>
+              </a:rPr>
+              <a:t>V</a:t>
+            </a:r>
+            <a:endParaRPr lang="en-US" sz="2700" dirty="0"/>
+          </a:p>
+        </p:txBody>
+      </p:sp>
+      <p:sp>
+        <p:nvSpPr>
+          <p:cNvPr id="4" name="Text 2"/>
+          <p:cNvSpPr txBox="1"/>
+          <p:nvPr/>
+        </p:nvSpPr>
+        <p:spPr>
+          <a:xfrm>
+            <a:off x="7452360" y="109728"/>
+            <a:ext cx="402336" cy="402336"/>
+          </a:xfrm>
+          <a:prstGeom prst="roundRect">
+            <a:avLst>
+              <a:gd name="adj" fmla="val 13636"/>
+            </a:avLst>
+          </a:prstGeom>
+          <a:solidFill>
+            <a:srgbClr val="F4ECDE"/>
+          </a:solidFill>
+          <a:ln/>
+        </p:spPr>
+        <p:txBody>
+          <a:bodyPr wrap="square" lIns="0" tIns="0" rIns="0" bIns="0" rtlCol="0" anchor="ctr"/>
+          <a:lstStyle/>
+          <a:p>
+            <a:pPr algn="ctr" indent="0" marL="0">
+              <a:buNone/>
+            </a:pPr>
+            <a:r>
+              <a:rPr lang="en-US" sz="2700" b="1" dirty="0">
+                <a:solidFill>
+                  <a:srgbClr val="998C77"/>
+                </a:solidFill>
+                <a:latin typeface="Calibri" pitchFamily="34" charset="0"/>
+                <a:ea typeface="Calibri" pitchFamily="34" charset="-122"/>
+                <a:cs typeface="Calibri" pitchFamily="34" charset="-120"/>
+              </a:rPr>
+              <a:t>I</a:t>
+            </a:r>
+            <a:endParaRPr lang="en-US" sz="2700" dirty="0"/>
+          </a:p>
+        </p:txBody>
+      </p:sp>
+      <p:sp>
+        <p:nvSpPr>
+          <p:cNvPr id="5" name="Text 3"/>
+          <p:cNvSpPr txBox="1"/>
+          <p:nvPr/>
+        </p:nvSpPr>
+        <p:spPr>
+          <a:xfrm>
+            <a:off x="7909560" y="109728"/>
+            <a:ext cx="402336" cy="402336"/>
+          </a:xfrm>
+          <a:prstGeom prst="roundRect">
+            <a:avLst>
+              <a:gd name="adj" fmla="val 13636"/>
+            </a:avLst>
+          </a:prstGeom>
+          <a:solidFill>
+            <a:srgbClr val="F4ECDE"/>
+          </a:solidFill>
+          <a:ln/>
+        </p:spPr>
+        <p:txBody>
+          <a:bodyPr wrap="square" lIns="0" tIns="0" rIns="0" bIns="0" rtlCol="0" anchor="ctr"/>
+          <a:lstStyle/>
+          <a:p>
+            <a:pPr algn="ctr" indent="0" marL="0">
+              <a:buNone/>
+            </a:pPr>
+            <a:r>
+              <a:rPr lang="en-US" sz="2700" b="1" dirty="0">
+                <a:solidFill>
+                  <a:srgbClr val="998C77"/>
+                </a:solidFill>
+                <a:latin typeface="Calibri" pitchFamily="34" charset="0"/>
+                <a:ea typeface="Calibri" pitchFamily="34" charset="-122"/>
+                <a:cs typeface="Calibri" pitchFamily="34" charset="-120"/>
+              </a:rPr>
+              <a:t>V</a:t>
+            </a:r>
+            <a:endParaRPr lang="en-US" sz="2700" dirty="0"/>
+          </a:p>
+        </p:txBody>
+      </p:sp>
+      <p:sp>
+        <p:nvSpPr>
+          <p:cNvPr id="6" name="Text 4"/>
+          <p:cNvSpPr txBox="1"/>
+          <p:nvPr/>
+        </p:nvSpPr>
+        <p:spPr>
+          <a:xfrm>
+            <a:off x="8366760" y="109728"/>
+            <a:ext cx="402336" cy="402336"/>
+          </a:xfrm>
+          <a:prstGeom prst="roundRect">
+            <a:avLst>
+              <a:gd name="adj" fmla="val 13636"/>
+            </a:avLst>
+          </a:prstGeom>
+          <a:solidFill>
+            <a:srgbClr val="AD4426"/>
+          </a:solidFill>
+          <a:ln/>
+        </p:spPr>
+        <p:txBody>
+          <a:bodyPr wrap="square" lIns="0" tIns="0" rIns="0" bIns="0" rtlCol="0" anchor="ctr"/>
+          <a:lstStyle/>
+          <a:p>
+            <a:pPr algn="ctr" indent="0" marL="0">
+              <a:buNone/>
+            </a:pPr>
+            <a:r>
+              <a:rPr lang="en-US" sz="2700" b="1" dirty="0">
+                <a:solidFill>
+                  <a:srgbClr val="FFFFFF"/>
+                </a:solidFill>
+                <a:latin typeface="Calibri" pitchFamily="34" charset="0"/>
+                <a:ea typeface="Calibri" pitchFamily="34" charset="-122"/>
+                <a:cs typeface="Calibri" pitchFamily="34" charset="-120"/>
+              </a:rPr>
+              <a:t>A</a:t>
+            </a:r>
+            <a:endParaRPr lang="en-US" sz="2700" dirty="0"/>
+          </a:p>
+        </p:txBody>
+      </p:sp>
+      <p:sp>
+        <p:nvSpPr>
+          <p:cNvPr id="7" name="Text 5"/>
+          <p:cNvSpPr txBox="1"/>
+          <p:nvPr/>
+        </p:nvSpPr>
+        <p:spPr>
+          <a:xfrm>
+            <a:off x="411480" y="137160"/>
+            <a:ext cx="6035040" cy="960120"/>
+          </a:xfrm>
+          <a:prstGeom prst="rect">
+            <a:avLst/>
+          </a:prstGeom>
+          <a:noFill/>
+          <a:ln/>
+        </p:spPr>
+        <p:txBody>
+          <a:bodyPr wrap="square" lIns="0" tIns="0" rIns="0" bIns="0" rtlCol="0" anchor="ctr"/>
+          <a:lstStyle/>
+          <a:p>
+            <a:pPr indent="0" marL="0">
+              <a:buNone/>
+            </a:pPr>
+            <a:r>
+              <a:rPr lang="en-US" sz="3600" b="1" dirty="0">
+                <a:solidFill>
+                  <a:srgbClr val="2B2318"/>
+                </a:solidFill>
+                <a:latin typeface="Cambria" pitchFamily="34" charset="0"/>
+                <a:ea typeface="Cambria" pitchFamily="34" charset="-122"/>
+                <a:cs typeface="Cambria" pitchFamily="34" charset="-120"/>
+              </a:rPr>
+              <a:t>Abschlussaufgabe</a:t>
+            </a:r>
+            <a:endParaRPr lang="en-US" sz="3600" dirty="0"/>
+          </a:p>
+        </p:txBody>
+      </p:sp>
+      <p:sp>
+        <p:nvSpPr>
+          <p:cNvPr id="8" name="Text 6"/>
+          <p:cNvSpPr txBox="1"/>
+          <p:nvPr/>
+        </p:nvSpPr>
+        <p:spPr>
+          <a:xfrm>
+            <a:off x="6537960" y="603504"/>
+            <a:ext cx="2194560" cy="457200"/>
+          </a:xfrm>
+          <a:prstGeom prst="roundRect">
+            <a:avLst>
+              <a:gd name="adj" fmla="val 16000"/>
+            </a:avLst>
+          </a:prstGeom>
+          <a:solidFill>
+            <a:srgbClr val="2B2318"/>
+          </a:solidFill>
+          <a:ln/>
+        </p:spPr>
+        <p:txBody>
+          <a:bodyPr wrap="square" lIns="0" tIns="0" rIns="0" bIns="0" rtlCol="0" anchor="ctr"/>
+          <a:lstStyle/>
+          <a:p>
+            <a:pPr algn="ctr" indent="0" marL="0">
+              <a:buNone/>
+            </a:pPr>
+            <a:r>
+              <a:rPr lang="en-US" sz="2700" b="1" dirty="0">
+                <a:solidFill>
+                  <a:srgbClr val="FFFFFF"/>
+                </a:solidFill>
+                <a:latin typeface="Calibri" pitchFamily="34" charset="0"/>
+                <a:ea typeface="Calibri" pitchFamily="34" charset="-122"/>
+                <a:cs typeface="Calibri" pitchFamily="34" charset="-120"/>
+              </a:rPr>
+              <a:t>4 Min.</a:t>
+            </a:r>
+            <a:endParaRPr lang="en-US" sz="2700" dirty="0"/>
+          </a:p>
+        </p:txBody>
+      </p:sp>
+      <p:sp>
+        <p:nvSpPr>
+          <p:cNvPr id="9" name="Text 7"/>
+          <p:cNvSpPr txBox="1"/>
+          <p:nvPr/>
+        </p:nvSpPr>
+        <p:spPr>
+          <a:xfrm>
+            <a:off x="411480" y="1143000"/>
+            <a:ext cx="8321040" cy="457200"/>
+          </a:xfrm>
+          <a:prstGeom prst="rect">
+            <a:avLst/>
+          </a:prstGeom>
+          <a:noFill/>
+          <a:ln/>
+        </p:spPr>
+        <p:txBody>
+          <a:bodyPr wrap="square" lIns="0" tIns="0" rIns="0" bIns="0" rtlCol="0" anchor="ctr"/>
+          <a:lstStyle/>
+          <a:p>
+            <a:pPr indent="0" marL="0">
+              <a:buNone/>
+            </a:pPr>
+            <a:r>
+              <a:rPr lang="en-US" sz="2700" dirty="0">
+                <a:solidFill>
+                  <a:srgbClr val="2B2318"/>
+                </a:solidFill>
+                <a:latin typeface="Calibri" pitchFamily="34" charset="0"/>
+                <a:ea typeface="Calibri" pitchFamily="34" charset="-122"/>
+                <a:cs typeface="Calibri" pitchFamily="34" charset="-120"/>
+              </a:rPr>
+              <a:t>Ein Mitschüler zeigt dir seinen Klausur-Anfang:</a:t>
+            </a:r>
+            <a:endParaRPr lang="en-US" sz="2700" dirty="0"/>
+          </a:p>
+        </p:txBody>
+      </p:sp>
+      <p:sp>
+        <p:nvSpPr>
+          <p:cNvPr id="10" name="Shape 8"/>
+          <p:cNvSpPr/>
+          <p:nvPr/>
+        </p:nvSpPr>
+        <p:spPr>
+          <a:xfrm>
+            <a:off x="411480" y="1645920"/>
+            <a:ext cx="8321040" cy="1920240"/>
+          </a:xfrm>
+          <a:prstGeom prst="roundRect">
+            <a:avLst>
+              <a:gd name="adj" fmla="val 3810"/>
+            </a:avLst>
+          </a:prstGeom>
+          <a:solidFill>
+            <a:srgbClr val="F4ECDE"/>
+          </a:solidFill>
+          <a:ln w="12700">
+            <a:solidFill>
+              <a:srgbClr val="F4ECDE"/>
+            </a:solidFill>
+            <a:prstDash val="solid"/>
+          </a:ln>
+        </p:spPr>
+      </p:sp>
+      <p:sp>
+        <p:nvSpPr>
+          <p:cNvPr id="11" name="Text 9"/>
+          <p:cNvSpPr txBox="1"/>
+          <p:nvPr/>
+        </p:nvSpPr>
+        <p:spPr>
+          <a:xfrm>
+            <a:off x="594360" y="1645920"/>
+            <a:ext cx="7955280" cy="1920240"/>
+          </a:xfrm>
+          <a:prstGeom prst="rect">
+            <a:avLst/>
+          </a:prstGeom>
+          <a:noFill/>
+          <a:ln/>
+        </p:spPr>
+        <p:txBody>
+          <a:bodyPr wrap="square" lIns="0" tIns="0" rIns="0" bIns="0" rtlCol="0" anchor="ctr"/>
+          <a:lstStyle/>
+          <a:p>
+            <a:pPr indent="0" marL="0">
+              <a:buNone/>
+            </a:pPr>
+            <a:r>
+              <a:rPr lang="en-US" sz="2700" i="1" dirty="0">
+                <a:solidFill>
+                  <a:srgbClr val="2B2318"/>
+                </a:solidFill>
+                <a:latin typeface="Calibri" pitchFamily="34" charset="0"/>
+                <a:ea typeface="Calibri" pitchFamily="34" charset="-122"/>
+                <a:cs typeface="Calibri" pitchFamily="34" charset="-120"/>
+              </a:rPr>
+              <a:t>„Aristoteles war dabei, als Kleisthenes die Demokratie einführte. Kleisthenes teilte die Bürger in zehn Phylen ein. Das war eine sehr gute Idee.“</a:t>
+            </a:r>
+            <a:endParaRPr lang="en-US" sz="2700" dirty="0"/>
+          </a:p>
+        </p:txBody>
+      </p:sp>
+      <p:sp>
+        <p:nvSpPr>
+          <p:cNvPr id="12" name="Shape 10"/>
+          <p:cNvSpPr/>
+          <p:nvPr/>
+        </p:nvSpPr>
+        <p:spPr>
+          <a:xfrm>
+            <a:off x="411480" y="3749040"/>
+            <a:ext cx="8321040" cy="822960"/>
+          </a:xfrm>
+          <a:prstGeom prst="roundRect">
+            <a:avLst>
+              <a:gd name="adj" fmla="val 8889"/>
+            </a:avLst>
+          </a:prstGeom>
+          <a:solidFill>
+            <a:srgbClr val="2B2318"/>
+          </a:solidFill>
+          <a:ln w="12700">
+            <a:solidFill>
+              <a:srgbClr val="2B2318"/>
+            </a:solidFill>
+            <a:prstDash val="solid"/>
+          </a:ln>
+        </p:spPr>
+      </p:sp>
+      <p:sp>
+        <p:nvSpPr>
+          <p:cNvPr id="13" name="Text 11"/>
+          <p:cNvSpPr txBox="1"/>
+          <p:nvPr/>
+        </p:nvSpPr>
+        <p:spPr>
+          <a:xfrm>
+            <a:off x="594360" y="3749040"/>
+            <a:ext cx="7955280" cy="822960"/>
+          </a:xfrm>
+          <a:prstGeom prst="rect">
+            <a:avLst/>
+          </a:prstGeom>
+          <a:noFill/>
+          <a:ln/>
+        </p:spPr>
+        <p:txBody>
+          <a:bodyPr wrap="square" lIns="0" tIns="0" rIns="0" bIns="0" rtlCol="0" anchor="ctr"/>
+          <a:lstStyle/>
+          <a:p>
+            <a:pPr indent="0" marL="0">
+              <a:buNone/>
+            </a:pPr>
+            <a:r>
+              <a:rPr lang="en-US" sz="2700" b="1" dirty="0">
+                <a:solidFill>
+                  <a:srgbClr val="FFFFFF"/>
+                </a:solidFill>
+                <a:latin typeface="Calibri" pitchFamily="34" charset="0"/>
+                <a:ea typeface="Calibri" pitchFamily="34" charset="-122"/>
+                <a:cs typeface="Calibri" pitchFamily="34" charset="-120"/>
+              </a:rPr>
+              <a:t>Gib ihm drei Ratschläge: „Ich rate dir …, weil …“</a:t>
+            </a:r>
+            <a:endParaRPr lang="en-US" sz="2700" dirty="0"/>
+          </a:p>
+        </p:txBody>
+      </p:sp>
+      <p:sp>
+        <p:nvSpPr>
+          <p:cNvPr id="25" name="Slide Number Placeholder 0"/>
+          <p:cNvSpPr>
+            <a:spLocks noGrp="1"/>
+          </p:cNvSpPr>
+          <p:nvPr>
+            <p:ph type="sldNum" sz="quarter" idx="4294967295"/>
+          </p:nvPr>
+        </p:nvSpPr>
+        <p:spPr>
+          <a:xfrm>
+            <a:off x="8503920" y="4846320"/>
+            <a:ext cx="365760" cy="228600"/>
+          </a:xfrm>
+          <a:prstGeom prst="rect">
+            <a:avLst/>
+          </a:prstGeom>
+          <a:extLst>
+            <a:ext uri="{C572A759-6A51-4108-AA02-DFA0A04FC94B}">
+              <ma14:wrappingTextBoxFlag xmlns:ma14="http://schemas.microsoft.com/office/mac/drawingml/2011/main" val="0"/>
+            </a:ext>
+          </a:extLst>
+        </p:spPr>
+        <p:txBody>
+          <a:bodyPr/>
+          <a:lstStyle>
+            <a:lvl1pPr>
+              <a:defRPr sz="1200">
+                <a:solidFill>
+                  <a:srgbClr val="998C77"/>
+                </a:solidFill>
+                <a:latin typeface="Calibri"/>
+                <a:ea typeface="Calibri"/>
+                <a:cs typeface="Calibri"/>
+              </a:defRPr>
+            </a:lvl1pPr>
+          </a:lstStyle>
+          <a:p>
+            <a:pPr algn="r"/>
+            <a:fld id="{F7021451-1387-4CA6-816F-3879F97B5CBC}" type="slidenum">
+              <a:rPr b="0" lang="en-US"/>
+              <a:t>26</a:t>
+            </a:fld>
+            <a:endParaRPr lang="en-US"/>
+          </a:p>
+        </p:txBody>
+      </p:sp>
+    </p:spTree>
+  </p:cSld>
+  <p:clrMapOvr>
+    <a:masterClrMapping/>
+  </p:clrMapOvr>
+</p:sld>
+</file>
+
+<file path=ppt/slides/slide27.xml><?xml version="1.0" encoding="utf-8"?>
+<p:sld xmlns:a="http://schemas.openxmlformats.org/drawingml/2006/main" xmlns:r="http://schemas.openxmlformats.org/officeDocument/2006/relationships" xmlns:p="http://schemas.openxmlformats.org/presentationml/2006/main">
+  <p:cSld name="Slide 27">
+    <p:bg>
+      <p:bgPr>
+        <a:solidFill>
+          <a:srgbClr val="FFFFFF"/>
+        </a:solidFill>
+      </p:bgPr>
+    </p:bg>
+    <p:spTree>
+      <p:nvGrpSpPr>
+        <p:cNvPr id="1" name=""/>
+        <p:cNvGrpSpPr/>
+        <p:nvPr/>
+      </p:nvGrpSpPr>
+      <p:grpSpPr>
+        <a:xfrm>
+          <a:off x="0" y="0"/>
+          <a:ext cx="0" cy="0"/>
+          <a:chOff x="0" y="0"/>
+          <a:chExt cx="0" cy="0"/>
+        </a:xfrm>
+      </p:grpSpPr>
+      <p:sp>
+        <p:nvSpPr>
+          <p:cNvPr id="2" name="Text 0"/>
+          <p:cNvSpPr txBox="1"/>
+          <p:nvPr/>
+        </p:nvSpPr>
+        <p:spPr>
+          <a:xfrm>
+            <a:off x="6537960" y="109728"/>
+            <a:ext cx="402336" cy="402336"/>
+          </a:xfrm>
+          <a:prstGeom prst="roundRect">
+            <a:avLst>
+              <a:gd name="adj" fmla="val 13636"/>
+            </a:avLst>
+          </a:prstGeom>
+          <a:solidFill>
+            <a:srgbClr val="F4ECDE"/>
+          </a:solidFill>
+          <a:ln/>
+        </p:spPr>
+        <p:txBody>
+          <a:bodyPr wrap="square" lIns="0" tIns="0" rIns="0" bIns="0" rtlCol="0" anchor="ctr"/>
+          <a:lstStyle/>
+          <a:p>
+            <a:pPr algn="ctr" indent="0" marL="0">
+              <a:buNone/>
+            </a:pPr>
+            <a:r>
+              <a:rPr lang="en-US" sz="2700" b="1" dirty="0">
+                <a:solidFill>
+                  <a:srgbClr val="998C77"/>
+                </a:solidFill>
+                <a:latin typeface="Calibri" pitchFamily="34" charset="0"/>
+                <a:ea typeface="Calibri" pitchFamily="34" charset="-122"/>
+                <a:cs typeface="Calibri" pitchFamily="34" charset="-120"/>
+              </a:rPr>
+              <a:t>A</a:t>
+            </a:r>
+            <a:endParaRPr lang="en-US" sz="2700" dirty="0"/>
+          </a:p>
+        </p:txBody>
+      </p:sp>
+      <p:sp>
+        <p:nvSpPr>
+          <p:cNvPr id="3" name="Text 1"/>
+          <p:cNvSpPr txBox="1"/>
+          <p:nvPr/>
+        </p:nvSpPr>
+        <p:spPr>
+          <a:xfrm>
+            <a:off x="6995160" y="109728"/>
+            <a:ext cx="402336" cy="402336"/>
+          </a:xfrm>
+          <a:prstGeom prst="roundRect">
+            <a:avLst>
+              <a:gd name="adj" fmla="val 13636"/>
+            </a:avLst>
+          </a:prstGeom>
+          <a:solidFill>
+            <a:srgbClr val="F4ECDE"/>
+          </a:solidFill>
+          <a:ln/>
+        </p:spPr>
+        <p:txBody>
+          <a:bodyPr wrap="square" lIns="0" tIns="0" rIns="0" bIns="0" rtlCol="0" anchor="ctr"/>
+          <a:lstStyle/>
+          <a:p>
+            <a:pPr algn="ctr" indent="0" marL="0">
+              <a:buNone/>
+            </a:pPr>
+            <a:r>
+              <a:rPr lang="en-US" sz="2700" b="1" dirty="0">
+                <a:solidFill>
+                  <a:srgbClr val="998C77"/>
+                </a:solidFill>
+                <a:latin typeface="Calibri" pitchFamily="34" charset="0"/>
+                <a:ea typeface="Calibri" pitchFamily="34" charset="-122"/>
+                <a:cs typeface="Calibri" pitchFamily="34" charset="-120"/>
+              </a:rPr>
+              <a:t>V</a:t>
+            </a:r>
+            <a:endParaRPr lang="en-US" sz="2700" dirty="0"/>
+          </a:p>
+        </p:txBody>
+      </p:sp>
+      <p:sp>
+        <p:nvSpPr>
+          <p:cNvPr id="4" name="Text 2"/>
+          <p:cNvSpPr txBox="1"/>
+          <p:nvPr/>
+        </p:nvSpPr>
+        <p:spPr>
+          <a:xfrm>
+            <a:off x="7452360" y="109728"/>
+            <a:ext cx="402336" cy="402336"/>
+          </a:xfrm>
+          <a:prstGeom prst="roundRect">
+            <a:avLst>
+              <a:gd name="adj" fmla="val 13636"/>
+            </a:avLst>
+          </a:prstGeom>
+          <a:solidFill>
+            <a:srgbClr val="F4ECDE"/>
+          </a:solidFill>
+          <a:ln/>
+        </p:spPr>
+        <p:txBody>
+          <a:bodyPr wrap="square" lIns="0" tIns="0" rIns="0" bIns="0" rtlCol="0" anchor="ctr"/>
+          <a:lstStyle/>
+          <a:p>
+            <a:pPr algn="ctr" indent="0" marL="0">
+              <a:buNone/>
+            </a:pPr>
+            <a:r>
+              <a:rPr lang="en-US" sz="2700" b="1" dirty="0">
+                <a:solidFill>
+                  <a:srgbClr val="998C77"/>
+                </a:solidFill>
+                <a:latin typeface="Calibri" pitchFamily="34" charset="0"/>
+                <a:ea typeface="Calibri" pitchFamily="34" charset="-122"/>
+                <a:cs typeface="Calibri" pitchFamily="34" charset="-120"/>
+              </a:rPr>
+              <a:t>I</a:t>
+            </a:r>
+            <a:endParaRPr lang="en-US" sz="2700" dirty="0"/>
+          </a:p>
+        </p:txBody>
+      </p:sp>
+      <p:sp>
+        <p:nvSpPr>
+          <p:cNvPr id="5" name="Text 3"/>
+          <p:cNvSpPr txBox="1"/>
+          <p:nvPr/>
+        </p:nvSpPr>
+        <p:spPr>
+          <a:xfrm>
+            <a:off x="7909560" y="109728"/>
+            <a:ext cx="402336" cy="402336"/>
+          </a:xfrm>
+          <a:prstGeom prst="roundRect">
+            <a:avLst>
+              <a:gd name="adj" fmla="val 13636"/>
+            </a:avLst>
+          </a:prstGeom>
+          <a:solidFill>
+            <a:srgbClr val="F4ECDE"/>
+          </a:solidFill>
+          <a:ln/>
+        </p:spPr>
+        <p:txBody>
+          <a:bodyPr wrap="square" lIns="0" tIns="0" rIns="0" bIns="0" rtlCol="0" anchor="ctr"/>
+          <a:lstStyle/>
+          <a:p>
+            <a:pPr algn="ctr" indent="0" marL="0">
+              <a:buNone/>
+            </a:pPr>
+            <a:r>
+              <a:rPr lang="en-US" sz="2700" b="1" dirty="0">
+                <a:solidFill>
+                  <a:srgbClr val="998C77"/>
+                </a:solidFill>
+                <a:latin typeface="Calibri" pitchFamily="34" charset="0"/>
+                <a:ea typeface="Calibri" pitchFamily="34" charset="-122"/>
+                <a:cs typeface="Calibri" pitchFamily="34" charset="-120"/>
+              </a:rPr>
+              <a:t>V</a:t>
+            </a:r>
+            <a:endParaRPr lang="en-US" sz="2700" dirty="0"/>
+          </a:p>
+        </p:txBody>
+      </p:sp>
+      <p:sp>
+        <p:nvSpPr>
+          <p:cNvPr id="6" name="Text 4"/>
+          <p:cNvSpPr txBox="1"/>
+          <p:nvPr/>
+        </p:nvSpPr>
+        <p:spPr>
+          <a:xfrm>
+            <a:off x="8366760" y="109728"/>
+            <a:ext cx="402336" cy="402336"/>
+          </a:xfrm>
+          <a:prstGeom prst="roundRect">
+            <a:avLst>
+              <a:gd name="adj" fmla="val 13636"/>
+            </a:avLst>
+          </a:prstGeom>
+          <a:solidFill>
+            <a:srgbClr val="AD4426"/>
+          </a:solidFill>
+          <a:ln/>
+        </p:spPr>
+        <p:txBody>
+          <a:bodyPr wrap="square" lIns="0" tIns="0" rIns="0" bIns="0" rtlCol="0" anchor="ctr"/>
+          <a:lstStyle/>
+          <a:p>
+            <a:pPr algn="ctr" indent="0" marL="0">
+              <a:buNone/>
+            </a:pPr>
+            <a:r>
+              <a:rPr lang="en-US" sz="2700" b="1" dirty="0">
+                <a:solidFill>
+                  <a:srgbClr val="FFFFFF"/>
+                </a:solidFill>
+                <a:latin typeface="Calibri" pitchFamily="34" charset="0"/>
+                <a:ea typeface="Calibri" pitchFamily="34" charset="-122"/>
+                <a:cs typeface="Calibri" pitchFamily="34" charset="-120"/>
+              </a:rPr>
+              <a:t>A</a:t>
+            </a:r>
+            <a:endParaRPr lang="en-US" sz="2700" dirty="0"/>
+          </a:p>
+        </p:txBody>
+      </p:sp>
+      <p:sp>
+        <p:nvSpPr>
+          <p:cNvPr id="7" name="Text 5"/>
+          <p:cNvSpPr txBox="1"/>
+          <p:nvPr/>
+        </p:nvSpPr>
+        <p:spPr>
+          <a:xfrm>
+            <a:off x="411480" y="137160"/>
+            <a:ext cx="6035040" cy="960120"/>
+          </a:xfrm>
+          <a:prstGeom prst="rect">
+            <a:avLst/>
+          </a:prstGeom>
+          <a:noFill/>
+          <a:ln/>
+        </p:spPr>
+        <p:txBody>
+          <a:bodyPr wrap="square" lIns="0" tIns="0" rIns="0" bIns="0" rtlCol="0" anchor="ctr"/>
+          <a:lstStyle/>
+          <a:p>
+            <a:pPr indent="0" marL="0">
+              <a:buNone/>
+            </a:pPr>
+            <a:r>
+              <a:rPr lang="en-US" sz="3600" b="1" dirty="0">
+                <a:solidFill>
+                  <a:srgbClr val="2B2318"/>
+                </a:solidFill>
+                <a:latin typeface="Cambria" pitchFamily="34" charset="0"/>
+                <a:ea typeface="Cambria" pitchFamily="34" charset="-122"/>
+                <a:cs typeface="Cambria" pitchFamily="34" charset="-120"/>
+              </a:rPr>
+              <a:t>So könnte es lauten</a:t>
+            </a:r>
+            <a:endParaRPr lang="en-US" sz="3600" dirty="0"/>
+          </a:p>
+        </p:txBody>
+      </p:sp>
+      <p:sp>
+        <p:nvSpPr>
+          <p:cNvPr id="8" name="Text 6"/>
+          <p:cNvSpPr txBox="1"/>
+          <p:nvPr/>
+        </p:nvSpPr>
+        <p:spPr>
+          <a:xfrm>
+            <a:off x="6537960" y="603504"/>
+            <a:ext cx="2194560" cy="457200"/>
+          </a:xfrm>
+          <a:prstGeom prst="roundRect">
+            <a:avLst>
+              <a:gd name="adj" fmla="val 16000"/>
+            </a:avLst>
+          </a:prstGeom>
+          <a:solidFill>
+            <a:srgbClr val="D9A441"/>
+          </a:solidFill>
+          <a:ln/>
+        </p:spPr>
+        <p:txBody>
+          <a:bodyPr wrap="square" lIns="0" tIns="0" rIns="0" bIns="0" rtlCol="0" anchor="ctr"/>
+          <a:lstStyle/>
+          <a:p>
+            <a:pPr algn="ctr" indent="0" marL="0">
+              <a:buNone/>
+            </a:pPr>
+            <a:r>
+              <a:rPr lang="en-US" sz="2700" b="1" dirty="0">
+                <a:solidFill>
+                  <a:srgbClr val="2B2318"/>
+                </a:solidFill>
+                <a:latin typeface="Calibri" pitchFamily="34" charset="0"/>
+                <a:ea typeface="Calibri" pitchFamily="34" charset="-122"/>
+                <a:cs typeface="Calibri" pitchFamily="34" charset="-120"/>
+              </a:rPr>
+              <a:t>Lösung</a:t>
+            </a:r>
+            <a:endParaRPr lang="en-US" sz="2700" dirty="0"/>
+          </a:p>
+        </p:txBody>
+      </p:sp>
+      <p:sp>
+        <p:nvSpPr>
+          <p:cNvPr id="9" name="Shape 7"/>
+          <p:cNvSpPr/>
+          <p:nvPr/>
+        </p:nvSpPr>
+        <p:spPr>
+          <a:xfrm>
+            <a:off x="411480" y="1188720"/>
+            <a:ext cx="8321040" cy="1051560"/>
+          </a:xfrm>
+          <a:prstGeom prst="roundRect">
+            <a:avLst>
+              <a:gd name="adj" fmla="val 6957"/>
+            </a:avLst>
+          </a:prstGeom>
+          <a:solidFill>
+            <a:srgbClr val="F4ECDE"/>
+          </a:solidFill>
+          <a:ln w="12700">
+            <a:solidFill>
+              <a:srgbClr val="F4ECDE"/>
+            </a:solidFill>
+            <a:prstDash val="solid"/>
+          </a:ln>
+        </p:spPr>
+      </p:sp>
+      <p:sp>
+        <p:nvSpPr>
+          <p:cNvPr id="10" name="Text 8"/>
+          <p:cNvSpPr txBox="1"/>
+          <p:nvPr/>
+        </p:nvSpPr>
+        <p:spPr>
+          <a:xfrm>
+            <a:off x="594360" y="1188720"/>
+            <a:ext cx="7955280" cy="1051560"/>
+          </a:xfrm>
+          <a:prstGeom prst="rect">
+            <a:avLst/>
+          </a:prstGeom>
+          <a:noFill/>
+          <a:ln/>
+        </p:spPr>
+        <p:txBody>
+          <a:bodyPr wrap="square" lIns="0" tIns="0" rIns="0" bIns="0" rtlCol="0" anchor="ctr"/>
+          <a:lstStyle/>
+          <a:p>
+            <a:pPr indent="0" marL="0">
+              <a:buNone/>
+            </a:pPr>
+            <a:r>
+              <a:rPr lang="en-US" sz="2700" dirty="0">
+                <a:solidFill>
+                  <a:srgbClr val="2B2318"/>
+                </a:solidFill>
+                <a:latin typeface="Calibri" pitchFamily="34" charset="0"/>
+                <a:ea typeface="Calibri" pitchFamily="34" charset="-122"/>
+                <a:cs typeface="Calibri" pitchFamily="34" charset="-120"/>
+              </a:rPr>
+              <a:t>Ich rate dir, die Lebensdaten zu prüfen, weil Aristoteles 180 Jahre später schrieb.</a:t>
+            </a:r>
+            <a:endParaRPr lang="en-US" sz="2700" dirty="0"/>
+          </a:p>
+        </p:txBody>
+      </p:sp>
+      <p:sp>
+        <p:nvSpPr>
+          <p:cNvPr id="11" name="Shape 9"/>
+          <p:cNvSpPr/>
+          <p:nvPr/>
+        </p:nvSpPr>
+        <p:spPr>
+          <a:xfrm>
+            <a:off x="411480" y="2377440"/>
+            <a:ext cx="8321040" cy="1051560"/>
+          </a:xfrm>
+          <a:prstGeom prst="roundRect">
+            <a:avLst>
+              <a:gd name="adj" fmla="val 6957"/>
+            </a:avLst>
+          </a:prstGeom>
+          <a:solidFill>
+            <a:srgbClr val="FFFFFF"/>
+          </a:solidFill>
+          <a:ln w="12700">
+            <a:solidFill>
+              <a:srgbClr val="FFFFFF"/>
+            </a:solidFill>
+            <a:prstDash val="solid"/>
+          </a:ln>
+        </p:spPr>
+      </p:sp>
+      <p:sp>
+        <p:nvSpPr>
+          <p:cNvPr id="12" name="Text 10"/>
+          <p:cNvSpPr txBox="1"/>
+          <p:nvPr/>
+        </p:nvSpPr>
+        <p:spPr>
+          <a:xfrm>
+            <a:off x="594360" y="2377440"/>
+            <a:ext cx="7955280" cy="1051560"/>
+          </a:xfrm>
+          <a:prstGeom prst="rect">
+            <a:avLst/>
+          </a:prstGeom>
+          <a:noFill/>
+          <a:ln/>
+        </p:spPr>
+        <p:txBody>
+          <a:bodyPr wrap="square" lIns="0" tIns="0" rIns="0" bIns="0" rtlCol="0" anchor="ctr"/>
+          <a:lstStyle/>
+          <a:p>
+            <a:pPr indent="0" marL="0">
+              <a:buNone/>
+            </a:pPr>
+            <a:r>
+              <a:rPr lang="en-US" sz="2700" dirty="0">
+                <a:solidFill>
+                  <a:srgbClr val="2B2318"/>
+                </a:solidFill>
+                <a:latin typeface="Calibri" pitchFamily="34" charset="0"/>
+                <a:ea typeface="Calibri" pitchFamily="34" charset="-122"/>
+                <a:cs typeface="Calibri" pitchFamily="34" charset="-120"/>
+              </a:rPr>
+              <a:t>Ich rate dir, indirekte Rede und Zeilen zu nutzen, weil du wiedergibst, was er sagt.</a:t>
+            </a:r>
+            <a:endParaRPr lang="en-US" sz="2700" dirty="0"/>
+          </a:p>
+        </p:txBody>
+      </p:sp>
+      <p:sp>
+        <p:nvSpPr>
+          <p:cNvPr id="13" name="Shape 11"/>
+          <p:cNvSpPr/>
+          <p:nvPr/>
+        </p:nvSpPr>
+        <p:spPr>
+          <a:xfrm>
+            <a:off x="411480" y="3566160"/>
+            <a:ext cx="8321040" cy="1051560"/>
+          </a:xfrm>
+          <a:prstGeom prst="roundRect">
+            <a:avLst>
+              <a:gd name="adj" fmla="val 6957"/>
+            </a:avLst>
+          </a:prstGeom>
+          <a:solidFill>
+            <a:srgbClr val="F4ECDE"/>
+          </a:solidFill>
+          <a:ln w="12700">
+            <a:solidFill>
+              <a:srgbClr val="F4ECDE"/>
+            </a:solidFill>
+            <a:prstDash val="solid"/>
+          </a:ln>
+        </p:spPr>
+      </p:sp>
+      <p:sp>
+        <p:nvSpPr>
+          <p:cNvPr id="14" name="Text 12"/>
+          <p:cNvSpPr txBox="1"/>
+          <p:nvPr/>
+        </p:nvSpPr>
+        <p:spPr>
+          <a:xfrm>
+            <a:off x="594360" y="3566160"/>
+            <a:ext cx="7955280" cy="1051560"/>
+          </a:xfrm>
+          <a:prstGeom prst="rect">
+            <a:avLst/>
+          </a:prstGeom>
+          <a:noFill/>
+          <a:ln/>
+        </p:spPr>
+        <p:txBody>
+          <a:bodyPr wrap="square" lIns="0" tIns="0" rIns="0" bIns="0" rtlCol="0" anchor="ctr"/>
+          <a:lstStyle/>
+          <a:p>
+            <a:pPr indent="0" marL="0">
+              <a:buNone/>
+            </a:pPr>
+            <a:r>
+              <a:rPr lang="en-US" sz="2700" dirty="0">
+                <a:solidFill>
+                  <a:srgbClr val="2B2318"/>
+                </a:solidFill>
+                <a:latin typeface="Calibri" pitchFamily="34" charset="0"/>
+                <a:ea typeface="Calibri" pitchFamily="34" charset="-122"/>
+                <a:cs typeface="Calibri" pitchFamily="34" charset="-120"/>
+              </a:rPr>
+              <a:t>Ich rate dir, die Meinung wegzulassen, weil sie erst in Schritt 4 gehört.</a:t>
+            </a:r>
+            <a:endParaRPr lang="en-US" sz="2700" dirty="0"/>
+          </a:p>
+        </p:txBody>
+      </p:sp>
+      <p:sp>
+        <p:nvSpPr>
+          <p:cNvPr id="25" name="Slide Number Placeholder 0"/>
+          <p:cNvSpPr>
+            <a:spLocks noGrp="1"/>
+          </p:cNvSpPr>
+          <p:nvPr>
+            <p:ph type="sldNum" sz="quarter" idx="4294967295"/>
+          </p:nvPr>
+        </p:nvSpPr>
+        <p:spPr>
+          <a:xfrm>
+            <a:off x="8503920" y="4846320"/>
+            <a:ext cx="365760" cy="228600"/>
+          </a:xfrm>
+          <a:prstGeom prst="rect">
+            <a:avLst/>
+          </a:prstGeom>
+          <a:extLst>
+            <a:ext uri="{C572A759-6A51-4108-AA02-DFA0A04FC94B}">
+              <ma14:wrappingTextBoxFlag xmlns:ma14="http://schemas.microsoft.com/office/mac/drawingml/2011/main" val="0"/>
+            </a:ext>
+          </a:extLst>
+        </p:spPr>
+        <p:txBody>
+          <a:bodyPr/>
+          <a:lstStyle>
+            <a:lvl1pPr>
+              <a:defRPr sz="1200">
+                <a:solidFill>
+                  <a:srgbClr val="998C77"/>
+                </a:solidFill>
+                <a:latin typeface="Calibri"/>
+                <a:ea typeface="Calibri"/>
+                <a:cs typeface="Calibri"/>
+              </a:defRPr>
+            </a:lvl1pPr>
+          </a:lstStyle>
+          <a:p>
+            <a:pPr algn="r"/>
+            <a:fld id="{F7021451-1387-4CA6-816F-3879F97B5CBC}" type="slidenum">
+              <a:rPr b="0" lang="en-US"/>
+              <a:t>27</a:t>
+            </a:fld>
+            <a:endParaRPr lang="en-US"/>
+          </a:p>
+        </p:txBody>
+      </p:sp>
+    </p:spTree>
+  </p:cSld>
+  <p:clrMapOvr>
+    <a:masterClrMapping/>
+  </p:clrMapOvr>
+</p:sld>
+</file>
+
+<file path=ppt/slides/slide28.xml><?xml version="1.0" encoding="utf-8"?>
+<p:sld xmlns:a="http://schemas.openxmlformats.org/drawingml/2006/main" xmlns:r="http://schemas.openxmlformats.org/officeDocument/2006/relationships" xmlns:p="http://schemas.openxmlformats.org/presentationml/2006/main">
+  <p:cSld name="Slide 28">
     <p:bg>
       <p:bgPr>
         <a:solidFill>
@@ -12056,7 +13563,7 @@
                 <a:ea typeface="Calibri" pitchFamily="34" charset="-122"/>
                 <a:cs typeface="Calibri" pitchFamily="34" charset="-120"/>
               </a:rPr>
-              <a:t>Ich kann eine Textquelle mit dem Schreibplan analysieren: Einleitung schreiben und Inhalt wiedergeben.</a:t>
+              <a:t>Ich kann eine Textquelle nach den Arbeitsschritten analysieren: formale und inhaltliche Aspekte.</a:t>
             </a:r>
             <a:endParaRPr lang="en-US" sz="2700" dirty="0"/>
           </a:p>
@@ -12095,7 +13602,7 @@
                 <a:ea typeface="Calibri" pitchFamily="34" charset="-122"/>
                 <a:cs typeface="Calibri" pitchFamily="34" charset="-120"/>
               </a:rPr>
-              <a:t>Nächstes Mal: Schritte 3 und 4 – einordnen und urteilen.</a:t>
+              <a:t>Nächstes Mal: Kontext, Sach- und Werturteil.</a:t>
             </a:r>
             <a:endParaRPr lang="en-US" sz="2700" dirty="0"/>
           </a:p>
@@ -12143,7 +13650,7 @@
             <a:pPr algn="r"/>
             <a:fld id="{F7021451-1387-4CA6-816F-3879F97B5CBC}" type="slidenum">
               <a:rPr b="0" lang="en-US"/>
-              <a:t>26</a:t>
+              <a:t>28</a:t>
             </a:fld>
             <a:endParaRPr lang="en-US"/>
           </a:p>
@@ -12538,7 +14045,7 @@
                 <a:ea typeface="Calibri" pitchFamily="34" charset="-122"/>
                 <a:cs typeface="Calibri" pitchFamily="34" charset="-120"/>
               </a:rPr>
-              <a:t>Ich kann eine Textquelle mit dem Schreibplan analysieren: Einleitung schreiben und Inhalt wiedergeben.</a:t>
+              <a:t>Ich kann eine Textquelle nach den Arbeitsschritten analysieren: formale und inhaltliche Aspekte.</a:t>
             </a:r>
             <a:endParaRPr lang="en-US" sz="2700" dirty="0"/>
           </a:p>
@@ -12616,7 +14123,7 @@
                 <a:ea typeface="Calibri" pitchFamily="34" charset="-122"/>
                 <a:cs typeface="Calibri" pitchFamily="34" charset="-120"/>
               </a:rPr>
-              <a:t>2  Der Schreibplan in vier Schritten</a:t>
+              <a:t>2  Die Arbeitsschritte im Überblick</a:t>
             </a:r>
             <a:endParaRPr lang="en-US" sz="2700" dirty="0"/>
           </a:p>
@@ -12655,7 +14162,7 @@
                 <a:ea typeface="Calibri" pitchFamily="34" charset="-122"/>
                 <a:cs typeface="Calibri" pitchFamily="34" charset="-120"/>
               </a:rPr>
-              <a:t>3  Schritt 1: Einleitung</a:t>
+              <a:t>3  Analyse: formale Aspekte</a:t>
             </a:r>
             <a:endParaRPr lang="en-US" sz="2700" dirty="0"/>
           </a:p>
@@ -12694,7 +14201,7 @@
                 <a:ea typeface="Calibri" pitchFamily="34" charset="-122"/>
                 <a:cs typeface="Calibri" pitchFamily="34" charset="-120"/>
               </a:rPr>
-              <a:t>4  Schritt 2: Inhalt · Schritte 3 und 4*</a:t>
+              <a:t>4  Analyse: Inhalt · Kontext und Urteil*</a:t>
             </a:r>
             <a:endParaRPr lang="en-US" sz="2700" dirty="0"/>
           </a:p>
@@ -14458,7 +15965,7 @@
                 <a:ea typeface="Calibri" pitchFamily="34" charset="-122"/>
                 <a:cs typeface="Calibri" pitchFamily="34" charset="-120"/>
               </a:rPr>
-              <a:t>In der Klausur bekommst du eine Quelle. Die erste Aufgabe heißt meist: „Analysiere die Quelle.“</a:t>
+              <a:t>In der Klausur bekommst du eine Quelle. Die Aufgabe heißt oft: „Interpretieren Sie die Quelle.“</a:t>
             </a:r>
             <a:endParaRPr lang="en-US" sz="2700" dirty="0"/>
           </a:p>
@@ -14524,7 +16031,7 @@
                 <a:ea typeface="Calibri" pitchFamily="34" charset="-122"/>
                 <a:cs typeface="Calibri" pitchFamily="34" charset="-120"/>
               </a:rPr>
-              <a:t>Mit einem Schreibplan weißt du immer, was als Nächstes kommt.</a:t>
+              <a:t>Mit den Arbeitsschritten weißt du immer, was als Nächstes kommt.</a:t>
             </a:r>
             <a:endParaRPr lang="en-US" sz="2700" dirty="0"/>
           </a:p>
@@ -14858,7 +16365,7 @@
                 <a:ea typeface="Cambria" pitchFamily="34" charset="-122"/>
                 <a:cs typeface="Cambria" pitchFamily="34" charset="-120"/>
               </a:rPr>
-              <a:t>Der Schreibplan</a:t>
+              <a:t>Die Arbeitsschritte</a:t>
             </a:r>
             <a:endParaRPr lang="en-US" sz="3600" dirty="0"/>
           </a:p>
@@ -14981,7 +16488,7 @@
                 <a:ea typeface="Calibri" pitchFamily="34" charset="-122"/>
                 <a:cs typeface="Calibri" pitchFamily="34" charset="-120"/>
               </a:rPr>
-              <a:t>Einleitung – Wer? Was? Wann? Für wen?</a:t>
+              <a:t>Themenfrage – Was will ich herausfinden?</a:t>
             </a:r>
             <a:endParaRPr lang="en-US" sz="2700" dirty="0"/>
           </a:p>
@@ -15061,7 +16568,7 @@
                 <a:ea typeface="Calibri" pitchFamily="34" charset="-122"/>
                 <a:cs typeface="Calibri" pitchFamily="34" charset="-120"/>
               </a:rPr>
-              <a:t>Inhalt – Was steht in der Quelle?</a:t>
+              <a:t>Analyse – Wer schreibt? Was steht drin?</a:t>
             </a:r>
             <a:endParaRPr lang="en-US" sz="2700" dirty="0"/>
           </a:p>
@@ -15141,7 +16648,7 @@
                 <a:ea typeface="Calibri" pitchFamily="34" charset="-122"/>
                 <a:cs typeface="Calibri" pitchFamily="34" charset="-120"/>
               </a:rPr>
-              <a:t>Einordnen – Was geschah damals?</a:t>
+              <a:t>Kontext – Was geschah damals?</a:t>
             </a:r>
             <a:endParaRPr lang="en-US" sz="2700" dirty="0"/>
           </a:p>
@@ -15221,7 +16728,7 @@
                 <a:ea typeface="Calibri" pitchFamily="34" charset="-122"/>
                 <a:cs typeface="Calibri" pitchFamily="34" charset="-120"/>
               </a:rPr>
-              <a:t>Urteilen – Wie glaubwürdig ist sie?</a:t>
+              <a:t>Urteilen – erst Sach-, dann Werturteil</a:t>
             </a:r>
             <a:endParaRPr lang="en-US" sz="2700" dirty="0"/>
           </a:p>
@@ -15287,7 +16794,7 @@
                 <a:ea typeface="Calibri" pitchFamily="34" charset="-122"/>
                 <a:cs typeface="Calibri" pitchFamily="34" charset="-120"/>
               </a:rPr>
-              <a:t>⚠ Nicht einfach nacherzählen: Schritt für Schritt!</a:t>
+              <a:t>⚠ Erst untersuchen, dann urteilen!</a:t>
             </a:r>
             <a:endParaRPr lang="en-US" sz="2700" dirty="0"/>
           </a:p>
@@ -15621,7 +17128,7 @@
                 <a:ea typeface="Cambria" pitchFamily="34" charset="-122"/>
                 <a:cs typeface="Cambria" pitchFamily="34" charset="-120"/>
               </a:rPr>
-              <a:t>Schritt 1: Einleitung</a:t>
+              <a:t>1 Unsere Themenfrage</a:t>
             </a:r>
             <a:endParaRPr lang="en-US" sz="3600" dirty="0"/>
           </a:p>
@@ -15644,74 +17151,58 @@
             </a:avLst>
           </a:prstGeom>
           <a:solidFill>
+            <a:srgbClr val="F4ECDE"/>
+          </a:solidFill>
+          <a:ln/>
+        </p:spPr>
+        <p:txBody>
+          <a:bodyPr wrap="square" lIns="0" tIns="0" rIns="0" bIns="0" rtlCol="0" anchor="ctr"/>
+          <a:lstStyle/>
+          <a:p>
+            <a:pPr algn="ctr" indent="0" marL="0">
+              <a:buNone/>
+            </a:pPr>
+            <a:r>
+              <a:rPr lang="en-US" sz="2700" b="1" dirty="0">
+                <a:solidFill>
+                  <a:srgbClr val="2B2318"/>
+                </a:solidFill>
+                <a:latin typeface="Calibri" pitchFamily="34" charset="0"/>
+                <a:ea typeface="Calibri" pitchFamily="34" charset="-122"/>
+                <a:cs typeface="Calibri" pitchFamily="34" charset="-120"/>
+              </a:rPr>
+              <a:t>vorgegeben</a:t>
+            </a:r>
+            <a:endParaRPr lang="en-US" sz="2700" dirty="0"/>
+          </a:p>
+        </p:txBody>
+      </p:sp>
+      <p:sp>
+        <p:nvSpPr>
+          <p:cNvPr id="9" name="Shape 7"/>
+          <p:cNvSpPr/>
+          <p:nvPr/>
+        </p:nvSpPr>
+        <p:spPr>
+          <a:xfrm>
+            <a:off x="411480" y="1234440"/>
+            <a:ext cx="8321040" cy="1554480"/>
+          </a:xfrm>
+          <a:prstGeom prst="roundRect">
+            <a:avLst>
+              <a:gd name="adj" fmla="val 4706"/>
+            </a:avLst>
+          </a:prstGeom>
+          <a:solidFill>
             <a:srgbClr val="2B2318"/>
           </a:solidFill>
-          <a:ln/>
-        </p:spPr>
-        <p:txBody>
-          <a:bodyPr wrap="square" lIns="0" tIns="0" rIns="0" bIns="0" rtlCol="0" anchor="ctr"/>
-          <a:lstStyle/>
-          <a:p>
-            <a:pPr algn="ctr" indent="0" marL="0">
-              <a:buNone/>
-            </a:pPr>
-            <a:r>
-              <a:rPr lang="en-US" sz="2700" b="1" dirty="0">
-                <a:solidFill>
-                  <a:srgbClr val="FFFFFF"/>
-                </a:solidFill>
-                <a:latin typeface="Calibri" pitchFamily="34" charset="0"/>
-                <a:ea typeface="Calibri" pitchFamily="34" charset="-122"/>
-                <a:cs typeface="Calibri" pitchFamily="34" charset="-120"/>
-              </a:rPr>
-              <a:t>Portion 2</a:t>
-            </a:r>
-            <a:endParaRPr lang="en-US" sz="2700" dirty="0"/>
-          </a:p>
-        </p:txBody>
-      </p:sp>
-      <p:sp>
-        <p:nvSpPr>
-          <p:cNvPr id="9" name="Text 7"/>
-          <p:cNvSpPr txBox="1"/>
-          <p:nvPr/>
-        </p:nvSpPr>
-        <p:spPr>
-          <a:xfrm>
-            <a:off x="411480" y="1188720"/>
-            <a:ext cx="3017520" cy="566928"/>
-          </a:xfrm>
-          <a:prstGeom prst="roundRect">
-            <a:avLst>
-              <a:gd name="adj" fmla="val 12903"/>
-            </a:avLst>
-          </a:prstGeom>
-          <a:solidFill>
-            <a:srgbClr val="AD4426"/>
-          </a:solidFill>
-          <a:ln/>
-        </p:spPr>
-        <p:txBody>
-          <a:bodyPr wrap="square" lIns="0" tIns="0" rIns="0" bIns="0" rtlCol="0" anchor="ctr"/>
-          <a:lstStyle/>
-          <a:p>
-            <a:pPr algn="ctr" indent="0" marL="0">
-              <a:buNone/>
-            </a:pPr>
-            <a:r>
-              <a:rPr lang="en-US" sz="2700" b="1" dirty="0">
-                <a:solidFill>
-                  <a:srgbClr val="FFFFFF"/>
-                </a:solidFill>
-                <a:latin typeface="Calibri" pitchFamily="34" charset="0"/>
-                <a:ea typeface="Calibri" pitchFamily="34" charset="-122"/>
-                <a:cs typeface="Calibri" pitchFamily="34" charset="-120"/>
-              </a:rPr>
-              <a:t>Autor</a:t>
-            </a:r>
-            <a:endParaRPr lang="en-US" sz="2700" dirty="0"/>
-          </a:p>
-        </p:txBody>
+          <a:ln w="12700">
+            <a:solidFill>
+              <a:srgbClr val="2B2318"/>
+            </a:solidFill>
+            <a:prstDash val="solid"/>
+          </a:ln>
+        </p:spPr>
       </p:sp>
       <p:sp>
         <p:nvSpPr>
@@ -15721,8 +17212,8 @@
         </p:nvSpPr>
         <p:spPr>
           <a:xfrm>
-            <a:off x="3611880" y="1188720"/>
-            <a:ext cx="5120640" cy="566928"/>
+            <a:off x="594360" y="1234440"/>
+            <a:ext cx="7955280" cy="1554480"/>
           </a:xfrm>
           <a:prstGeom prst="rect">
             <a:avLst/>
@@ -15738,15 +17229,15 @@
               <a:buNone/>
             </a:pPr>
             <a:r>
-              <a:rPr lang="en-US" sz="2700" dirty="0">
-                <a:solidFill>
-                  <a:srgbClr val="2B2318"/>
-                </a:solidFill>
-                <a:latin typeface="Calibri" pitchFamily="34" charset="0"/>
-                <a:ea typeface="Calibri" pitchFamily="34" charset="-122"/>
-                <a:cs typeface="Calibri" pitchFamily="34" charset="-120"/>
-              </a:rPr>
-              <a:t>Wer hat sie verfasst?</a:t>
+              <a:rPr lang="en-US" sz="2700" b="1" dirty="0">
+                <a:solidFill>
+                  <a:srgbClr val="FFFFFF"/>
+                </a:solidFill>
+                <a:latin typeface="Calibri" pitchFamily="34" charset="0"/>
+                <a:ea typeface="Calibri" pitchFamily="34" charset="-122"/>
+                <a:cs typeface="Calibri" pitchFamily="34" charset="-120"/>
+              </a:rPr>
+              <a:t>Wie veränderte Kleisthenes laut Aristoteles die Ordnung Athens – und mit welchem Ziel?</a:t>
             </a:r>
             <a:endParaRPr lang="en-US" sz="2700" dirty="0"/>
           </a:p>
@@ -15760,51 +17251,8 @@
         </p:nvSpPr>
         <p:spPr>
           <a:xfrm>
-            <a:off x="411480" y="1874520"/>
-            <a:ext cx="3017520" cy="566928"/>
-          </a:xfrm>
-          <a:prstGeom prst="roundRect">
-            <a:avLst>
-              <a:gd name="adj" fmla="val 12903"/>
-            </a:avLst>
-          </a:prstGeom>
-          <a:solidFill>
-            <a:srgbClr val="AD4426"/>
-          </a:solidFill>
-          <a:ln/>
-        </p:spPr>
-        <p:txBody>
-          <a:bodyPr wrap="square" lIns="0" tIns="0" rIns="0" bIns="0" rtlCol="0" anchor="ctr"/>
-          <a:lstStyle/>
-          <a:p>
-            <a:pPr algn="ctr" indent="0" marL="0">
-              <a:buNone/>
-            </a:pPr>
-            <a:r>
-              <a:rPr lang="en-US" sz="2700" b="1" dirty="0">
-                <a:solidFill>
-                  <a:srgbClr val="FFFFFF"/>
-                </a:solidFill>
-                <a:latin typeface="Calibri" pitchFamily="34" charset="0"/>
-                <a:ea typeface="Calibri" pitchFamily="34" charset="-122"/>
-                <a:cs typeface="Calibri" pitchFamily="34" charset="-120"/>
-              </a:rPr>
-              <a:t>Quellenart</a:t>
-            </a:r>
-            <a:endParaRPr lang="en-US" sz="2700" dirty="0"/>
-          </a:p>
-        </p:txBody>
-      </p:sp>
-      <p:sp>
-        <p:nvSpPr>
-          <p:cNvPr id="12" name="Text 10"/>
-          <p:cNvSpPr txBox="1"/>
-          <p:nvPr/>
-        </p:nvSpPr>
-        <p:spPr>
-          <a:xfrm>
-            <a:off x="3611880" y="1874520"/>
-            <a:ext cx="5120640" cy="566928"/>
+            <a:off x="411480" y="3063240"/>
+            <a:ext cx="8321040" cy="822960"/>
           </a:xfrm>
           <a:prstGeom prst="rect">
             <a:avLst/>
@@ -15828,253 +17276,7 @@
                 <a:ea typeface="Calibri" pitchFamily="34" charset="-122"/>
                 <a:cs typeface="Calibri" pitchFamily="34" charset="-120"/>
               </a:rPr>
-              <a:t>Brief, Gedicht, Rede, Sachtext …</a:t>
-            </a:r>
-            <a:endParaRPr lang="en-US" sz="2700" dirty="0"/>
-          </a:p>
-        </p:txBody>
-      </p:sp>
-      <p:sp>
-        <p:nvSpPr>
-          <p:cNvPr id="13" name="Text 11"/>
-          <p:cNvSpPr txBox="1"/>
-          <p:nvPr/>
-        </p:nvSpPr>
-        <p:spPr>
-          <a:xfrm>
-            <a:off x="411480" y="2560320"/>
-            <a:ext cx="3017520" cy="566928"/>
-          </a:xfrm>
-          <a:prstGeom prst="roundRect">
-            <a:avLst>
-              <a:gd name="adj" fmla="val 12903"/>
-            </a:avLst>
-          </a:prstGeom>
-          <a:solidFill>
-            <a:srgbClr val="AD4426"/>
-          </a:solidFill>
-          <a:ln/>
-        </p:spPr>
-        <p:txBody>
-          <a:bodyPr wrap="square" lIns="0" tIns="0" rIns="0" bIns="0" rtlCol="0" anchor="ctr"/>
-          <a:lstStyle/>
-          <a:p>
-            <a:pPr algn="ctr" indent="0" marL="0">
-              <a:buNone/>
-            </a:pPr>
-            <a:r>
-              <a:rPr lang="en-US" sz="2700" b="1" dirty="0">
-                <a:solidFill>
-                  <a:srgbClr val="FFFFFF"/>
-                </a:solidFill>
-                <a:latin typeface="Calibri" pitchFamily="34" charset="0"/>
-                <a:ea typeface="Calibri" pitchFamily="34" charset="-122"/>
-                <a:cs typeface="Calibri" pitchFamily="34" charset="-120"/>
-              </a:rPr>
-              <a:t>Entstehungszeit</a:t>
-            </a:r>
-            <a:endParaRPr lang="en-US" sz="2700" dirty="0"/>
-          </a:p>
-        </p:txBody>
-      </p:sp>
-      <p:sp>
-        <p:nvSpPr>
-          <p:cNvPr id="14" name="Text 12"/>
-          <p:cNvSpPr txBox="1"/>
-          <p:nvPr/>
-        </p:nvSpPr>
-        <p:spPr>
-          <a:xfrm>
-            <a:off x="3611880" y="2560320"/>
-            <a:ext cx="5120640" cy="566928"/>
-          </a:xfrm>
-          <a:prstGeom prst="rect">
-            <a:avLst/>
-          </a:prstGeom>
-          <a:noFill/>
-          <a:ln/>
-        </p:spPr>
-        <p:txBody>
-          <a:bodyPr wrap="square" lIns="0" tIns="0" rIns="0" bIns="0" rtlCol="0" anchor="ctr"/>
-          <a:lstStyle/>
-          <a:p>
-            <a:pPr indent="0" marL="0">
-              <a:buNone/>
-            </a:pPr>
-            <a:r>
-              <a:rPr lang="en-US" sz="2700" dirty="0">
-                <a:solidFill>
-                  <a:srgbClr val="2B2318"/>
-                </a:solidFill>
-                <a:latin typeface="Calibri" pitchFamily="34" charset="0"/>
-                <a:ea typeface="Calibri" pitchFamily="34" charset="-122"/>
-                <a:cs typeface="Calibri" pitchFamily="34" charset="-120"/>
-              </a:rPr>
-              <a:t>Wann ist sie entstanden?</a:t>
-            </a:r>
-            <a:endParaRPr lang="en-US" sz="2700" dirty="0"/>
-          </a:p>
-        </p:txBody>
-      </p:sp>
-      <p:sp>
-        <p:nvSpPr>
-          <p:cNvPr id="15" name="Text 13"/>
-          <p:cNvSpPr txBox="1"/>
-          <p:nvPr/>
-        </p:nvSpPr>
-        <p:spPr>
-          <a:xfrm>
-            <a:off x="411480" y="3246120"/>
-            <a:ext cx="3017520" cy="566928"/>
-          </a:xfrm>
-          <a:prstGeom prst="roundRect">
-            <a:avLst>
-              <a:gd name="adj" fmla="val 12903"/>
-            </a:avLst>
-          </a:prstGeom>
-          <a:solidFill>
-            <a:srgbClr val="AD4426"/>
-          </a:solidFill>
-          <a:ln/>
-        </p:spPr>
-        <p:txBody>
-          <a:bodyPr wrap="square" lIns="0" tIns="0" rIns="0" bIns="0" rtlCol="0" anchor="ctr"/>
-          <a:lstStyle/>
-          <a:p>
-            <a:pPr algn="ctr" indent="0" marL="0">
-              <a:buNone/>
-            </a:pPr>
-            <a:r>
-              <a:rPr lang="en-US" sz="2700" b="1" dirty="0">
-                <a:solidFill>
-                  <a:srgbClr val="FFFFFF"/>
-                </a:solidFill>
-                <a:latin typeface="Calibri" pitchFamily="34" charset="0"/>
-                <a:ea typeface="Calibri" pitchFamily="34" charset="-122"/>
-                <a:cs typeface="Calibri" pitchFamily="34" charset="-120"/>
-              </a:rPr>
-              <a:t>Adressat</a:t>
-            </a:r>
-            <a:endParaRPr lang="en-US" sz="2700" dirty="0"/>
-          </a:p>
-        </p:txBody>
-      </p:sp>
-      <p:sp>
-        <p:nvSpPr>
-          <p:cNvPr id="16" name="Text 14"/>
-          <p:cNvSpPr txBox="1"/>
-          <p:nvPr/>
-        </p:nvSpPr>
-        <p:spPr>
-          <a:xfrm>
-            <a:off x="3611880" y="3246120"/>
-            <a:ext cx="5120640" cy="566928"/>
-          </a:xfrm>
-          <a:prstGeom prst="rect">
-            <a:avLst/>
-          </a:prstGeom>
-          <a:noFill/>
-          <a:ln/>
-        </p:spPr>
-        <p:txBody>
-          <a:bodyPr wrap="square" lIns="0" tIns="0" rIns="0" bIns="0" rtlCol="0" anchor="ctr"/>
-          <a:lstStyle/>
-          <a:p>
-            <a:pPr indent="0" marL="0">
-              <a:buNone/>
-            </a:pPr>
-            <a:r>
-              <a:rPr lang="en-US" sz="2700" dirty="0">
-                <a:solidFill>
-                  <a:srgbClr val="2B2318"/>
-                </a:solidFill>
-                <a:latin typeface="Calibri" pitchFamily="34" charset="0"/>
-                <a:ea typeface="Calibri" pitchFamily="34" charset="-122"/>
-                <a:cs typeface="Calibri" pitchFamily="34" charset="-120"/>
-              </a:rPr>
-              <a:t>Für wen ist sie gedacht?</a:t>
-            </a:r>
-            <a:endParaRPr lang="en-US" sz="2700" dirty="0"/>
-          </a:p>
-        </p:txBody>
-      </p:sp>
-      <p:sp>
-        <p:nvSpPr>
-          <p:cNvPr id="17" name="Text 15"/>
-          <p:cNvSpPr txBox="1"/>
-          <p:nvPr/>
-        </p:nvSpPr>
-        <p:spPr>
-          <a:xfrm>
-            <a:off x="411480" y="3931920"/>
-            <a:ext cx="3017520" cy="566928"/>
-          </a:xfrm>
-          <a:prstGeom prst="roundRect">
-            <a:avLst>
-              <a:gd name="adj" fmla="val 12903"/>
-            </a:avLst>
-          </a:prstGeom>
-          <a:solidFill>
-            <a:srgbClr val="AD4426"/>
-          </a:solidFill>
-          <a:ln/>
-        </p:spPr>
-        <p:txBody>
-          <a:bodyPr wrap="square" lIns="0" tIns="0" rIns="0" bIns="0" rtlCol="0" anchor="ctr"/>
-          <a:lstStyle/>
-          <a:p>
-            <a:pPr algn="ctr" indent="0" marL="0">
-              <a:buNone/>
-            </a:pPr>
-            <a:r>
-              <a:rPr lang="en-US" sz="2700" b="1" dirty="0">
-                <a:solidFill>
-                  <a:srgbClr val="FFFFFF"/>
-                </a:solidFill>
-                <a:latin typeface="Calibri" pitchFamily="34" charset="0"/>
-                <a:ea typeface="Calibri" pitchFamily="34" charset="-122"/>
-                <a:cs typeface="Calibri" pitchFamily="34" charset="-120"/>
-              </a:rPr>
-              <a:t>Thema</a:t>
-            </a:r>
-            <a:endParaRPr lang="en-US" sz="2700" dirty="0"/>
-          </a:p>
-        </p:txBody>
-      </p:sp>
-      <p:sp>
-        <p:nvSpPr>
-          <p:cNvPr id="18" name="Text 16"/>
-          <p:cNvSpPr txBox="1"/>
-          <p:nvPr/>
-        </p:nvSpPr>
-        <p:spPr>
-          <a:xfrm>
-            <a:off x="3611880" y="3931920"/>
-            <a:ext cx="5120640" cy="566928"/>
-          </a:xfrm>
-          <a:prstGeom prst="rect">
-            <a:avLst/>
-          </a:prstGeom>
-          <a:noFill/>
-          <a:ln/>
-        </p:spPr>
-        <p:txBody>
-          <a:bodyPr wrap="square" lIns="0" tIns="0" rIns="0" bIns="0" rtlCol="0" anchor="ctr"/>
-          <a:lstStyle/>
-          <a:p>
-            <a:pPr indent="0" marL="0">
-              <a:buNone/>
-            </a:pPr>
-            <a:r>
-              <a:rPr lang="en-US" sz="2700" dirty="0">
-                <a:solidFill>
-                  <a:srgbClr val="2B2318"/>
-                </a:solidFill>
-                <a:latin typeface="Calibri" pitchFamily="34" charset="0"/>
-                <a:ea typeface="Calibri" pitchFamily="34" charset="-122"/>
-                <a:cs typeface="Calibri" pitchFamily="34" charset="-120"/>
-              </a:rPr>
-              <a:t>Worum geht es?</a:t>
+              <a:t>Sie steht über allem – am Ende beantworten wir sie.</a:t>
             </a:r>
             <a:endParaRPr lang="en-US" sz="2700" dirty="0"/>
           </a:p>
@@ -16408,7 +17610,7 @@
                 <a:ea typeface="Cambria" pitchFamily="34" charset="-122"/>
                 <a:cs typeface="Cambria" pitchFamily="34" charset="-120"/>
               </a:rPr>
-              <a:t>So geht's – ein Beispiel</a:t>
+              <a:t>2a Formale Aspekte</a:t>
             </a:r>
             <a:endParaRPr lang="en-US" sz="3600" dirty="0"/>
           </a:p>
@@ -16451,7 +17653,7 @@
                 <a:ea typeface="Calibri" pitchFamily="34" charset="-122"/>
                 <a:cs typeface="Calibri" pitchFamily="34" charset="-120"/>
               </a:rPr>
-              <a:t>Lehrkraft</a:t>
+              <a:t>Portion 2</a:t>
             </a:r>
             <a:endParaRPr lang="en-US" sz="2700" dirty="0"/>
           </a:p>
@@ -16468,6 +17670,49 @@
             <a:off x="411480" y="1188720"/>
             <a:ext cx="3017520" cy="566928"/>
           </a:xfrm>
+          <a:prstGeom prst="roundRect">
+            <a:avLst>
+              <a:gd name="adj" fmla="val 12903"/>
+            </a:avLst>
+          </a:prstGeom>
+          <a:solidFill>
+            <a:srgbClr val="AD4426"/>
+          </a:solidFill>
+          <a:ln/>
+        </p:spPr>
+        <p:txBody>
+          <a:bodyPr wrap="square" lIns="0" tIns="0" rIns="0" bIns="0" rtlCol="0" anchor="ctr"/>
+          <a:lstStyle/>
+          <a:p>
+            <a:pPr algn="ctr" indent="0" marL="0">
+              <a:buNone/>
+            </a:pPr>
+            <a:r>
+              <a:rPr lang="en-US" sz="2700" b="1" dirty="0">
+                <a:solidFill>
+                  <a:srgbClr val="FFFFFF"/>
+                </a:solidFill>
+                <a:latin typeface="Calibri" pitchFamily="34" charset="0"/>
+                <a:ea typeface="Calibri" pitchFamily="34" charset="-122"/>
+                <a:cs typeface="Calibri" pitchFamily="34" charset="-120"/>
+              </a:rPr>
+              <a:t>Autor</a:t>
+            </a:r>
+            <a:endParaRPr lang="en-US" sz="2700" dirty="0"/>
+          </a:p>
+        </p:txBody>
+      </p:sp>
+      <p:sp>
+        <p:nvSpPr>
+          <p:cNvPr id="10" name="Text 8"/>
+          <p:cNvSpPr txBox="1"/>
+          <p:nvPr/>
+        </p:nvSpPr>
+        <p:spPr>
+          <a:xfrm>
+            <a:off x="3611880" y="1188720"/>
+            <a:ext cx="5120640" cy="566928"/>
+          </a:xfrm>
           <a:prstGeom prst="rect">
             <a:avLst/>
           </a:prstGeom>
@@ -16482,29 +17727,72 @@
               <a:buNone/>
             </a:pPr>
             <a:r>
-              <a:rPr lang="en-US" sz="2700" b="1" dirty="0">
-                <a:solidFill>
-                  <a:srgbClr val="AD4426"/>
-                </a:solidFill>
-                <a:latin typeface="Calibri" pitchFamily="34" charset="0"/>
-                <a:ea typeface="Calibri" pitchFamily="34" charset="-122"/>
-                <a:cs typeface="Calibri" pitchFamily="34" charset="-120"/>
-              </a:rPr>
-              <a:t>Autor</a:t>
-            </a:r>
-            <a:endParaRPr lang="en-US" sz="2700" dirty="0"/>
-          </a:p>
-        </p:txBody>
-      </p:sp>
-      <p:sp>
-        <p:nvSpPr>
-          <p:cNvPr id="10" name="Text 8"/>
-          <p:cNvSpPr txBox="1"/>
-          <p:nvPr/>
-        </p:nvSpPr>
-        <p:spPr>
-          <a:xfrm>
-            <a:off x="3611880" y="1188720"/>
+              <a:rPr lang="en-US" sz="2700" dirty="0">
+                <a:solidFill>
+                  <a:srgbClr val="2B2318"/>
+                </a:solidFill>
+                <a:latin typeface="Calibri" pitchFamily="34" charset="0"/>
+                <a:ea typeface="Calibri" pitchFamily="34" charset="-122"/>
+                <a:cs typeface="Calibri" pitchFamily="34" charset="-120"/>
+              </a:rPr>
+              <a:t>Wer? Amt, Stellung?</a:t>
+            </a:r>
+            <a:endParaRPr lang="en-US" sz="2700" dirty="0"/>
+          </a:p>
+        </p:txBody>
+      </p:sp>
+      <p:sp>
+        <p:nvSpPr>
+          <p:cNvPr id="11" name="Text 9"/>
+          <p:cNvSpPr txBox="1"/>
+          <p:nvPr/>
+        </p:nvSpPr>
+        <p:spPr>
+          <a:xfrm>
+            <a:off x="411480" y="1874520"/>
+            <a:ext cx="3017520" cy="566928"/>
+          </a:xfrm>
+          <a:prstGeom prst="roundRect">
+            <a:avLst>
+              <a:gd name="adj" fmla="val 12903"/>
+            </a:avLst>
+          </a:prstGeom>
+          <a:solidFill>
+            <a:srgbClr val="AD4426"/>
+          </a:solidFill>
+          <a:ln/>
+        </p:spPr>
+        <p:txBody>
+          <a:bodyPr wrap="square" lIns="0" tIns="0" rIns="0" bIns="0" rtlCol="0" anchor="ctr"/>
+          <a:lstStyle/>
+          <a:p>
+            <a:pPr algn="ctr" indent="0" marL="0">
+              <a:buNone/>
+            </a:pPr>
+            <a:r>
+              <a:rPr lang="en-US" sz="2700" b="1" dirty="0">
+                <a:solidFill>
+                  <a:srgbClr val="FFFFFF"/>
+                </a:solidFill>
+                <a:latin typeface="Calibri" pitchFamily="34" charset="0"/>
+                <a:ea typeface="Calibri" pitchFamily="34" charset="-122"/>
+                <a:cs typeface="Calibri" pitchFamily="34" charset="-120"/>
+              </a:rPr>
+              <a:t>Zeit und Ort</a:t>
+            </a:r>
+            <a:endParaRPr lang="en-US" sz="2700" dirty="0"/>
+          </a:p>
+        </p:txBody>
+      </p:sp>
+      <p:sp>
+        <p:nvSpPr>
+          <p:cNvPr id="12" name="Text 10"/>
+          <p:cNvSpPr txBox="1"/>
+          <p:nvPr/>
+        </p:nvSpPr>
+        <p:spPr>
+          <a:xfrm>
+            <a:off x="3611880" y="1874520"/>
             <a:ext cx="5120640" cy="566928"/>
           </a:xfrm>
           <a:prstGeom prst="rect">
@@ -16529,22 +17817,65 @@
                 <a:ea typeface="Calibri" pitchFamily="34" charset="-122"/>
                 <a:cs typeface="Calibri" pitchFamily="34" charset="-120"/>
               </a:rPr>
-              <a:t>Solon, Archon und Gesetzgeber Athens</a:t>
-            </a:r>
-            <a:endParaRPr lang="en-US" sz="2700" dirty="0"/>
-          </a:p>
-        </p:txBody>
-      </p:sp>
-      <p:sp>
-        <p:nvSpPr>
-          <p:cNvPr id="11" name="Text 9"/>
-          <p:cNvSpPr txBox="1"/>
-          <p:nvPr/>
-        </p:nvSpPr>
-        <p:spPr>
-          <a:xfrm>
-            <a:off x="411480" y="1874520"/>
+              <a:t>Wann und wo entstanden?</a:t>
+            </a:r>
+            <a:endParaRPr lang="en-US" sz="2700" dirty="0"/>
+          </a:p>
+        </p:txBody>
+      </p:sp>
+      <p:sp>
+        <p:nvSpPr>
+          <p:cNvPr id="13" name="Text 11"/>
+          <p:cNvSpPr txBox="1"/>
+          <p:nvPr/>
+        </p:nvSpPr>
+        <p:spPr>
+          <a:xfrm>
+            <a:off x="411480" y="2560320"/>
             <a:ext cx="3017520" cy="566928"/>
+          </a:xfrm>
+          <a:prstGeom prst="roundRect">
+            <a:avLst>
+              <a:gd name="adj" fmla="val 12903"/>
+            </a:avLst>
+          </a:prstGeom>
+          <a:solidFill>
+            <a:srgbClr val="AD4426"/>
+          </a:solidFill>
+          <a:ln/>
+        </p:spPr>
+        <p:txBody>
+          <a:bodyPr wrap="square" lIns="0" tIns="0" rIns="0" bIns="0" rtlCol="0" anchor="ctr"/>
+          <a:lstStyle/>
+          <a:p>
+            <a:pPr algn="ctr" indent="0" marL="0">
+              <a:buNone/>
+            </a:pPr>
+            <a:r>
+              <a:rPr lang="en-US" sz="2700" b="1" dirty="0">
+                <a:solidFill>
+                  <a:srgbClr val="FFFFFF"/>
+                </a:solidFill>
+                <a:latin typeface="Calibri" pitchFamily="34" charset="0"/>
+                <a:ea typeface="Calibri" pitchFamily="34" charset="-122"/>
+                <a:cs typeface="Calibri" pitchFamily="34" charset="-120"/>
+              </a:rPr>
+              <a:t>Textart</a:t>
+            </a:r>
+            <a:endParaRPr lang="en-US" sz="2700" dirty="0"/>
+          </a:p>
+        </p:txBody>
+      </p:sp>
+      <p:sp>
+        <p:nvSpPr>
+          <p:cNvPr id="14" name="Text 12"/>
+          <p:cNvSpPr txBox="1"/>
+          <p:nvPr/>
+        </p:nvSpPr>
+        <p:spPr>
+          <a:xfrm>
+            <a:off x="3611880" y="2560320"/>
+            <a:ext cx="5120640" cy="566928"/>
           </a:xfrm>
           <a:prstGeom prst="rect">
             <a:avLst/>
@@ -16560,29 +17891,72 @@
               <a:buNone/>
             </a:pPr>
             <a:r>
-              <a:rPr lang="en-US" sz="2700" b="1" dirty="0">
-                <a:solidFill>
-                  <a:srgbClr val="AD4426"/>
-                </a:solidFill>
-                <a:latin typeface="Calibri" pitchFamily="34" charset="0"/>
-                <a:ea typeface="Calibri" pitchFamily="34" charset="-122"/>
-                <a:cs typeface="Calibri" pitchFamily="34" charset="-120"/>
-              </a:rPr>
-              <a:t>Quellenart</a:t>
-            </a:r>
-            <a:endParaRPr lang="en-US" sz="2700" dirty="0"/>
-          </a:p>
-        </p:txBody>
-      </p:sp>
-      <p:sp>
-        <p:nvSpPr>
-          <p:cNvPr id="12" name="Text 10"/>
-          <p:cNvSpPr txBox="1"/>
-          <p:nvPr/>
-        </p:nvSpPr>
-        <p:spPr>
-          <a:xfrm>
-            <a:off x="3611880" y="1874520"/>
+              <a:rPr lang="en-US" sz="2700" dirty="0">
+                <a:solidFill>
+                  <a:srgbClr val="2B2318"/>
+                </a:solidFill>
+                <a:latin typeface="Calibri" pitchFamily="34" charset="0"/>
+                <a:ea typeface="Calibri" pitchFamily="34" charset="-122"/>
+                <a:cs typeface="Calibri" pitchFamily="34" charset="-120"/>
+              </a:rPr>
+              <a:t>Brief, Rede, Bericht …</a:t>
+            </a:r>
+            <a:endParaRPr lang="en-US" sz="2700" dirty="0"/>
+          </a:p>
+        </p:txBody>
+      </p:sp>
+      <p:sp>
+        <p:nvSpPr>
+          <p:cNvPr id="15" name="Text 13"/>
+          <p:cNvSpPr txBox="1"/>
+          <p:nvPr/>
+        </p:nvSpPr>
+        <p:spPr>
+          <a:xfrm>
+            <a:off x="411480" y="3246120"/>
+            <a:ext cx="3017520" cy="566928"/>
+          </a:xfrm>
+          <a:prstGeom prst="roundRect">
+            <a:avLst>
+              <a:gd name="adj" fmla="val 12903"/>
+            </a:avLst>
+          </a:prstGeom>
+          <a:solidFill>
+            <a:srgbClr val="AD4426"/>
+          </a:solidFill>
+          <a:ln/>
+        </p:spPr>
+        <p:txBody>
+          <a:bodyPr wrap="square" lIns="0" tIns="0" rIns="0" bIns="0" rtlCol="0" anchor="ctr"/>
+          <a:lstStyle/>
+          <a:p>
+            <a:pPr algn="ctr" indent="0" marL="0">
+              <a:buNone/>
+            </a:pPr>
+            <a:r>
+              <a:rPr lang="en-US" sz="2700" b="1" dirty="0">
+                <a:solidFill>
+                  <a:srgbClr val="FFFFFF"/>
+                </a:solidFill>
+                <a:latin typeface="Calibri" pitchFamily="34" charset="0"/>
+                <a:ea typeface="Calibri" pitchFamily="34" charset="-122"/>
+                <a:cs typeface="Calibri" pitchFamily="34" charset="-120"/>
+              </a:rPr>
+              <a:t>Thema</a:t>
+            </a:r>
+            <a:endParaRPr lang="en-US" sz="2700" dirty="0"/>
+          </a:p>
+        </p:txBody>
+      </p:sp>
+      <p:sp>
+        <p:nvSpPr>
+          <p:cNvPr id="16" name="Text 14"/>
+          <p:cNvSpPr txBox="1"/>
+          <p:nvPr/>
+        </p:nvSpPr>
+        <p:spPr>
+          <a:xfrm>
+            <a:off x="3611880" y="3246120"/>
             <a:ext cx="5120640" cy="566928"/>
           </a:xfrm>
           <a:prstGeom prst="rect">
@@ -16607,22 +17981,65 @@
                 <a:ea typeface="Calibri" pitchFamily="34" charset="-122"/>
                 <a:cs typeface="Calibri" pitchFamily="34" charset="-120"/>
               </a:rPr>
-              <a:t>Gedicht</a:t>
-            </a:r>
-            <a:endParaRPr lang="en-US" sz="2700" dirty="0"/>
-          </a:p>
-        </p:txBody>
-      </p:sp>
-      <p:sp>
-        <p:nvSpPr>
-          <p:cNvPr id="13" name="Text 11"/>
-          <p:cNvSpPr txBox="1"/>
-          <p:nvPr/>
-        </p:nvSpPr>
-        <p:spPr>
-          <a:xfrm>
-            <a:off x="411480" y="2560320"/>
+              <a:t>Worum geht es?</a:t>
+            </a:r>
+            <a:endParaRPr lang="en-US" sz="2700" dirty="0"/>
+          </a:p>
+        </p:txBody>
+      </p:sp>
+      <p:sp>
+        <p:nvSpPr>
+          <p:cNvPr id="17" name="Text 15"/>
+          <p:cNvSpPr txBox="1"/>
+          <p:nvPr/>
+        </p:nvSpPr>
+        <p:spPr>
+          <a:xfrm>
+            <a:off x="411480" y="3931920"/>
             <a:ext cx="3017520" cy="566928"/>
+          </a:xfrm>
+          <a:prstGeom prst="roundRect">
+            <a:avLst>
+              <a:gd name="adj" fmla="val 12903"/>
+            </a:avLst>
+          </a:prstGeom>
+          <a:solidFill>
+            <a:srgbClr val="AD4426"/>
+          </a:solidFill>
+          <a:ln/>
+        </p:spPr>
+        <p:txBody>
+          <a:bodyPr wrap="square" lIns="0" tIns="0" rIns="0" bIns="0" rtlCol="0" anchor="ctr"/>
+          <a:lstStyle/>
+          <a:p>
+            <a:pPr algn="ctr" indent="0" marL="0">
+              <a:buNone/>
+            </a:pPr>
+            <a:r>
+              <a:rPr lang="en-US" sz="2700" b="1" dirty="0">
+                <a:solidFill>
+                  <a:srgbClr val="FFFFFF"/>
+                </a:solidFill>
+                <a:latin typeface="Calibri" pitchFamily="34" charset="0"/>
+                <a:ea typeface="Calibri" pitchFamily="34" charset="-122"/>
+                <a:cs typeface="Calibri" pitchFamily="34" charset="-120"/>
+              </a:rPr>
+              <a:t>Adressat</a:t>
+            </a:r>
+            <a:endParaRPr lang="en-US" sz="2700" dirty="0"/>
+          </a:p>
+        </p:txBody>
+      </p:sp>
+      <p:sp>
+        <p:nvSpPr>
+          <p:cNvPr id="18" name="Text 16"/>
+          <p:cNvSpPr txBox="1"/>
+          <p:nvPr/>
+        </p:nvSpPr>
+        <p:spPr>
+          <a:xfrm>
+            <a:off x="3611880" y="3931920"/>
+            <a:ext cx="5120640" cy="566928"/>
           </a:xfrm>
           <a:prstGeom prst="rect">
             <a:avLst/>
@@ -16638,45 +18055,6 @@
               <a:buNone/>
             </a:pPr>
             <a:r>
-              <a:rPr lang="en-US" sz="2700" b="1" dirty="0">
-                <a:solidFill>
-                  <a:srgbClr val="AD4426"/>
-                </a:solidFill>
-                <a:latin typeface="Calibri" pitchFamily="34" charset="0"/>
-                <a:ea typeface="Calibri" pitchFamily="34" charset="-122"/>
-                <a:cs typeface="Calibri" pitchFamily="34" charset="-120"/>
-              </a:rPr>
-              <a:t>Entstehungszeit</a:t>
-            </a:r>
-            <a:endParaRPr lang="en-US" sz="2700" dirty="0"/>
-          </a:p>
-        </p:txBody>
-      </p:sp>
-      <p:sp>
-        <p:nvSpPr>
-          <p:cNvPr id="14" name="Text 12"/>
-          <p:cNvSpPr txBox="1"/>
-          <p:nvPr/>
-        </p:nvSpPr>
-        <p:spPr>
-          <a:xfrm>
-            <a:off x="3611880" y="2560320"/>
-            <a:ext cx="5120640" cy="566928"/>
-          </a:xfrm>
-          <a:prstGeom prst="rect">
-            <a:avLst/>
-          </a:prstGeom>
-          <a:noFill/>
-          <a:ln/>
-        </p:spPr>
-        <p:txBody>
-          <a:bodyPr wrap="square" lIns="0" tIns="0" rIns="0" bIns="0" rtlCol="0" anchor="ctr"/>
-          <a:lstStyle/>
-          <a:p>
-            <a:pPr indent="0" marL="0">
-              <a:buNone/>
-            </a:pPr>
-            <a:r>
               <a:rPr lang="en-US" sz="2700" dirty="0">
                 <a:solidFill>
                   <a:srgbClr val="2B2318"/>
@@ -16685,163 +18063,7 @@
                 <a:ea typeface="Calibri" pitchFamily="34" charset="-122"/>
                 <a:cs typeface="Calibri" pitchFamily="34" charset="-120"/>
               </a:rPr>
-              <a:t>um 590 v. Chr.</a:t>
-            </a:r>
-            <a:endParaRPr lang="en-US" sz="2700" dirty="0"/>
-          </a:p>
-        </p:txBody>
-      </p:sp>
-      <p:sp>
-        <p:nvSpPr>
-          <p:cNvPr id="15" name="Text 13"/>
-          <p:cNvSpPr txBox="1"/>
-          <p:nvPr/>
-        </p:nvSpPr>
-        <p:spPr>
-          <a:xfrm>
-            <a:off x="411480" y="3246120"/>
-            <a:ext cx="3017520" cy="566928"/>
-          </a:xfrm>
-          <a:prstGeom prst="rect">
-            <a:avLst/>
-          </a:prstGeom>
-          <a:noFill/>
-          <a:ln/>
-        </p:spPr>
-        <p:txBody>
-          <a:bodyPr wrap="square" lIns="0" tIns="0" rIns="0" bIns="0" rtlCol="0" anchor="ctr"/>
-          <a:lstStyle/>
-          <a:p>
-            <a:pPr indent="0" marL="0">
-              <a:buNone/>
-            </a:pPr>
-            <a:r>
-              <a:rPr lang="en-US" sz="2700" b="1" dirty="0">
-                <a:solidFill>
-                  <a:srgbClr val="AD4426"/>
-                </a:solidFill>
-                <a:latin typeface="Calibri" pitchFamily="34" charset="0"/>
-                <a:ea typeface="Calibri" pitchFamily="34" charset="-122"/>
-                <a:cs typeface="Calibri" pitchFamily="34" charset="-120"/>
-              </a:rPr>
-              <a:t>Adressat</a:t>
-            </a:r>
-            <a:endParaRPr lang="en-US" sz="2700" dirty="0"/>
-          </a:p>
-        </p:txBody>
-      </p:sp>
-      <p:sp>
-        <p:nvSpPr>
-          <p:cNvPr id="16" name="Text 14"/>
-          <p:cNvSpPr txBox="1"/>
-          <p:nvPr/>
-        </p:nvSpPr>
-        <p:spPr>
-          <a:xfrm>
-            <a:off x="3611880" y="3246120"/>
-            <a:ext cx="5120640" cy="566928"/>
-          </a:xfrm>
-          <a:prstGeom prst="rect">
-            <a:avLst/>
-          </a:prstGeom>
-          <a:noFill/>
-          <a:ln/>
-        </p:spPr>
-        <p:txBody>
-          <a:bodyPr wrap="square" lIns="0" tIns="0" rIns="0" bIns="0" rtlCol="0" anchor="ctr"/>
-          <a:lstStyle/>
-          <a:p>
-            <a:pPr indent="0" marL="0">
-              <a:buNone/>
-            </a:pPr>
-            <a:r>
-              <a:rPr lang="en-US" sz="2700" dirty="0">
-                <a:solidFill>
-                  <a:srgbClr val="2B2318"/>
-                </a:solidFill>
-                <a:latin typeface="Calibri" pitchFamily="34" charset="0"/>
-                <a:ea typeface="Calibri" pitchFamily="34" charset="-122"/>
-                <a:cs typeface="Calibri" pitchFamily="34" charset="-120"/>
-              </a:rPr>
-              <a:t>die Athener</a:t>
-            </a:r>
-            <a:endParaRPr lang="en-US" sz="2700" dirty="0"/>
-          </a:p>
-        </p:txBody>
-      </p:sp>
-      <p:sp>
-        <p:nvSpPr>
-          <p:cNvPr id="17" name="Text 15"/>
-          <p:cNvSpPr txBox="1"/>
-          <p:nvPr/>
-        </p:nvSpPr>
-        <p:spPr>
-          <a:xfrm>
-            <a:off x="411480" y="3931920"/>
-            <a:ext cx="3017520" cy="566928"/>
-          </a:xfrm>
-          <a:prstGeom prst="rect">
-            <a:avLst/>
-          </a:prstGeom>
-          <a:noFill/>
-          <a:ln/>
-        </p:spPr>
-        <p:txBody>
-          <a:bodyPr wrap="square" lIns="0" tIns="0" rIns="0" bIns="0" rtlCol="0" anchor="ctr"/>
-          <a:lstStyle/>
-          <a:p>
-            <a:pPr indent="0" marL="0">
-              <a:buNone/>
-            </a:pPr>
-            <a:r>
-              <a:rPr lang="en-US" sz="2700" b="1" dirty="0">
-                <a:solidFill>
-                  <a:srgbClr val="AD4426"/>
-                </a:solidFill>
-                <a:latin typeface="Calibri" pitchFamily="34" charset="0"/>
-                <a:ea typeface="Calibri" pitchFamily="34" charset="-122"/>
-                <a:cs typeface="Calibri" pitchFamily="34" charset="-120"/>
-              </a:rPr>
-              <a:t>Thema</a:t>
-            </a:r>
-            <a:endParaRPr lang="en-US" sz="2700" dirty="0"/>
-          </a:p>
-        </p:txBody>
-      </p:sp>
-      <p:sp>
-        <p:nvSpPr>
-          <p:cNvPr id="18" name="Text 16"/>
-          <p:cNvSpPr txBox="1"/>
-          <p:nvPr/>
-        </p:nvSpPr>
-        <p:spPr>
-          <a:xfrm>
-            <a:off x="3611880" y="3931920"/>
-            <a:ext cx="5120640" cy="566928"/>
-          </a:xfrm>
-          <a:prstGeom prst="rect">
-            <a:avLst/>
-          </a:prstGeom>
-          <a:noFill/>
-          <a:ln/>
-        </p:spPr>
-        <p:txBody>
-          <a:bodyPr wrap="square" lIns="0" tIns="0" rIns="0" bIns="0" rtlCol="0" anchor="ctr"/>
-          <a:lstStyle/>
-          <a:p>
-            <a:pPr indent="0" marL="0">
-              <a:buNone/>
-            </a:pPr>
-            <a:r>
-              <a:rPr lang="en-US" sz="2700" dirty="0">
-                <a:solidFill>
-                  <a:srgbClr val="2B2318"/>
-                </a:solidFill>
-                <a:latin typeface="Calibri" pitchFamily="34" charset="0"/>
-                <a:ea typeface="Calibri" pitchFamily="34" charset="-122"/>
-                <a:cs typeface="Calibri" pitchFamily="34" charset="-120"/>
-              </a:rPr>
-              <a:t>Rechtfertigung seiner Reformen</a:t>
+              <a:t>Für wen gedacht?</a:t>
             </a:r>
             <a:endParaRPr lang="en-US" sz="2700" dirty="0"/>
           </a:p>

--- a/Geschichte_11/Doppelstunde_Test_Quellenanalyse/Folien_Quellenanalyse.pptx
+++ b/Geschichte_11/Doppelstunde_Test_Quellenanalyse/Folien_Quellenanalyse.pptx
@@ -2201,7 +2201,7 @@
           <a:p>
             <a:r>
               <a:rPr lang="en-US" dirty="0"/>
-              <a:t>43–44 Min. Weitere gute Antworten: Textart, Zeit und Ort sowie Adressat fehlen; „Demokratie eingeführt“ steht so nicht in der Quelle.</a:t>
+              <a:t>43–44 Min. Weitere gute Antworten: TATTE(A)-Angaben fehlen (Titel, Textsorte, Entstehung, Adressat); „Demokratie eingeführt“ steht so nicht in der Quelle.</a:t>
             </a:r>
             <a:endParaRPr lang="en-US" dirty="0"/>
           </a:p>
@@ -3945,8 +3945,8 @@
         </p:nvSpPr>
         <p:spPr>
           <a:xfrm>
-            <a:off x="411480" y="1188720"/>
-            <a:ext cx="3017520" cy="566928"/>
+            <a:off x="411480" y="1170432"/>
+            <a:ext cx="3017520" cy="530352"/>
           </a:xfrm>
           <a:prstGeom prst="rect">
             <a:avLst/>
@@ -3970,7 +3970,7 @@
                 <a:ea typeface="Calibri" pitchFamily="34" charset="-122"/>
                 <a:cs typeface="Calibri" pitchFamily="34" charset="-120"/>
               </a:rPr>
-              <a:t>Autor</a:t>
+              <a:t>Titel</a:t>
             </a:r>
             <a:endParaRPr lang="en-US" sz="2700" dirty="0"/>
           </a:p>
@@ -3984,8 +3984,8 @@
         </p:nvSpPr>
         <p:spPr>
           <a:xfrm>
-            <a:off x="3611880" y="1188720"/>
-            <a:ext cx="5120640" cy="566928"/>
+            <a:off x="3611880" y="1170432"/>
+            <a:ext cx="5120640" cy="530352"/>
           </a:xfrm>
           <a:prstGeom prst="rect">
             <a:avLst/>
@@ -4009,7 +4009,7 @@
                 <a:ea typeface="Calibri" pitchFamily="34" charset="-122"/>
                 <a:cs typeface="Calibri" pitchFamily="34" charset="-120"/>
               </a:rPr>
-              <a:t>Solon, Archon und Gesetzgeber Athens</a:t>
+              <a:t>ohne Titel (Fragment)</a:t>
             </a:r>
             <a:endParaRPr lang="en-US" sz="2700" dirty="0"/>
           </a:p>
@@ -4023,8 +4023,8 @@
         </p:nvSpPr>
         <p:spPr>
           <a:xfrm>
-            <a:off x="411480" y="1874520"/>
-            <a:ext cx="3017520" cy="566928"/>
+            <a:off x="411480" y="1773936"/>
+            <a:ext cx="3017520" cy="530352"/>
           </a:xfrm>
           <a:prstGeom prst="rect">
             <a:avLst/>
@@ -4048,7 +4048,7 @@
                 <a:ea typeface="Calibri" pitchFamily="34" charset="-122"/>
                 <a:cs typeface="Calibri" pitchFamily="34" charset="-120"/>
               </a:rPr>
-              <a:t>Zeit und Ort</a:t>
+              <a:t>Autor</a:t>
             </a:r>
             <a:endParaRPr lang="en-US" sz="2700" dirty="0"/>
           </a:p>
@@ -4062,8 +4062,8 @@
         </p:nvSpPr>
         <p:spPr>
           <a:xfrm>
-            <a:off x="3611880" y="1874520"/>
-            <a:ext cx="5120640" cy="566928"/>
+            <a:off x="3611880" y="1773936"/>
+            <a:ext cx="5120640" cy="530352"/>
           </a:xfrm>
           <a:prstGeom prst="rect">
             <a:avLst/>
@@ -4087,7 +4087,7 @@
                 <a:ea typeface="Calibri" pitchFamily="34" charset="-122"/>
                 <a:cs typeface="Calibri" pitchFamily="34" charset="-120"/>
               </a:rPr>
-              <a:t>um 590 v. Chr. in Athen</a:t>
+              <a:t>Solon, Gesetzgeber Athens</a:t>
             </a:r>
             <a:endParaRPr lang="en-US" sz="2700" dirty="0"/>
           </a:p>
@@ -4101,8 +4101,8 @@
         </p:nvSpPr>
         <p:spPr>
           <a:xfrm>
-            <a:off x="411480" y="2560320"/>
-            <a:ext cx="3017520" cy="566928"/>
+            <a:off x="411480" y="2377440"/>
+            <a:ext cx="3017520" cy="530352"/>
           </a:xfrm>
           <a:prstGeom prst="rect">
             <a:avLst/>
@@ -4126,7 +4126,7 @@
                 <a:ea typeface="Calibri" pitchFamily="34" charset="-122"/>
                 <a:cs typeface="Calibri" pitchFamily="34" charset="-120"/>
               </a:rPr>
-              <a:t>Textart</a:t>
+              <a:t>Textsorte</a:t>
             </a:r>
             <a:endParaRPr lang="en-US" sz="2700" dirty="0"/>
           </a:p>
@@ -4140,8 +4140,8 @@
         </p:nvSpPr>
         <p:spPr>
           <a:xfrm>
-            <a:off x="3611880" y="2560320"/>
-            <a:ext cx="5120640" cy="566928"/>
+            <a:off x="3611880" y="2377440"/>
+            <a:ext cx="5120640" cy="530352"/>
           </a:xfrm>
           <a:prstGeom prst="rect">
             <a:avLst/>
@@ -4179,8 +4179,8 @@
         </p:nvSpPr>
         <p:spPr>
           <a:xfrm>
-            <a:off x="411480" y="3246120"/>
-            <a:ext cx="3017520" cy="566928"/>
+            <a:off x="411480" y="2980944"/>
+            <a:ext cx="3017520" cy="530352"/>
           </a:xfrm>
           <a:prstGeom prst="rect">
             <a:avLst/>
@@ -4218,8 +4218,8 @@
         </p:nvSpPr>
         <p:spPr>
           <a:xfrm>
-            <a:off x="3611880" y="3246120"/>
-            <a:ext cx="5120640" cy="566928"/>
+            <a:off x="3611880" y="2980944"/>
+            <a:ext cx="5120640" cy="530352"/>
           </a:xfrm>
           <a:prstGeom prst="rect">
             <a:avLst/>
@@ -4257,8 +4257,8 @@
         </p:nvSpPr>
         <p:spPr>
           <a:xfrm>
-            <a:off x="411480" y="3931920"/>
-            <a:ext cx="3017520" cy="566928"/>
+            <a:off x="411480" y="3584448"/>
+            <a:ext cx="3017520" cy="530352"/>
           </a:xfrm>
           <a:prstGeom prst="rect">
             <a:avLst/>
@@ -4282,6 +4282,84 @@
                 <a:ea typeface="Calibri" pitchFamily="34" charset="-122"/>
                 <a:cs typeface="Calibri" pitchFamily="34" charset="-120"/>
               </a:rPr>
+              <a:t>Entstehung</a:t>
+            </a:r>
+            <a:endParaRPr lang="en-US" sz="2700" dirty="0"/>
+          </a:p>
+        </p:txBody>
+      </p:sp>
+      <p:sp>
+        <p:nvSpPr>
+          <p:cNvPr id="18" name="Text 16"/>
+          <p:cNvSpPr txBox="1"/>
+          <p:nvPr/>
+        </p:nvSpPr>
+        <p:spPr>
+          <a:xfrm>
+            <a:off x="3611880" y="3584448"/>
+            <a:ext cx="5120640" cy="530352"/>
+          </a:xfrm>
+          <a:prstGeom prst="rect">
+            <a:avLst/>
+          </a:prstGeom>
+          <a:noFill/>
+          <a:ln/>
+        </p:spPr>
+        <p:txBody>
+          <a:bodyPr wrap="square" lIns="0" tIns="0" rIns="0" bIns="0" rtlCol="0" anchor="ctr"/>
+          <a:lstStyle/>
+          <a:p>
+            <a:pPr indent="0" marL="0">
+              <a:buNone/>
+            </a:pPr>
+            <a:r>
+              <a:rPr lang="en-US" sz="2700" dirty="0">
+                <a:solidFill>
+                  <a:srgbClr val="2B2318"/>
+                </a:solidFill>
+                <a:latin typeface="Calibri" pitchFamily="34" charset="0"/>
+                <a:ea typeface="Calibri" pitchFamily="34" charset="-122"/>
+                <a:cs typeface="Calibri" pitchFamily="34" charset="-120"/>
+              </a:rPr>
+              <a:t>um 590 v. Chr. in Athen</a:t>
+            </a:r>
+            <a:endParaRPr lang="en-US" sz="2700" dirty="0"/>
+          </a:p>
+        </p:txBody>
+      </p:sp>
+      <p:sp>
+        <p:nvSpPr>
+          <p:cNvPr id="19" name="Text 17"/>
+          <p:cNvSpPr txBox="1"/>
+          <p:nvPr/>
+        </p:nvSpPr>
+        <p:spPr>
+          <a:xfrm>
+            <a:off x="411480" y="4187952"/>
+            <a:ext cx="3017520" cy="530352"/>
+          </a:xfrm>
+          <a:prstGeom prst="rect">
+            <a:avLst/>
+          </a:prstGeom>
+          <a:noFill/>
+          <a:ln/>
+        </p:spPr>
+        <p:txBody>
+          <a:bodyPr wrap="square" lIns="0" tIns="0" rIns="0" bIns="0" rtlCol="0" anchor="ctr"/>
+          <a:lstStyle/>
+          <a:p>
+            <a:pPr indent="0" marL="0">
+              <a:buNone/>
+            </a:pPr>
+            <a:r>
+              <a:rPr lang="en-US" sz="2700" b="1" dirty="0">
+                <a:solidFill>
+                  <a:srgbClr val="AD4426"/>
+                </a:solidFill>
+                <a:latin typeface="Calibri" pitchFamily="34" charset="0"/>
+                <a:ea typeface="Calibri" pitchFamily="34" charset="-122"/>
+                <a:cs typeface="Calibri" pitchFamily="34" charset="-120"/>
+              </a:rPr>
               <a:t>Adressat</a:t>
             </a:r>
             <a:endParaRPr lang="en-US" sz="2700" dirty="0"/>
@@ -4290,14 +4368,14 @@
       </p:sp>
       <p:sp>
         <p:nvSpPr>
-          <p:cNvPr id="18" name="Text 16"/>
-          <p:cNvSpPr txBox="1"/>
-          <p:nvPr/>
-        </p:nvSpPr>
-        <p:spPr>
-          <a:xfrm>
-            <a:off x="3611880" y="3931920"/>
-            <a:ext cx="5120640" cy="566928"/>
+          <p:cNvPr id="20" name="Text 18"/>
+          <p:cNvSpPr txBox="1"/>
+          <p:nvPr/>
+        </p:nvSpPr>
+        <p:spPr>
+          <a:xfrm>
+            <a:off x="3611880" y="4187952"/>
+            <a:ext cx="5120640" cy="530352"/>
           </a:xfrm>
           <a:prstGeom prst="rect">
             <a:avLst/>
@@ -4764,7 +4842,7 @@
                 <a:ea typeface="Calibri" pitchFamily="34" charset="-122"/>
                 <a:cs typeface="Calibri" pitchFamily="34" charset="-120"/>
               </a:rPr>
-              <a:t>„Bei der Quelle handelt es sich um ein Gedicht des athenischen Gesetzgebers Solon, das um 590 v. Chr. in Athen entstand. Er wendet sich an die Athener und rechtfertigt seine Reformen.“</a:t>
+              <a:t>„Bei der Quelle handelt es sich um ein Gedicht ohne Titel des athenischen Gesetzgebers Solon, das um 590 v. Chr. in Athen entstand. Er wendet sich an die Athener und rechtfertigt seine Reformen.“</a:t>
             </a:r>
             <a:endParaRPr lang="en-US" sz="2700" dirty="0"/>
           </a:p>
@@ -5367,7 +5445,7 @@
                 <a:ea typeface="Calibri" pitchFamily="34" charset="-122"/>
                 <a:cs typeface="Calibri" pitchFamily="34" charset="-120"/>
               </a:rPr>
-              <a:t>Fülle die fünf Felder in 2a aus.</a:t>
+              <a:t>Fülle die sechs TATTE(A)-Felder in 2a aus.</a:t>
             </a:r>
             <a:endParaRPr lang="en-US" sz="2700" dirty="0"/>
           </a:p>
@@ -17610,7 +17688,7 @@
                 <a:ea typeface="Cambria" pitchFamily="34" charset="-122"/>
                 <a:cs typeface="Cambria" pitchFamily="34" charset="-120"/>
               </a:rPr>
-              <a:t>2a Formale Aspekte</a:t>
+              <a:t>2a TATTE(A)</a:t>
             </a:r>
             <a:endParaRPr lang="en-US" sz="3600" dirty="0"/>
           </a:p>
@@ -17667,12 +17745,12 @@
         </p:nvSpPr>
         <p:spPr>
           <a:xfrm>
-            <a:off x="411480" y="1188720"/>
-            <a:ext cx="3017520" cy="566928"/>
-          </a:xfrm>
-          <a:prstGeom prst="roundRect">
-            <a:avLst>
-              <a:gd name="adj" fmla="val 12903"/>
+            <a:off x="411480" y="1170432"/>
+            <a:ext cx="3017520" cy="530352"/>
+          </a:xfrm>
+          <a:prstGeom prst="roundRect">
+            <a:avLst>
+              <a:gd name="adj" fmla="val 13793"/>
             </a:avLst>
           </a:prstGeom>
           <a:solidFill>
@@ -17681,10 +17759,10 @@
           <a:ln/>
         </p:spPr>
         <p:txBody>
-          <a:bodyPr wrap="square" lIns="0" tIns="0" rIns="0" bIns="0" rtlCol="0" anchor="ctr"/>
-          <a:lstStyle/>
-          <a:p>
-            <a:pPr algn="ctr" indent="0" marL="0">
+          <a:bodyPr wrap="square" lIns="0" tIns="101600" rIns="0" bIns="0" rtlCol="0" anchor="ctr"/>
+          <a:lstStyle/>
+          <a:p>
+            <a:pPr algn="l" indent="0" marL="0">
               <a:buNone/>
             </a:pPr>
             <a:r>
@@ -17696,7 +17774,7 @@
                 <a:ea typeface="Calibri" pitchFamily="34" charset="-122"/>
                 <a:cs typeface="Calibri" pitchFamily="34" charset="-120"/>
               </a:rPr>
-              <a:t>Autor</a:t>
+              <a:t>T  Titel</a:t>
             </a:r>
             <a:endParaRPr lang="en-US" sz="2700" dirty="0"/>
           </a:p>
@@ -17710,8 +17788,8 @@
         </p:nvSpPr>
         <p:spPr>
           <a:xfrm>
-            <a:off x="3611880" y="1188720"/>
-            <a:ext cx="5120640" cy="566928"/>
+            <a:off x="3611880" y="1170432"/>
+            <a:ext cx="5120640" cy="530352"/>
           </a:xfrm>
           <a:prstGeom prst="rect">
             <a:avLst/>
@@ -17735,7 +17813,7 @@
                 <a:ea typeface="Calibri" pitchFamily="34" charset="-122"/>
                 <a:cs typeface="Calibri" pitchFamily="34" charset="-120"/>
               </a:rPr>
-              <a:t>Wer? Amt, Stellung?</a:t>
+              <a:t>Wie heißt der Text?</a:t>
             </a:r>
             <a:endParaRPr lang="en-US" sz="2700" dirty="0"/>
           </a:p>
@@ -17749,12 +17827,12 @@
         </p:nvSpPr>
         <p:spPr>
           <a:xfrm>
-            <a:off x="411480" y="1874520"/>
-            <a:ext cx="3017520" cy="566928"/>
-          </a:xfrm>
-          <a:prstGeom prst="roundRect">
-            <a:avLst>
-              <a:gd name="adj" fmla="val 12903"/>
+            <a:off x="411480" y="1773936"/>
+            <a:ext cx="3017520" cy="530352"/>
+          </a:xfrm>
+          <a:prstGeom prst="roundRect">
+            <a:avLst>
+              <a:gd name="adj" fmla="val 13793"/>
             </a:avLst>
           </a:prstGeom>
           <a:solidFill>
@@ -17763,10 +17841,10 @@
           <a:ln/>
         </p:spPr>
         <p:txBody>
-          <a:bodyPr wrap="square" lIns="0" tIns="0" rIns="0" bIns="0" rtlCol="0" anchor="ctr"/>
-          <a:lstStyle/>
-          <a:p>
-            <a:pPr algn="ctr" indent="0" marL="0">
+          <a:bodyPr wrap="square" lIns="0" tIns="101600" rIns="0" bIns="0" rtlCol="0" anchor="ctr"/>
+          <a:lstStyle/>
+          <a:p>
+            <a:pPr algn="l" indent="0" marL="0">
               <a:buNone/>
             </a:pPr>
             <a:r>
@@ -17778,7 +17856,7 @@
                 <a:ea typeface="Calibri" pitchFamily="34" charset="-122"/>
                 <a:cs typeface="Calibri" pitchFamily="34" charset="-120"/>
               </a:rPr>
-              <a:t>Zeit und Ort</a:t>
+              <a:t>A  Autor</a:t>
             </a:r>
             <a:endParaRPr lang="en-US" sz="2700" dirty="0"/>
           </a:p>
@@ -17792,8 +17870,8 @@
         </p:nvSpPr>
         <p:spPr>
           <a:xfrm>
-            <a:off x="3611880" y="1874520"/>
-            <a:ext cx="5120640" cy="566928"/>
+            <a:off x="3611880" y="1773936"/>
+            <a:ext cx="5120640" cy="530352"/>
           </a:xfrm>
           <a:prstGeom prst="rect">
             <a:avLst/>
@@ -17817,7 +17895,7 @@
                 <a:ea typeface="Calibri" pitchFamily="34" charset="-122"/>
                 <a:cs typeface="Calibri" pitchFamily="34" charset="-120"/>
               </a:rPr>
-              <a:t>Wann und wo entstanden?</a:t>
+              <a:t>Wer? Amt, Stellung?</a:t>
             </a:r>
             <a:endParaRPr lang="en-US" sz="2700" dirty="0"/>
           </a:p>
@@ -17831,12 +17909,12 @@
         </p:nvSpPr>
         <p:spPr>
           <a:xfrm>
-            <a:off x="411480" y="2560320"/>
-            <a:ext cx="3017520" cy="566928"/>
-          </a:xfrm>
-          <a:prstGeom prst="roundRect">
-            <a:avLst>
-              <a:gd name="adj" fmla="val 12903"/>
+            <a:off x="411480" y="2377440"/>
+            <a:ext cx="3017520" cy="530352"/>
+          </a:xfrm>
+          <a:prstGeom prst="roundRect">
+            <a:avLst>
+              <a:gd name="adj" fmla="val 13793"/>
             </a:avLst>
           </a:prstGeom>
           <a:solidFill>
@@ -17845,10 +17923,10 @@
           <a:ln/>
         </p:spPr>
         <p:txBody>
-          <a:bodyPr wrap="square" lIns="0" tIns="0" rIns="0" bIns="0" rtlCol="0" anchor="ctr"/>
-          <a:lstStyle/>
-          <a:p>
-            <a:pPr algn="ctr" indent="0" marL="0">
+          <a:bodyPr wrap="square" lIns="0" tIns="101600" rIns="0" bIns="0" rtlCol="0" anchor="ctr"/>
+          <a:lstStyle/>
+          <a:p>
+            <a:pPr algn="l" indent="0" marL="0">
               <a:buNone/>
             </a:pPr>
             <a:r>
@@ -17860,7 +17938,7 @@
                 <a:ea typeface="Calibri" pitchFamily="34" charset="-122"/>
                 <a:cs typeface="Calibri" pitchFamily="34" charset="-120"/>
               </a:rPr>
-              <a:t>Textart</a:t>
+              <a:t>T  Textsorte</a:t>
             </a:r>
             <a:endParaRPr lang="en-US" sz="2700" dirty="0"/>
           </a:p>
@@ -17874,8 +17952,8 @@
         </p:nvSpPr>
         <p:spPr>
           <a:xfrm>
-            <a:off x="3611880" y="2560320"/>
-            <a:ext cx="5120640" cy="566928"/>
+            <a:off x="3611880" y="2377440"/>
+            <a:ext cx="5120640" cy="530352"/>
           </a:xfrm>
           <a:prstGeom prst="rect">
             <a:avLst/>
@@ -17913,12 +17991,12 @@
         </p:nvSpPr>
         <p:spPr>
           <a:xfrm>
-            <a:off x="411480" y="3246120"/>
-            <a:ext cx="3017520" cy="566928"/>
-          </a:xfrm>
-          <a:prstGeom prst="roundRect">
-            <a:avLst>
-              <a:gd name="adj" fmla="val 12903"/>
+            <a:off x="411480" y="2980944"/>
+            <a:ext cx="3017520" cy="530352"/>
+          </a:xfrm>
+          <a:prstGeom prst="roundRect">
+            <a:avLst>
+              <a:gd name="adj" fmla="val 13793"/>
             </a:avLst>
           </a:prstGeom>
           <a:solidFill>
@@ -17927,10 +18005,10 @@
           <a:ln/>
         </p:spPr>
         <p:txBody>
-          <a:bodyPr wrap="square" lIns="0" tIns="0" rIns="0" bIns="0" rtlCol="0" anchor="ctr"/>
-          <a:lstStyle/>
-          <a:p>
-            <a:pPr algn="ctr" indent="0" marL="0">
+          <a:bodyPr wrap="square" lIns="0" tIns="101600" rIns="0" bIns="0" rtlCol="0" anchor="ctr"/>
+          <a:lstStyle/>
+          <a:p>
+            <a:pPr algn="l" indent="0" marL="0">
               <a:buNone/>
             </a:pPr>
             <a:r>
@@ -17942,7 +18020,7 @@
                 <a:ea typeface="Calibri" pitchFamily="34" charset="-122"/>
                 <a:cs typeface="Calibri" pitchFamily="34" charset="-120"/>
               </a:rPr>
-              <a:t>Thema</a:t>
+              <a:t>T  Thema</a:t>
             </a:r>
             <a:endParaRPr lang="en-US" sz="2700" dirty="0"/>
           </a:p>
@@ -17956,8 +18034,8 @@
         </p:nvSpPr>
         <p:spPr>
           <a:xfrm>
-            <a:off x="3611880" y="3246120"/>
-            <a:ext cx="5120640" cy="566928"/>
+            <a:off x="3611880" y="2980944"/>
+            <a:ext cx="5120640" cy="530352"/>
           </a:xfrm>
           <a:prstGeom prst="rect">
             <a:avLst/>
@@ -17995,12 +18073,12 @@
         </p:nvSpPr>
         <p:spPr>
           <a:xfrm>
-            <a:off x="411480" y="3931920"/>
-            <a:ext cx="3017520" cy="566928"/>
-          </a:xfrm>
-          <a:prstGeom prst="roundRect">
-            <a:avLst>
-              <a:gd name="adj" fmla="val 12903"/>
+            <a:off x="411480" y="3584448"/>
+            <a:ext cx="3017520" cy="530352"/>
+          </a:xfrm>
+          <a:prstGeom prst="roundRect">
+            <a:avLst>
+              <a:gd name="adj" fmla="val 13793"/>
             </a:avLst>
           </a:prstGeom>
           <a:solidFill>
@@ -18009,10 +18087,10 @@
           <a:ln/>
         </p:spPr>
         <p:txBody>
-          <a:bodyPr wrap="square" lIns="0" tIns="0" rIns="0" bIns="0" rtlCol="0" anchor="ctr"/>
-          <a:lstStyle/>
-          <a:p>
-            <a:pPr algn="ctr" indent="0" marL="0">
+          <a:bodyPr wrap="square" lIns="0" tIns="101600" rIns="0" bIns="0" rtlCol="0" anchor="ctr"/>
+          <a:lstStyle/>
+          <a:p>
+            <a:pPr algn="l" indent="0" marL="0">
               <a:buNone/>
             </a:pPr>
             <a:r>
@@ -18024,7 +18102,7 @@
                 <a:ea typeface="Calibri" pitchFamily="34" charset="-122"/>
                 <a:cs typeface="Calibri" pitchFamily="34" charset="-120"/>
               </a:rPr>
-              <a:t>Adressat</a:t>
+              <a:t>E  Entstehung</a:t>
             </a:r>
             <a:endParaRPr lang="en-US" sz="2700" dirty="0"/>
           </a:p>
@@ -18038,8 +18116,90 @@
         </p:nvSpPr>
         <p:spPr>
           <a:xfrm>
-            <a:off x="3611880" y="3931920"/>
-            <a:ext cx="5120640" cy="566928"/>
+            <a:off x="3611880" y="3584448"/>
+            <a:ext cx="5120640" cy="530352"/>
+          </a:xfrm>
+          <a:prstGeom prst="rect">
+            <a:avLst/>
+          </a:prstGeom>
+          <a:noFill/>
+          <a:ln/>
+        </p:spPr>
+        <p:txBody>
+          <a:bodyPr wrap="square" lIns="0" tIns="0" rIns="0" bIns="0" rtlCol="0" anchor="ctr"/>
+          <a:lstStyle/>
+          <a:p>
+            <a:pPr indent="0" marL="0">
+              <a:buNone/>
+            </a:pPr>
+            <a:r>
+              <a:rPr lang="en-US" sz="2700" dirty="0">
+                <a:solidFill>
+                  <a:srgbClr val="2B2318"/>
+                </a:solidFill>
+                <a:latin typeface="Calibri" pitchFamily="34" charset="0"/>
+                <a:ea typeface="Calibri" pitchFamily="34" charset="-122"/>
+                <a:cs typeface="Calibri" pitchFamily="34" charset="-120"/>
+              </a:rPr>
+              <a:t>Wann und wo?</a:t>
+            </a:r>
+            <a:endParaRPr lang="en-US" sz="2700" dirty="0"/>
+          </a:p>
+        </p:txBody>
+      </p:sp>
+      <p:sp>
+        <p:nvSpPr>
+          <p:cNvPr id="19" name="Text 17"/>
+          <p:cNvSpPr txBox="1"/>
+          <p:nvPr/>
+        </p:nvSpPr>
+        <p:spPr>
+          <a:xfrm>
+            <a:off x="411480" y="4187952"/>
+            <a:ext cx="3017520" cy="530352"/>
+          </a:xfrm>
+          <a:prstGeom prst="roundRect">
+            <a:avLst>
+              <a:gd name="adj" fmla="val 13793"/>
+            </a:avLst>
+          </a:prstGeom>
+          <a:solidFill>
+            <a:srgbClr val="AD4426"/>
+          </a:solidFill>
+          <a:ln/>
+        </p:spPr>
+        <p:txBody>
+          <a:bodyPr wrap="square" lIns="0" tIns="101600" rIns="0" bIns="0" rtlCol="0" anchor="ctr"/>
+          <a:lstStyle/>
+          <a:p>
+            <a:pPr algn="l" indent="0" marL="0">
+              <a:buNone/>
+            </a:pPr>
+            <a:r>
+              <a:rPr lang="en-US" sz="2700" b="1" dirty="0">
+                <a:solidFill>
+                  <a:srgbClr val="FFFFFF"/>
+                </a:solidFill>
+                <a:latin typeface="Calibri" pitchFamily="34" charset="0"/>
+                <a:ea typeface="Calibri" pitchFamily="34" charset="-122"/>
+                <a:cs typeface="Calibri" pitchFamily="34" charset="-120"/>
+              </a:rPr>
+              <a:t>(A) Adressat</a:t>
+            </a:r>
+            <a:endParaRPr lang="en-US" sz="2700" dirty="0"/>
+          </a:p>
+        </p:txBody>
+      </p:sp>
+      <p:sp>
+        <p:nvSpPr>
+          <p:cNvPr id="20" name="Text 18"/>
+          <p:cNvSpPr txBox="1"/>
+          <p:nvPr/>
+        </p:nvSpPr>
+        <p:spPr>
+          <a:xfrm>
+            <a:off x="3611880" y="4187952"/>
+            <a:ext cx="5120640" cy="530352"/>
           </a:xfrm>
           <a:prstGeom prst="rect">
             <a:avLst/>

--- a/Geschichte_11/Doppelstunde_Test_Quellenanalyse/Folien_Quellenanalyse.pptx
+++ b/Geschichte_11/Doppelstunde_Test_Quellenanalyse/Folien_Quellenanalyse.pptx
@@ -2201,7 +2201,7 @@
           <a:p>
             <a:r>
               <a:rPr lang="en-US" dirty="0"/>
-              <a:t>43–44 Min. Weitere gute Antworten: TATTE(A)-Angaben fehlen (Titel, Textsorte, Entstehung, Adressat); „Demokratie eingeführt“ steht so nicht in der Quelle.</a:t>
+              <a:t>43–44 Min. Weitere gute Antworten: TATTEA-Angaben fehlen (Titel, Textsorte, Entstehung, Adressat); „Demokratie eingeführt“ steht so nicht in der Quelle.</a:t>
             </a:r>
             <a:endParaRPr lang="en-US" dirty="0"/>
           </a:p>
@@ -5445,7 +5445,7 @@
                 <a:ea typeface="Calibri" pitchFamily="34" charset="-122"/>
                 <a:cs typeface="Calibri" pitchFamily="34" charset="-120"/>
               </a:rPr>
-              <a:t>Fülle die sechs TATTE(A)-Felder in 2a aus.</a:t>
+              <a:t>Fülle die sechs TATTEA-Felder in 2a aus.</a:t>
             </a:r>
             <a:endParaRPr lang="en-US" sz="2700" dirty="0"/>
           </a:p>
@@ -17688,7 +17688,7 @@
                 <a:ea typeface="Cambria" pitchFamily="34" charset="-122"/>
                 <a:cs typeface="Cambria" pitchFamily="34" charset="-120"/>
               </a:rPr>
-              <a:t>2a TATTE(A)</a:t>
+              <a:t>2a TATTEA</a:t>
             </a:r>
             <a:endParaRPr lang="en-US" sz="3600" dirty="0"/>
           </a:p>
@@ -18184,7 +18184,7 @@
                 <a:ea typeface="Calibri" pitchFamily="34" charset="-122"/>
                 <a:cs typeface="Calibri" pitchFamily="34" charset="-120"/>
               </a:rPr>
-              <a:t>(A) Adressat</a:t>
+              <a:t>A  Adressat</a:t>
             </a:r>
             <a:endParaRPr lang="en-US" sz="2700" dirty="0"/>
           </a:p>
